--- a/slides/K8s.pptx
+++ b/slides/K8s.pptx
@@ -284,7 +284,7 @@
           <a:p>
             <a:fld id="{519BAEA6-88FC-4542-B3BF-F11A57CC5938}" type="datetimeFigureOut">
               <a:rPr lang="ru-RU" smtClean="0"/>
-              <a:t>14.07.2026</a:t>
+              <a:t>15.07.2026</a:t>
             </a:fld>
             <a:endParaRPr lang="ru-RU"/>
           </a:p>
@@ -482,7 +482,7 @@
           <a:p>
             <a:fld id="{519BAEA6-88FC-4542-B3BF-F11A57CC5938}" type="datetimeFigureOut">
               <a:rPr lang="ru-RU" smtClean="0"/>
-              <a:t>14.07.2026</a:t>
+              <a:t>15.07.2026</a:t>
             </a:fld>
             <a:endParaRPr lang="ru-RU"/>
           </a:p>
@@ -690,7 +690,7 @@
           <a:p>
             <a:fld id="{519BAEA6-88FC-4542-B3BF-F11A57CC5938}" type="datetimeFigureOut">
               <a:rPr lang="ru-RU" smtClean="0"/>
-              <a:t>14.07.2026</a:t>
+              <a:t>15.07.2026</a:t>
             </a:fld>
             <a:endParaRPr lang="ru-RU"/>
           </a:p>
@@ -888,7 +888,7 @@
           <a:p>
             <a:fld id="{519BAEA6-88FC-4542-B3BF-F11A57CC5938}" type="datetimeFigureOut">
               <a:rPr lang="ru-RU" smtClean="0"/>
-              <a:t>14.07.2026</a:t>
+              <a:t>15.07.2026</a:t>
             </a:fld>
             <a:endParaRPr lang="ru-RU"/>
           </a:p>
@@ -1163,7 +1163,7 @@
           <a:p>
             <a:fld id="{519BAEA6-88FC-4542-B3BF-F11A57CC5938}" type="datetimeFigureOut">
               <a:rPr lang="ru-RU" smtClean="0"/>
-              <a:t>14.07.2026</a:t>
+              <a:t>15.07.2026</a:t>
             </a:fld>
             <a:endParaRPr lang="ru-RU"/>
           </a:p>
@@ -1428,7 +1428,7 @@
           <a:p>
             <a:fld id="{519BAEA6-88FC-4542-B3BF-F11A57CC5938}" type="datetimeFigureOut">
               <a:rPr lang="ru-RU" smtClean="0"/>
-              <a:t>14.07.2026</a:t>
+              <a:t>15.07.2026</a:t>
             </a:fld>
             <a:endParaRPr lang="ru-RU"/>
           </a:p>
@@ -1840,7 +1840,7 @@
           <a:p>
             <a:fld id="{519BAEA6-88FC-4542-B3BF-F11A57CC5938}" type="datetimeFigureOut">
               <a:rPr lang="ru-RU" smtClean="0"/>
-              <a:t>14.07.2026</a:t>
+              <a:t>15.07.2026</a:t>
             </a:fld>
             <a:endParaRPr lang="ru-RU"/>
           </a:p>
@@ -1981,7 +1981,7 @@
           <a:p>
             <a:fld id="{519BAEA6-88FC-4542-B3BF-F11A57CC5938}" type="datetimeFigureOut">
               <a:rPr lang="ru-RU" smtClean="0"/>
-              <a:t>14.07.2026</a:t>
+              <a:t>15.07.2026</a:t>
             </a:fld>
             <a:endParaRPr lang="ru-RU"/>
           </a:p>
@@ -2094,7 +2094,7 @@
           <a:p>
             <a:fld id="{519BAEA6-88FC-4542-B3BF-F11A57CC5938}" type="datetimeFigureOut">
               <a:rPr lang="ru-RU" smtClean="0"/>
-              <a:t>14.07.2026</a:t>
+              <a:t>15.07.2026</a:t>
             </a:fld>
             <a:endParaRPr lang="ru-RU"/>
           </a:p>
@@ -2405,7 +2405,7 @@
           <a:p>
             <a:fld id="{519BAEA6-88FC-4542-B3BF-F11A57CC5938}" type="datetimeFigureOut">
               <a:rPr lang="ru-RU" smtClean="0"/>
-              <a:t>14.07.2026</a:t>
+              <a:t>15.07.2026</a:t>
             </a:fld>
             <a:endParaRPr lang="ru-RU"/>
           </a:p>
@@ -2693,7 +2693,7 @@
           <a:p>
             <a:fld id="{519BAEA6-88FC-4542-B3BF-F11A57CC5938}" type="datetimeFigureOut">
               <a:rPr lang="ru-RU" smtClean="0"/>
-              <a:t>14.07.2026</a:t>
+              <a:t>15.07.2026</a:t>
             </a:fld>
             <a:endParaRPr lang="ru-RU"/>
           </a:p>
@@ -2943,7 +2943,7 @@
           <a:p>
             <a:fld id="{519BAEA6-88FC-4542-B3BF-F11A57CC5938}" type="datetimeFigureOut">
               <a:rPr lang="ru-RU" smtClean="0"/>
-              <a:t>14.07.2026</a:t>
+              <a:t>15.07.2026</a:t>
             </a:fld>
             <a:endParaRPr lang="ru-RU"/>
           </a:p>
@@ -3480,18 +3480,42 @@
           <a:lstStyle/>
           <a:p>
             <a:r>
-              <a:rPr lang="ru-RU" dirty="0"/>
+              <a:rPr lang="ru-RU" b="1" dirty="0">
+                <a:solidFill>
+                  <a:schemeClr val="accent1">
+                    <a:lumMod val="75000"/>
+                  </a:schemeClr>
+                </a:solidFill>
+              </a:rPr>
               <a:t>Общие концепции</a:t>
             </a:r>
             <a:r>
-              <a:rPr lang="en-US" dirty="0"/>
+              <a:rPr lang="en-US" b="1" dirty="0">
+                <a:solidFill>
+                  <a:schemeClr val="accent1">
+                    <a:lumMod val="75000"/>
+                  </a:schemeClr>
+                </a:solidFill>
+              </a:rPr>
               <a:t>. </a:t>
             </a:r>
             <a:r>
-              <a:rPr lang="en-US" dirty="0" err="1"/>
+              <a:rPr lang="en-US" b="1" dirty="0" err="1">
+                <a:solidFill>
+                  <a:schemeClr val="accent1">
+                    <a:lumMod val="75000"/>
+                  </a:schemeClr>
+                </a:solidFill>
+              </a:rPr>
               <a:t>ReplicaSet</a:t>
             </a:r>
-            <a:endParaRPr lang="ru-RU" dirty="0"/>
+            <a:endParaRPr lang="ru-RU" b="1" dirty="0">
+              <a:solidFill>
+                <a:schemeClr val="accent1">
+                  <a:lumMod val="75000"/>
+                </a:schemeClr>
+              </a:solidFill>
+            </a:endParaRPr>
           </a:p>
         </p:txBody>
       </p:sp>
@@ -3527,7 +3551,23 @@
             </a:r>
             <a:r>
               <a:rPr lang="ru-RU" dirty="0"/>
-              <a:t> — низкоуровневый контроллер K8s, единственная задача которого — поддерживать стабильное количество идентичных подов (реплик) в кластере в любой момент времени.</a:t>
+              <a:t> – низкоуровневый контроллер </a:t>
+            </a:r>
+            <a:r>
+              <a:rPr lang="ru-RU" dirty="0" err="1"/>
+              <a:t>Kubernetes</a:t>
+            </a:r>
+            <a:r>
+              <a:rPr lang="ru-RU" dirty="0"/>
+              <a:t>, задача которого — постоянно поддерживать заданное количество одинаковых </a:t>
+            </a:r>
+            <a:r>
+              <a:rPr lang="ru-RU" dirty="0" err="1"/>
+              <a:t>Pod'ов</a:t>
+            </a:r>
+            <a:r>
+              <a:rPr lang="ru-RU" dirty="0"/>
+              <a:t> (реплик).</a:t>
             </a:r>
           </a:p>
           <a:p>
@@ -3536,14 +3576,41 @@
             </a:pPr>
             <a:r>
               <a:rPr lang="ru-RU" b="1" dirty="0"/>
-              <a:t>Как он понимает, какими подами управлять?</a:t>
-            </a:r>
-            <a:br>
-              <a:rPr lang="ru-RU" dirty="0"/>
-            </a:br>
+              <a:t>Как </a:t>
+            </a:r>
+            <a:r>
+              <a:rPr lang="ru-RU" b="1" dirty="0" err="1"/>
+              <a:t>ReplicaSet</a:t>
+            </a:r>
+            <a:r>
+              <a:rPr lang="ru-RU" b="1" dirty="0"/>
+              <a:t> понимает, какими </a:t>
+            </a:r>
+            <a:r>
+              <a:rPr lang="ru-RU" b="1" dirty="0" err="1"/>
+              <a:t>Pod'ами</a:t>
+            </a:r>
+            <a:r>
+              <a:rPr lang="ru-RU" b="1" dirty="0"/>
+              <a:t> управлять?</a:t>
+            </a:r>
+            <a:endParaRPr lang="ru-RU" dirty="0"/>
+          </a:p>
+          <a:p>
+            <a:pPr marL="0" indent="0">
+              <a:buNone/>
+            </a:pPr>
             <a:r>
               <a:rPr lang="ru-RU" dirty="0"/>
               <a:t>Через </a:t>
+            </a:r>
+            <a:r>
+              <a:rPr lang="ru-RU" b="1" dirty="0" err="1"/>
+              <a:t>Labels</a:t>
+            </a:r>
+            <a:r>
+              <a:rPr lang="ru-RU" dirty="0"/>
+              <a:t> и </a:t>
             </a:r>
             <a:r>
               <a:rPr lang="ru-RU" b="1" dirty="0" err="1"/>
@@ -3551,14 +3618,6 @@
             </a:r>
             <a:r>
               <a:rPr lang="ru-RU" dirty="0"/>
-              <a:t> и </a:t>
-            </a:r>
-            <a:r>
-              <a:rPr lang="ru-RU" b="1" dirty="0" err="1"/>
-              <a:t>Labels</a:t>
-            </a:r>
-            <a:r>
-              <a:rPr lang="ru-RU" dirty="0"/>
               <a:t>. В манифесте </a:t>
             </a:r>
             <a:r>
@@ -3583,7 +3642,23 @@
             </a:r>
             <a:r>
               <a:rPr lang="ru-RU" dirty="0"/>
-              <a:t>). Контроллер сканирует кластер и считает все поды с такой меткой.</a:t>
+              <a:t>). </a:t>
+            </a:r>
+            <a:r>
+              <a:rPr lang="ru-RU" dirty="0" err="1"/>
+              <a:t>ReplicaSet</a:t>
+            </a:r>
+            <a:r>
+              <a:rPr lang="ru-RU" dirty="0"/>
+              <a:t> находит все </a:t>
+            </a:r>
+            <a:r>
+              <a:rPr lang="ru-RU" dirty="0" err="1"/>
+              <a:t>Pod'ы</a:t>
+            </a:r>
+            <a:r>
+              <a:rPr lang="ru-RU" dirty="0"/>
+              <a:t> с этой меткой и считает их.</a:t>
             </a:r>
           </a:p>
           <a:p>
@@ -3600,7 +3675,15 @@
             </a:r>
             <a:r>
               <a:rPr lang="ru-RU" dirty="0"/>
-              <a:t>: 3, а по факту в кластере найдено только 2 пода с нужной меткой, </a:t>
+              <a:t>: 3, а в кластере найдено только два подходящих </a:t>
+            </a:r>
+            <a:r>
+              <a:rPr lang="ru-RU" dirty="0" err="1"/>
+              <a:t>Pod'а</a:t>
+            </a:r>
+            <a:r>
+              <a:rPr lang="ru-RU" dirty="0"/>
+              <a:t>, </a:t>
             </a:r>
             <a:r>
               <a:rPr lang="ru-RU" dirty="0" err="1"/>
@@ -3608,15 +3691,15 @@
             </a:r>
             <a:r>
               <a:rPr lang="ru-RU" dirty="0"/>
-              <a:t> обращается к </a:t>
-            </a:r>
-            <a:r>
-              <a:rPr lang="ru-RU" i="1" dirty="0" err="1"/>
-              <a:t>kube-apiserver</a:t>
-            </a:r>
-            <a:r>
-              <a:rPr lang="ru-RU" dirty="0"/>
-              <a:t> и запрашивает создание еще одного пода по шаблону (</a:t>
+              <a:t> через API Server запрашивает создание еще одного </a:t>
+            </a:r>
+            <a:r>
+              <a:rPr lang="ru-RU" dirty="0" err="1"/>
+              <a:t>Pod</a:t>
+            </a:r>
+            <a:r>
+              <a:rPr lang="ru-RU" dirty="0"/>
+              <a:t> по шаблону (</a:t>
             </a:r>
             <a:r>
               <a:rPr lang="ru-RU" dirty="0" err="1"/>
@@ -3633,7 +3716,7 @@
             </a:pPr>
             <a:r>
               <a:rPr lang="ru-RU" dirty="0"/>
-              <a:t>Манифест </a:t>
+              <a:t>Конфигурация </a:t>
             </a:r>
             <a:r>
               <a:rPr lang="ru-RU" dirty="0" err="1"/>
@@ -3641,17 +3724,24 @@
             </a:r>
             <a:r>
               <a:rPr lang="ru-RU" dirty="0"/>
-              <a:t> (его настройки, сколько копий должно быть, какие метки) записан в </a:t>
+              <a:t> (количество реплик, селекторы, шаблон </a:t>
+            </a:r>
+            <a:r>
+              <a:rPr lang="ru-RU" dirty="0" err="1"/>
+              <a:t>Pod</a:t>
+            </a:r>
+            <a:r>
+              <a:rPr lang="ru-RU" dirty="0"/>
+              <a:t> и другие настройки) хранится в </a:t>
             </a:r>
             <a:r>
               <a:rPr lang="ru-RU" b="1" dirty="0" err="1"/>
               <a:t>etcd</a:t>
             </a:r>
             <a:r>
-              <a:rPr lang="ru-RU" b="1" dirty="0"/>
+              <a:rPr lang="ru-RU" dirty="0"/>
               <a:t>.</a:t>
             </a:r>
-            <a:endParaRPr lang="ru-RU" dirty="0"/>
           </a:p>
           <a:p>
             <a:pPr marL="0" indent="0">
@@ -3659,7 +3749,7 @@
             </a:pPr>
             <a:r>
               <a:rPr lang="ru-RU" dirty="0"/>
-              <a:t>!! Сами по себе </a:t>
+              <a:t>В современных проектах </a:t>
             </a:r>
             <a:r>
               <a:rPr lang="ru-RU" dirty="0" err="1"/>
@@ -3667,23 +3757,62 @@
             </a:r>
             <a:r>
               <a:rPr lang="ru-RU" dirty="0"/>
-              <a:t>-ы в современной разработке руками не создаются и не </a:t>
+              <a:t> почти никогда не создают вручную. Обычно им управляет </a:t>
+            </a:r>
+            <a:r>
+              <a:rPr lang="ru-RU" b="1" dirty="0" err="1"/>
+              <a:t>Deployment</a:t>
+            </a:r>
+            <a:r>
+              <a:rPr lang="ru-RU" dirty="0"/>
+              <a:t>, который автоматически создает и обновляет </a:t>
             </a:r>
             <a:r>
               <a:rPr lang="ru-RU" dirty="0" err="1"/>
-              <a:t>деплоятся</a:t>
-            </a:r>
-            <a:r>
-              <a:rPr lang="ru-RU" dirty="0"/>
-              <a:t>. Они являются дочерними объектами </a:t>
-            </a:r>
-            <a:r>
-              <a:rPr lang="ru-RU" dirty="0" err="1"/>
-              <a:t>Deployment</a:t>
+              <a:t>ReplicaSet</a:t>
             </a:r>
             <a:r>
               <a:rPr lang="ru-RU" dirty="0"/>
               <a:t>.</a:t>
+            </a:r>
+          </a:p>
+        </p:txBody>
+      </p:sp>
+      <p:sp>
+        <p:nvSpPr>
+          <p:cNvPr id="3" name="TextBox 2">
+            <a:extLst>
+              <a:ext uri="{FF2B5EF4-FFF2-40B4-BE49-F238E27FC236}">
+                <a16:creationId xmlns:a16="http://schemas.microsoft.com/office/drawing/2014/main" id="{E711DD1D-B8DD-D48C-1819-5B4430F2A840}"/>
+              </a:ext>
+            </a:extLst>
+          </p:cNvPr>
+          <p:cNvSpPr txBox="1"/>
+          <p:nvPr/>
+        </p:nvSpPr>
+        <p:spPr>
+          <a:xfrm>
+            <a:off x="486822" y="5114670"/>
+            <a:ext cx="351378" cy="707886"/>
+          </a:xfrm>
+          <a:prstGeom prst="rect">
+            <a:avLst/>
+          </a:prstGeom>
+          <a:noFill/>
+        </p:spPr>
+        <p:txBody>
+          <a:bodyPr wrap="none" rtlCol="0">
+            <a:spAutoFit/>
+          </a:bodyPr>
+          <a:lstStyle/>
+          <a:p>
+            <a:r>
+              <a:rPr lang="ru-RU" sz="4000" dirty="0">
+                <a:solidFill>
+                  <a:srgbClr val="FF0000"/>
+                </a:solidFill>
+              </a:rPr>
+              <a:t>!</a:t>
             </a:r>
           </a:p>
         </p:txBody>
@@ -3746,14 +3875,32 @@
           <a:lstStyle/>
           <a:p>
             <a:r>
-              <a:rPr lang="ru-RU" dirty="0"/>
+              <a:rPr lang="ru-RU" b="1" dirty="0">
+                <a:solidFill>
+                  <a:schemeClr val="accent1">
+                    <a:lumMod val="75000"/>
+                  </a:schemeClr>
+                </a:solidFill>
+              </a:rPr>
               <a:t>Общие концепции</a:t>
             </a:r>
             <a:r>
-              <a:rPr lang="en-US" dirty="0"/>
+              <a:rPr lang="en-US" b="1" dirty="0">
+                <a:solidFill>
+                  <a:schemeClr val="accent1">
+                    <a:lumMod val="75000"/>
+                  </a:schemeClr>
+                </a:solidFill>
+              </a:rPr>
               <a:t>. Deployment</a:t>
             </a:r>
-            <a:endParaRPr lang="ru-RU" dirty="0"/>
+            <a:endParaRPr lang="ru-RU" b="1" dirty="0">
+              <a:solidFill>
+                <a:schemeClr val="accent1">
+                  <a:lumMod val="75000"/>
+                </a:schemeClr>
+              </a:solidFill>
+            </a:endParaRPr>
           </a:p>
         </p:txBody>
       </p:sp>
@@ -3789,15 +3936,30 @@
             </a:r>
             <a:r>
               <a:rPr lang="ru-RU" dirty="0"/>
-              <a:t> — это высокоуровневый объект (контроллер), который предоставляет декларативные обновления для подов и </a:t>
+              <a:t> – это высокоуровневый объект (контроллер), который управляет </a:t>
             </a:r>
             <a:r>
               <a:rPr lang="ru-RU" dirty="0" err="1"/>
-              <a:t>ReplicaSet-ов</a:t>
-            </a:r>
-            <a:r>
-              <a:rPr lang="ru-RU" dirty="0"/>
-              <a:t>. Когда разработчик обновляет приложение, он меняет конфигурацию именно в </a:t>
+              <a:t>ReplicaSet</a:t>
+            </a:r>
+            <a:r>
+              <a:rPr lang="ru-RU" dirty="0"/>
+              <a:t> и жизненным циклом приложения.</a:t>
+            </a:r>
+            <a:br>
+              <a:rPr lang="ru-RU" dirty="0"/>
+            </a:br>
+            <a:r>
+              <a:rPr lang="ru-RU" dirty="0"/>
+              <a:t>Когда разработчик выпускает новую версию приложения (например, меняет тег </a:t>
+            </a:r>
+            <a:r>
+              <a:rPr lang="ru-RU" dirty="0" err="1"/>
+              <a:t>Docker</a:t>
+            </a:r>
+            <a:r>
+              <a:rPr lang="ru-RU" dirty="0"/>
+              <a:t>-образа), изменения вносятся именно в </a:t>
             </a:r>
             <a:r>
               <a:rPr lang="ru-RU" dirty="0" err="1"/>
@@ -3806,6 +3968,35 @@
             <a:r>
               <a:rPr lang="ru-RU" dirty="0"/>
               <a:t>.</a:t>
+            </a:r>
+          </a:p>
+          <a:p>
+            <a:pPr marL="0" indent="0">
+              <a:buNone/>
+            </a:pPr>
+            <a:r>
+              <a:rPr lang="ru-RU" dirty="0" err="1"/>
+              <a:t>Deployment</a:t>
+            </a:r>
+            <a:r>
+              <a:rPr lang="ru-RU" dirty="0"/>
+              <a:t> автоматически создает и обновляет </a:t>
+            </a:r>
+            <a:r>
+              <a:rPr lang="ru-RU" dirty="0" err="1"/>
+              <a:t>ReplicaSet</a:t>
+            </a:r>
+            <a:r>
+              <a:rPr lang="ru-RU" dirty="0"/>
+              <a:t>, поэтому напрямую с </a:t>
+            </a:r>
+            <a:r>
+              <a:rPr lang="ru-RU" dirty="0" err="1"/>
+              <a:t>ReplicaSet</a:t>
+            </a:r>
+            <a:r>
+              <a:rPr lang="ru-RU" dirty="0"/>
+              <a:t> обычно не работают.</a:t>
             </a:r>
           </a:p>
         </p:txBody>
@@ -3862,14 +4053,32 @@
           <a:lstStyle/>
           <a:p>
             <a:r>
-              <a:rPr lang="ru-RU" dirty="0"/>
+              <a:rPr lang="ru-RU" b="1" dirty="0">
+                <a:solidFill>
+                  <a:schemeClr val="accent1">
+                    <a:lumMod val="75000"/>
+                  </a:schemeClr>
+                </a:solidFill>
+              </a:rPr>
               <a:t>Общие концепции. </a:t>
             </a:r>
             <a:r>
-              <a:rPr lang="en-US" dirty="0"/>
+              <a:rPr lang="en-US" b="1" dirty="0">
+                <a:solidFill>
+                  <a:schemeClr val="accent1">
+                    <a:lumMod val="75000"/>
+                  </a:schemeClr>
+                </a:solidFill>
+              </a:rPr>
               <a:t>Deployment</a:t>
             </a:r>
-            <a:endParaRPr lang="ru-RU" dirty="0"/>
+            <a:endParaRPr lang="ru-RU" b="1" dirty="0">
+              <a:solidFill>
+                <a:schemeClr val="accent1">
+                  <a:lumMod val="75000"/>
+                </a:schemeClr>
+              </a:solidFill>
+            </a:endParaRPr>
           </a:p>
         </p:txBody>
       </p:sp>
@@ -3889,172 +4098,231 @@
             <p:ph sz="half" idx="1"/>
           </p:nvPr>
         </p:nvSpPr>
-        <p:spPr/>
+        <p:spPr>
+          <a:xfrm>
+            <a:off x="838200" y="1690688"/>
+            <a:ext cx="5782056" cy="4486275"/>
+          </a:xfrm>
+        </p:spPr>
         <p:txBody>
           <a:bodyPr>
-            <a:normAutofit fontScale="62500" lnSpcReduction="20000"/>
+            <a:normAutofit/>
           </a:bodyPr>
           <a:lstStyle/>
           <a:p>
             <a:r>
-              <a:rPr lang="ru-RU" dirty="0"/>
-              <a:t>Обновили </a:t>
-            </a:r>
-            <a:r>
-              <a:rPr lang="ru-RU" b="1" dirty="0" err="1"/>
+              <a:rPr lang="ru-RU" sz="1800" dirty="0"/>
+              <a:t>Разработчик обновил </a:t>
+            </a:r>
+            <a:r>
+              <a:rPr lang="ru-RU" sz="1800" dirty="0" err="1"/>
               <a:t>Deployment</a:t>
             </a:r>
             <a:r>
-              <a:rPr lang="ru-RU" dirty="0"/>
-              <a:t> (изменили тег образа). </a:t>
-            </a:r>
-            <a:r>
-              <a:rPr lang="ru-RU" dirty="0" err="1"/>
+              <a:rPr lang="ru-RU" sz="1800" dirty="0"/>
+              <a:t> (например, изменил тег </a:t>
+            </a:r>
+            <a:r>
+              <a:rPr lang="ru-RU" sz="1800" dirty="0" err="1"/>
+              <a:t>Docker</a:t>
+            </a:r>
+            <a:r>
+              <a:rPr lang="ru-RU" sz="1800" dirty="0"/>
+              <a:t>-образа). </a:t>
+            </a:r>
+            <a:r>
+              <a:rPr lang="ru-RU" sz="1800" dirty="0" err="1"/>
               <a:t>Deployment</a:t>
             </a:r>
             <a:r>
-              <a:rPr lang="ru-RU" dirty="0"/>
+              <a:rPr lang="ru-RU" sz="1800" dirty="0"/>
               <a:t> </a:t>
             </a:r>
             <a:r>
-              <a:rPr lang="ru-RU" dirty="0" err="1"/>
+              <a:rPr lang="ru-RU" sz="1800" dirty="0" err="1"/>
               <a:t>Controller</a:t>
             </a:r>
             <a:r>
-              <a:rPr lang="ru-RU" dirty="0"/>
-              <a:t> (внутри </a:t>
-            </a:r>
-            <a:r>
-              <a:rPr lang="ru-RU" dirty="0" err="1"/>
-              <a:t>controller-manager</a:t>
-            </a:r>
-            <a:r>
-              <a:rPr lang="ru-RU" dirty="0"/>
-              <a:t>) увидел это и создал новый объект </a:t>
-            </a:r>
-            <a:r>
-              <a:rPr lang="ru-RU" b="1" dirty="0" err="1"/>
+              <a:rPr lang="ru-RU" sz="1800" dirty="0"/>
+              <a:t> обнаружил изменение и создал новый </a:t>
+            </a:r>
+            <a:r>
+              <a:rPr lang="ru-RU" sz="1800" dirty="0" err="1"/>
               <a:t>ReplicaSet</a:t>
             </a:r>
             <a:r>
-              <a:rPr lang="ru-RU" dirty="0"/>
+              <a:rPr lang="ru-RU" sz="1800" dirty="0"/>
               <a:t>.</a:t>
             </a:r>
           </a:p>
           <a:p>
             <a:r>
-              <a:rPr lang="ru-RU" dirty="0"/>
-              <a:t>Информация о новом </a:t>
-            </a:r>
-            <a:r>
-              <a:rPr lang="ru-RU" b="1" dirty="0" err="1"/>
+              <a:rPr lang="ru-RU" sz="1800" dirty="0"/>
+              <a:t>Новый </a:t>
+            </a:r>
+            <a:r>
+              <a:rPr lang="ru-RU" sz="1800" dirty="0" err="1"/>
               <a:t>ReplicaSet</a:t>
             </a:r>
             <a:r>
-              <a:rPr lang="ru-RU" dirty="0"/>
-              <a:t> записалась в базу данных </a:t>
-            </a:r>
-            <a:r>
-              <a:rPr lang="ru-RU" b="1" dirty="0" err="1"/>
+              <a:rPr lang="ru-RU" sz="1800" dirty="0"/>
+              <a:t> был сохранен в </a:t>
+            </a:r>
+            <a:r>
+              <a:rPr lang="ru-RU" sz="1800" dirty="0" err="1"/>
               <a:t>etcd</a:t>
             </a:r>
             <a:r>
-              <a:rPr lang="ru-RU" dirty="0"/>
+              <a:rPr lang="ru-RU" sz="1800" dirty="0"/>
               <a:t>.</a:t>
             </a:r>
           </a:p>
           <a:p>
             <a:r>
-              <a:rPr lang="ru-RU" dirty="0" err="1"/>
+              <a:rPr lang="ru-RU" sz="1800" dirty="0" err="1"/>
               <a:t>ReplicaSet</a:t>
             </a:r>
             <a:r>
-              <a:rPr lang="ru-RU" dirty="0"/>
+              <a:rPr lang="ru-RU" sz="1800" dirty="0"/>
               <a:t> </a:t>
             </a:r>
             <a:r>
-              <a:rPr lang="ru-RU" dirty="0" err="1"/>
+              <a:rPr lang="ru-RU" sz="1800" dirty="0" err="1"/>
               <a:t>Controller</a:t>
             </a:r>
             <a:r>
-              <a:rPr lang="ru-RU" dirty="0"/>
-              <a:t> (в том же </a:t>
-            </a:r>
-            <a:r>
-              <a:rPr lang="ru-RU" dirty="0" err="1"/>
-              <a:t>controller-manager</a:t>
-            </a:r>
-            <a:r>
-              <a:rPr lang="ru-RU" dirty="0"/>
-              <a:t>) увидел новую запись в </a:t>
-            </a:r>
-            <a:r>
-              <a:rPr lang="ru-RU" b="1" dirty="0" err="1"/>
-              <a:t>etcd</a:t>
-            </a:r>
-            <a:r>
-              <a:rPr lang="ru-RU" dirty="0"/>
-              <a:t> и понял: </a:t>
-            </a:r>
-            <a:r>
-              <a:rPr lang="ru-RU" i="1" dirty="0"/>
-              <a:t>«Мне нужно создать 3 пода»</a:t>
-            </a:r>
-            <a:r>
-              <a:rPr lang="ru-RU" dirty="0"/>
-              <a:t>. Он отправляет запрос в API на создание подов.</a:t>
-            </a:r>
-          </a:p>
-          <a:p>
-            <a:r>
-              <a:rPr lang="ru-RU" dirty="0"/>
-              <a:t>Компонент </a:t>
-            </a:r>
-            <a:r>
-              <a:rPr lang="ru-RU" b="1" dirty="0" err="1"/>
-              <a:t>kube-scheduler</a:t>
-            </a:r>
-            <a:r>
-              <a:rPr lang="ru-RU" dirty="0"/>
-              <a:t> (планировщик на Мастер-ноде) смотрит на эти поды и решает, на какие конкретно </a:t>
-            </a:r>
-            <a:r>
-              <a:rPr lang="ru-RU" b="1" dirty="0" err="1"/>
+              <a:rPr lang="ru-RU" sz="1800" dirty="0"/>
+              <a:t> обнаружил новый </a:t>
+            </a:r>
+            <a:r>
+              <a:rPr lang="ru-RU" sz="1800" dirty="0" err="1"/>
+              <a:t>ReplicaSet</a:t>
+            </a:r>
+            <a:r>
+              <a:rPr lang="ru-RU" sz="1800" dirty="0"/>
+              <a:t> и отправил запрос в API Server на создание трех </a:t>
+            </a:r>
+            <a:r>
+              <a:rPr lang="ru-RU" sz="1800" dirty="0" err="1"/>
+              <a:t>Pod'ов</a:t>
+            </a:r>
+            <a:r>
+              <a:rPr lang="ru-RU" sz="1800" dirty="0"/>
+              <a:t>.</a:t>
+            </a:r>
+          </a:p>
+          <a:p>
+            <a:r>
+              <a:rPr lang="ru-RU" sz="1800" dirty="0" err="1"/>
+              <a:t>Scheduler</a:t>
+            </a:r>
+            <a:r>
+              <a:rPr lang="ru-RU" sz="1800" dirty="0"/>
+              <a:t> выбрал </a:t>
+            </a:r>
+            <a:r>
+              <a:rPr lang="ru-RU" sz="1800" dirty="0" err="1"/>
               <a:t>Worker</a:t>
             </a:r>
             <a:r>
-              <a:rPr lang="ru-RU" b="1" dirty="0"/>
+              <a:rPr lang="ru-RU" sz="1800" dirty="0"/>
               <a:t> </a:t>
             </a:r>
             <a:r>
-              <a:rPr lang="ru-RU" b="1" dirty="0" err="1"/>
-              <a:t>Nodes</a:t>
-            </a:r>
-            <a:r>
-              <a:rPr lang="ru-RU" dirty="0"/>
-              <a:t> их отправить, учитывая свободные ресурсы (CPU/RAM).</a:t>
-            </a:r>
-          </a:p>
-          <a:p>
-            <a:r>
-              <a:rPr lang="ru-RU" dirty="0"/>
-              <a:t>На конкретной рабочей ноде системный агент </a:t>
-            </a:r>
-            <a:r>
-              <a:rPr lang="ru-RU" b="1" dirty="0" err="1"/>
+              <a:rPr lang="ru-RU" sz="1800" dirty="0" err="1"/>
+              <a:t>Node</a:t>
+            </a:r>
+            <a:r>
+              <a:rPr lang="ru-RU" sz="1800" dirty="0"/>
+              <a:t> для каждого </a:t>
+            </a:r>
+            <a:r>
+              <a:rPr lang="ru-RU" sz="1800" dirty="0" err="1"/>
+              <a:t>Pod</a:t>
+            </a:r>
+            <a:r>
+              <a:rPr lang="ru-RU" sz="1800" dirty="0"/>
+              <a:t> с учетом доступных ресурсов.</a:t>
+            </a:r>
+          </a:p>
+          <a:p>
+            <a:r>
+              <a:rPr lang="ru-RU" sz="1800" dirty="0" err="1"/>
               <a:t>kubelet</a:t>
             </a:r>
             <a:r>
-              <a:rPr lang="ru-RU" dirty="0"/>
-              <a:t> видит, что ему назначен под, и дает команду контейнерному движку (например, </a:t>
-            </a:r>
-            <a:r>
-              <a:rPr lang="ru-RU" dirty="0" err="1"/>
+              <a:rPr lang="ru-RU" sz="1800" dirty="0"/>
+              <a:t> на выбранной </a:t>
+            </a:r>
+            <a:r>
+              <a:rPr lang="ru-RU" sz="1800" dirty="0" err="1"/>
+              <a:t>Worker</a:t>
+            </a:r>
+            <a:r>
+              <a:rPr lang="ru-RU" sz="1800" dirty="0"/>
+              <a:t> </a:t>
+            </a:r>
+            <a:r>
+              <a:rPr lang="ru-RU" sz="1800" dirty="0" err="1"/>
+              <a:t>Node</a:t>
+            </a:r>
+            <a:r>
+              <a:rPr lang="ru-RU" sz="1800" dirty="0"/>
+              <a:t> получил описание </a:t>
+            </a:r>
+            <a:r>
+              <a:rPr lang="ru-RU" sz="1800" dirty="0" err="1"/>
+              <a:t>Pod</a:t>
+            </a:r>
+            <a:r>
+              <a:rPr lang="ru-RU" sz="1800" dirty="0"/>
+              <a:t> и поручил </a:t>
+            </a:r>
+            <a:r>
+              <a:rPr lang="ru-RU" sz="1800" dirty="0" err="1"/>
+              <a:t>Container</a:t>
+            </a:r>
+            <a:r>
+              <a:rPr lang="ru-RU" sz="1800" dirty="0"/>
+              <a:t> </a:t>
+            </a:r>
+            <a:r>
+              <a:rPr lang="ru-RU" sz="1800" dirty="0" err="1"/>
+              <a:t>Runtime</a:t>
+            </a:r>
+            <a:r>
+              <a:rPr lang="ru-RU" sz="1800" dirty="0"/>
+              <a:t> (например, </a:t>
+            </a:r>
+            <a:r>
+              <a:rPr lang="ru-RU" sz="1800" dirty="0" err="1"/>
               <a:t>containerd</a:t>
             </a:r>
             <a:r>
-              <a:rPr lang="ru-RU" dirty="0"/>
-              <a:t>) физически запустить контейнеры.</a:t>
+              <a:rPr lang="ru-RU" sz="1800" dirty="0"/>
+              <a:t>) запустить контейнеры.</a:t>
+            </a:r>
+          </a:p>
+          <a:p>
+            <a:r>
+              <a:rPr lang="ru-RU" sz="1800" dirty="0"/>
+              <a:t>После запуска </a:t>
+            </a:r>
+            <a:r>
+              <a:rPr lang="ru-RU" sz="1800" dirty="0" err="1"/>
+              <a:t>Pod</a:t>
+            </a:r>
+            <a:r>
+              <a:rPr lang="ru-RU" sz="1800" dirty="0"/>
+              <a:t> </a:t>
+            </a:r>
+            <a:r>
+              <a:rPr lang="ru-RU" sz="1800" dirty="0" err="1"/>
+              <a:t>Kubernetes</a:t>
+            </a:r>
+            <a:r>
+              <a:rPr lang="ru-RU" sz="1800" dirty="0"/>
+              <a:t> продолжает следить за его состоянием. </a:t>
             </a:r>
           </a:p>
         </p:txBody>
@@ -4083,8 +4351,8 @@
         </p:blipFill>
         <p:spPr>
           <a:xfrm>
-            <a:off x="6172200" y="2343182"/>
-            <a:ext cx="5181600" cy="3316224"/>
+            <a:off x="6620256" y="2150522"/>
+            <a:ext cx="4713734" cy="3016790"/>
           </a:xfrm>
           <a:prstGeom prst="rect">
             <a:avLst/>
@@ -4143,11 +4411,23 @@
           <a:lstStyle/>
           <a:p>
             <a:r>
-              <a:rPr lang="en-US" dirty="0"/>
+              <a:rPr lang="en-US" b="1" dirty="0">
+                <a:solidFill>
+                  <a:schemeClr val="accent1">
+                    <a:lumMod val="75000"/>
+                  </a:schemeClr>
+                </a:solidFill>
+              </a:rPr>
               <a:t>*</a:t>
             </a:r>
             <a:r>
-              <a:rPr lang="ru-RU" dirty="0"/>
+              <a:rPr lang="ru-RU" b="1" dirty="0">
+                <a:solidFill>
+                  <a:schemeClr val="accent1">
+                    <a:lumMod val="75000"/>
+                  </a:schemeClr>
+                </a:solidFill>
+              </a:rPr>
               <a:t>Процесс внесения изменений в состояние</a:t>
             </a:r>
           </a:p>
@@ -4237,7 +4517,13 @@
           <a:lstStyle/>
           <a:p>
             <a:r>
-              <a:rPr lang="ru-RU" dirty="0"/>
+              <a:rPr lang="ru-RU" b="1" dirty="0">
+                <a:solidFill>
+                  <a:schemeClr val="accent1">
+                    <a:lumMod val="75000"/>
+                  </a:schemeClr>
+                </a:solidFill>
+              </a:rPr>
               <a:t>Общие концепции. Kubernetes Service</a:t>
             </a:r>
           </a:p>
@@ -4262,7 +4548,7 @@
         <p:spPr/>
         <p:txBody>
           <a:bodyPr>
-            <a:normAutofit fontScale="92500" lnSpcReduction="20000"/>
+            <a:normAutofit fontScale="70000" lnSpcReduction="20000"/>
           </a:bodyPr>
           <a:lstStyle/>
           <a:p>
@@ -4275,9 +4561,16 @@
             </a:r>
             <a:r>
               <a:rPr lang="ru-RU" dirty="0"/>
-              <a:t> — это «расходный материал». Они постоянно умирают, перезапускаются, масштабируются и при каждом перезапуске получают новый IP-адрес. Поэтому и используют Service.</a:t>
-            </a:r>
-            <a:endParaRPr lang="en-US" dirty="0"/>
+              <a:t> – это «расходный материал». Они могут завершаться, пересоздаваться или масштабироваться, поэтому при каждом создании получают новый IP-адрес. Из-за этого обращаться к </a:t>
+            </a:r>
+            <a:r>
+              <a:rPr lang="ru-RU" dirty="0" err="1"/>
+              <a:t>Pod</a:t>
+            </a:r>
+            <a:r>
+              <a:rPr lang="ru-RU" dirty="0"/>
+              <a:t> напрямую нельзя.</a:t>
+            </a:r>
           </a:p>
           <a:p>
             <a:pPr marL="0" indent="0">
@@ -4285,7 +4578,7 @@
             </a:pPr>
             <a:r>
               <a:rPr lang="ru-RU" dirty="0"/>
-              <a:t>Kubernetes </a:t>
+              <a:t>Для решения этой проблемы используется </a:t>
             </a:r>
             <a:r>
               <a:rPr lang="ru-RU" b="1" dirty="0"/>
@@ -4293,17 +4586,53 @@
             </a:r>
             <a:r>
               <a:rPr lang="ru-RU" dirty="0"/>
-              <a:t> — это абстракция, которая дает группе подов один постоянный </a:t>
-            </a:r>
+              <a:t>.</a:t>
+            </a:r>
+          </a:p>
+          <a:p>
+            <a:pPr marL="0" indent="0">
+              <a:buNone/>
+            </a:pPr>
             <a:r>
               <a:rPr lang="ru-RU" b="1" dirty="0"/>
-              <a:t>внутренний</a:t>
-            </a:r>
-            <a:r>
-              <a:rPr lang="ru-RU" dirty="0"/>
-              <a:t> IP-адрес и одно постоянное DNS-имя (снаружи кластера не «достучаться»).</a:t>
-            </a:r>
-            <a:endParaRPr lang="en-US" dirty="0"/>
+              <a:t>Service</a:t>
+            </a:r>
+            <a:r>
+              <a:rPr lang="ru-RU" dirty="0"/>
+              <a:t> – это объект </a:t>
+            </a:r>
+            <a:r>
+              <a:rPr lang="ru-RU" dirty="0" err="1"/>
+              <a:t>Kubernetes</a:t>
+            </a:r>
+            <a:r>
+              <a:rPr lang="ru-RU" dirty="0"/>
+              <a:t>, который предоставляет группе </a:t>
+            </a:r>
+            <a:r>
+              <a:rPr lang="ru-RU" dirty="0" err="1"/>
+              <a:t>Pod'ов</a:t>
+            </a:r>
+            <a:r>
+              <a:rPr lang="ru-RU" dirty="0"/>
+              <a:t> один постоянный внутренний IP-адрес и DNS-имя. Клиенты обращаются к Service, а </a:t>
+            </a:r>
+            <a:r>
+              <a:rPr lang="ru-RU" dirty="0" err="1"/>
+              <a:t>Kubernetes</a:t>
+            </a:r>
+            <a:r>
+              <a:rPr lang="ru-RU" dirty="0"/>
+              <a:t> автоматически перенаправляет запрос на один из подходящих </a:t>
+            </a:r>
+            <a:r>
+              <a:rPr lang="ru-RU" dirty="0" err="1"/>
+              <a:t>Pod'ов</a:t>
+            </a:r>
+            <a:r>
+              <a:rPr lang="ru-RU" dirty="0"/>
+              <a:t>.</a:t>
+            </a:r>
           </a:p>
           <a:p>
             <a:pPr marL="0" indent="0">
@@ -4311,12 +4640,17 @@
             </a:pPr>
             <a:r>
               <a:rPr lang="ru-RU" b="1" dirty="0"/>
-              <a:t>Механизм связывания</a:t>
-            </a:r>
-            <a:r>
-              <a:rPr lang="en-US" b="1" dirty="0"/>
-              <a:t>:</a:t>
-            </a:r>
+              <a:t>Как Service находит нужные </a:t>
+            </a:r>
+            <a:r>
+              <a:rPr lang="ru-RU" b="1" dirty="0" err="1"/>
+              <a:t>Pod'ы</a:t>
+            </a:r>
+            <a:r>
+              <a:rPr lang="ru-RU" b="1" dirty="0"/>
+              <a:t>?</a:t>
+            </a:r>
+            <a:endParaRPr lang="ru-RU" dirty="0"/>
           </a:p>
           <a:p>
             <a:r>
@@ -4325,11 +4659,19 @@
             </a:r>
             <a:r>
               <a:rPr lang="ru-RU" b="1" dirty="0"/>
-              <a:t> (Метки):</a:t>
-            </a:r>
-            <a:r>
-              <a:rPr lang="ru-RU" dirty="0"/>
-              <a:t> метки подов (например, </a:t>
+              <a:t> (метки)</a:t>
+            </a:r>
+            <a:r>
+              <a:rPr lang="ru-RU" dirty="0"/>
+              <a:t> – назначаются </a:t>
+            </a:r>
+            <a:r>
+              <a:rPr lang="ru-RU" dirty="0" err="1"/>
+              <a:t>Pod'ам</a:t>
+            </a:r>
+            <a:r>
+              <a:rPr lang="ru-RU" dirty="0"/>
+              <a:t> (например, </a:t>
             </a:r>
             <a:r>
               <a:rPr lang="ru-RU" dirty="0" err="1"/>
@@ -4347,7 +4689,6 @@
               <a:rPr lang="ru-RU" dirty="0"/>
               <a:t>).</a:t>
             </a:r>
-            <a:endParaRPr lang="en-US" dirty="0"/>
           </a:p>
           <a:p>
             <a:r>
@@ -4356,29 +4697,20 @@
             </a:r>
             <a:r>
               <a:rPr lang="ru-RU" b="1" dirty="0"/>
-              <a:t> (Селектор):</a:t>
-            </a:r>
-            <a:r>
-              <a:rPr lang="ru-RU" dirty="0"/>
-              <a:t> В манифесте Сервиса: «Я обслуживаю поды, у которых есть метка </a:t>
+              <a:t> (селектор)</a:t>
+            </a:r>
+            <a:r>
+              <a:rPr lang="ru-RU" dirty="0"/>
+              <a:t> – указывается в Service и определяет, какие </a:t>
             </a:r>
             <a:r>
               <a:rPr lang="ru-RU" dirty="0" err="1"/>
-              <a:t>app</a:t>
-            </a:r>
-            <a:r>
-              <a:rPr lang="ru-RU" dirty="0"/>
-              <a:t>: </a:t>
-            </a:r>
-            <a:r>
-              <a:rPr lang="ru-RU" dirty="0" err="1"/>
-              <a:t>payment-gateway</a:t>
-            </a:r>
-            <a:r>
-              <a:rPr lang="ru-RU" dirty="0"/>
-              <a:t>».</a:t>
-            </a:r>
-            <a:endParaRPr lang="en-US" dirty="0"/>
+              <a:t>Pod'ы</a:t>
+            </a:r>
+            <a:r>
+              <a:rPr lang="ru-RU" dirty="0"/>
+              <a:t> должны обслуживать запросы.</a:t>
+            </a:r>
           </a:p>
           <a:p>
             <a:r>
@@ -4387,19 +4719,108 @@
             </a:r>
             <a:r>
               <a:rPr lang="ru-RU" b="1" dirty="0"/>
-              <a:t> (Конечные точки):</a:t>
-            </a:r>
-            <a:r>
-              <a:rPr lang="ru-RU" dirty="0"/>
-              <a:t> K8s автоматически подтягивает IP-адреса всех живых подов с этой меткой в специальный объект </a:t>
-            </a:r>
-            <a:r>
-              <a:rPr lang="ru-RU" b="1" dirty="0" err="1"/>
+              <a:t> (конечные точки)</a:t>
+            </a:r>
+            <a:r>
+              <a:rPr lang="ru-RU" dirty="0"/>
+              <a:t> – </a:t>
+            </a:r>
+            <a:r>
+              <a:rPr lang="ru-RU" dirty="0" err="1"/>
+              <a:t>Kubernetes</a:t>
+            </a:r>
+            <a:r>
+              <a:rPr lang="ru-RU" dirty="0"/>
+              <a:t> автоматически формирует список IP-адресов всех </a:t>
+            </a:r>
+            <a:r>
+              <a:rPr lang="ru-RU" b="1" dirty="0"/>
+              <a:t>готовых</a:t>
+            </a:r>
+            <a:r>
+              <a:rPr lang="ru-RU" dirty="0"/>
+              <a:t> </a:t>
+            </a:r>
+            <a:r>
+              <a:rPr lang="ru-RU" dirty="0" err="1"/>
+              <a:t>Pod'ов</a:t>
+            </a:r>
+            <a:r>
+              <a:rPr lang="ru-RU" dirty="0"/>
+              <a:t>, подходящих под селектор. Именно на них Service распределяет входящий трафик.</a:t>
+            </a:r>
+            <a:br>
+              <a:rPr lang="ru-RU" dirty="0"/>
+            </a:br>
+            <a:r>
+              <a:rPr lang="ru-RU" i="1" dirty="0">
+                <a:solidFill>
+                  <a:schemeClr val="accent1">
+                    <a:lumMod val="75000"/>
+                  </a:schemeClr>
+                </a:solidFill>
+              </a:rPr>
+              <a:t>Если подходящих </a:t>
+            </a:r>
+            <a:r>
+              <a:rPr lang="ru-RU" i="1" dirty="0" err="1">
+                <a:solidFill>
+                  <a:schemeClr val="accent1">
+                    <a:lumMod val="75000"/>
+                  </a:schemeClr>
+                </a:solidFill>
+              </a:rPr>
+              <a:t>Pod'ов</a:t>
+            </a:r>
+            <a:r>
+              <a:rPr lang="ru-RU" i="1" dirty="0">
+                <a:solidFill>
+                  <a:schemeClr val="accent1">
+                    <a:lumMod val="75000"/>
+                  </a:schemeClr>
+                </a:solidFill>
+              </a:rPr>
+              <a:t> нет или они не готовы (</a:t>
+            </a:r>
+            <a:r>
+              <a:rPr lang="ru-RU" b="1" i="1" dirty="0">
+                <a:solidFill>
+                  <a:schemeClr val="accent1">
+                    <a:lumMod val="75000"/>
+                  </a:schemeClr>
+                </a:solidFill>
+              </a:rPr>
+              <a:t>Ready</a:t>
+            </a:r>
+            <a:r>
+              <a:rPr lang="ru-RU" i="1" dirty="0">
+                <a:solidFill>
+                  <a:schemeClr val="accent1">
+                    <a:lumMod val="75000"/>
+                  </a:schemeClr>
+                </a:solidFill>
+              </a:rPr>
+              <a:t>), список </a:t>
+            </a:r>
+            <a:r>
+              <a:rPr lang="ru-RU" i="1" dirty="0" err="1">
+                <a:solidFill>
+                  <a:schemeClr val="accent1">
+                    <a:lumMod val="75000"/>
+                  </a:schemeClr>
+                </a:solidFill>
+              </a:rPr>
               <a:t>Endpoints</a:t>
             </a:r>
             <a:r>
-              <a:rPr lang="ru-RU" dirty="0"/>
-              <a:t>.</a:t>
+              <a:rPr lang="ru-RU" i="1" dirty="0">
+                <a:solidFill>
+                  <a:schemeClr val="accent1">
+                    <a:lumMod val="75000"/>
+                  </a:schemeClr>
+                </a:solidFill>
+              </a:rPr>
+              <a:t> будет пустым, и Service не сможет направить трафик.</a:t>
             </a:r>
           </a:p>
         </p:txBody>
@@ -4462,7 +4883,13 @@
           <a:lstStyle/>
           <a:p>
             <a:r>
-              <a:rPr lang="ru-RU" dirty="0"/>
+              <a:rPr lang="ru-RU" b="1" dirty="0">
+                <a:solidFill>
+                  <a:schemeClr val="accent1">
+                    <a:lumMod val="75000"/>
+                  </a:schemeClr>
+                </a:solidFill>
+              </a:rPr>
               <a:t>Общие концепции. Kubernetes Service</a:t>
             </a:r>
           </a:p>
@@ -4588,7 +5015,13 @@
           <a:lstStyle/>
           <a:p>
             <a:r>
-              <a:rPr lang="ru-RU" dirty="0"/>
+              <a:rPr lang="ru-RU" b="1" dirty="0">
+                <a:solidFill>
+                  <a:schemeClr val="accent1">
+                    <a:lumMod val="75000"/>
+                  </a:schemeClr>
+                </a:solidFill>
+              </a:rPr>
               <a:t>Общие концепции. Kubernetes Service</a:t>
             </a:r>
           </a:p>
@@ -4748,14 +5181,32 @@
           <a:lstStyle/>
           <a:p>
             <a:r>
-              <a:rPr lang="ru-RU" dirty="0"/>
+              <a:rPr lang="ru-RU" b="1" dirty="0">
+                <a:solidFill>
+                  <a:schemeClr val="accent1">
+                    <a:lumMod val="75000"/>
+                  </a:schemeClr>
+                </a:solidFill>
+              </a:rPr>
               <a:t>Общие концепции. </a:t>
             </a:r>
             <a:r>
-              <a:rPr lang="en-US" dirty="0"/>
+              <a:rPr lang="en-US" b="1" dirty="0">
+                <a:solidFill>
+                  <a:schemeClr val="accent1">
+                    <a:lumMod val="75000"/>
+                  </a:schemeClr>
+                </a:solidFill>
+              </a:rPr>
               <a:t>Ingress</a:t>
             </a:r>
-            <a:endParaRPr lang="ru-RU" dirty="0"/>
+            <a:endParaRPr lang="ru-RU" b="1" dirty="0">
+              <a:solidFill>
+                <a:schemeClr val="accent1">
+                  <a:lumMod val="75000"/>
+                </a:schemeClr>
+              </a:solidFill>
+            </a:endParaRPr>
           </a:p>
         </p:txBody>
       </p:sp>
@@ -4775,9 +5226,16 @@
             <p:ph idx="1"/>
           </p:nvPr>
         </p:nvSpPr>
-        <p:spPr/>
-        <p:txBody>
-          <a:bodyPr/>
+        <p:spPr>
+          <a:xfrm>
+            <a:off x="838200" y="1523872"/>
+            <a:ext cx="10515600" cy="4867783"/>
+          </a:xfrm>
+        </p:spPr>
+        <p:txBody>
+          <a:bodyPr>
+            <a:normAutofit fontScale="92500"/>
+          </a:bodyPr>
           <a:lstStyle/>
           <a:p>
             <a:pPr marL="0" indent="0">
@@ -4789,32 +5247,15 @@
             </a:r>
             <a:r>
               <a:rPr lang="ru-RU" dirty="0"/>
-              <a:t> служит единой внешней точкой доступа к кластеру, обеспечивая маршрутизацию трафика между внутренними сервисами (</a:t>
-            </a:r>
-            <a:r>
-              <a:rPr lang="en-US" dirty="0"/>
-              <a:t>Service</a:t>
-            </a:r>
-            <a:r>
-              <a:rPr lang="ru-RU" dirty="0"/>
-              <a:t>) на основе URL-путей и SSL-</a:t>
+              <a:t> – объект </a:t>
             </a:r>
             <a:r>
               <a:rPr lang="ru-RU" dirty="0" err="1"/>
-              <a:t>терминацию</a:t>
-            </a:r>
-            <a:r>
-              <a:rPr lang="ru-RU" dirty="0"/>
-              <a:t>.</a:t>
-            </a:r>
-          </a:p>
-          <a:p>
-            <a:pPr marL="0" indent="0">
-              <a:buNone/>
-            </a:pPr>
-            <a:r>
-              <a:rPr lang="ru-RU" dirty="0"/>
-              <a:t>Маршрутизация трафика контролируется правилами, определенными в ресурсе </a:t>
+              <a:t>Kubernetes</a:t>
+            </a:r>
+            <a:r>
+              <a:rPr lang="ru-RU" dirty="0"/>
+              <a:t>, который предоставляет внешнюю точку входа в кластер и направляет входящие HTTP/HTTPS-запросы к нужным Service. Маршрутизация определяется правилами </a:t>
             </a:r>
             <a:r>
               <a:rPr lang="ru-RU" dirty="0" err="1"/>
@@ -4822,7 +5263,7 @@
             </a:r>
             <a:r>
               <a:rPr lang="ru-RU" dirty="0"/>
-              <a:t>.</a:t>
+              <a:t>: по доменному имени, URL-пути и другим условиям.</a:t>
             </a:r>
           </a:p>
           <a:p>
@@ -4831,7 +5272,39 @@
             </a:pPr>
             <a:r>
               <a:rPr lang="ru-RU" dirty="0"/>
-              <a:t>Для QA-инженеров ключевыми зонами проверки являются правильность путей (пути, слэши), лимиты на размер файлов и настройки тайм-аутов запросов.</a:t>
+              <a:t>Для QA-инженеров ключевыми зонами проверки являются:</a:t>
+            </a:r>
+          </a:p>
+          <a:p>
+            <a:r>
+              <a:rPr lang="ru-RU" dirty="0"/>
+              <a:t>корректность URL-путей и маршрутизации;</a:t>
+            </a:r>
+          </a:p>
+          <a:p>
+            <a:r>
+              <a:rPr lang="ru-RU" dirty="0"/>
+              <a:t>настройки тайм-аутов;</a:t>
+            </a:r>
+          </a:p>
+          <a:p>
+            <a:r>
+              <a:rPr lang="ru-RU" dirty="0"/>
+              <a:t>ограничения на размер запросов (например, при загрузке файлов);</a:t>
+            </a:r>
+          </a:p>
+          <a:p>
+            <a:r>
+              <a:rPr lang="ru-RU" dirty="0"/>
+              <a:t>корректность </a:t>
+            </a:r>
+            <a:r>
+              <a:rPr lang="ru-RU" dirty="0" err="1"/>
+              <a:t>перенаправлений</a:t>
+            </a:r>
+            <a:r>
+              <a:rPr lang="ru-RU" dirty="0"/>
+              <a:t> и кодов ответа.</a:t>
             </a:r>
           </a:p>
           <a:p>
@@ -4871,6 +5344,12 @@
               <a:t> перенаправить (на какие поды)»</a:t>
             </a:r>
           </a:p>
+          <a:p>
+            <a:pPr marL="0" indent="0">
+              <a:buNone/>
+            </a:pPr>
+            <a:endParaRPr lang="ru-RU" dirty="0"/>
+          </a:p>
         </p:txBody>
       </p:sp>
       <p:sp>
@@ -4887,7 +5366,7 @@
         </p:nvSpPr>
         <p:spPr>
           <a:xfrm>
-            <a:off x="486822" y="5296957"/>
+            <a:off x="486822" y="5370109"/>
             <a:ext cx="351378" cy="707886"/>
           </a:xfrm>
           <a:prstGeom prst="rect">
@@ -4970,14 +5449,32 @@
           <a:lstStyle/>
           <a:p>
             <a:r>
-              <a:rPr lang="ru-RU" dirty="0"/>
+              <a:rPr lang="ru-RU" b="1" dirty="0">
+                <a:solidFill>
+                  <a:schemeClr val="accent1">
+                    <a:lumMod val="75000"/>
+                  </a:schemeClr>
+                </a:solidFill>
+              </a:rPr>
               <a:t>Общие концепции. </a:t>
             </a:r>
             <a:r>
-              <a:rPr lang="en-US" dirty="0"/>
+              <a:rPr lang="en-US" b="1" dirty="0">
+                <a:solidFill>
+                  <a:schemeClr val="accent1">
+                    <a:lumMod val="75000"/>
+                  </a:schemeClr>
+                </a:solidFill>
+              </a:rPr>
               <a:t>Ingress</a:t>
             </a:r>
-            <a:endParaRPr lang="ru-RU" dirty="0"/>
+            <a:endParaRPr lang="ru-RU" b="1" dirty="0">
+              <a:solidFill>
+                <a:schemeClr val="accent1">
+                  <a:lumMod val="75000"/>
+                </a:schemeClr>
+              </a:solidFill>
+            </a:endParaRPr>
           </a:p>
         </p:txBody>
       </p:sp>
@@ -5073,14 +5570,32 @@
           <a:lstStyle/>
           <a:p>
             <a:r>
-              <a:rPr lang="ru-RU" sz="4300" dirty="0"/>
+              <a:rPr lang="ru-RU" sz="4300" b="1" dirty="0">
+                <a:solidFill>
+                  <a:schemeClr val="accent1">
+                    <a:lumMod val="75000"/>
+                  </a:schemeClr>
+                </a:solidFill>
+              </a:rPr>
               <a:t>Поиск ошибок в цепочке </a:t>
             </a:r>
             <a:r>
-              <a:rPr lang="en-US" sz="4300" dirty="0"/>
+              <a:rPr lang="en-US" sz="4300" b="1" dirty="0">
+                <a:solidFill>
+                  <a:schemeClr val="accent1">
+                    <a:lumMod val="75000"/>
+                  </a:schemeClr>
+                </a:solidFill>
+              </a:rPr>
               <a:t>Ingress-Service-Pod</a:t>
             </a:r>
-            <a:endParaRPr lang="ru-RU" sz="4300" dirty="0"/>
+            <a:endParaRPr lang="ru-RU" sz="4300" b="1" dirty="0">
+              <a:solidFill>
+                <a:schemeClr val="accent1">
+                  <a:lumMod val="75000"/>
+                </a:schemeClr>
+              </a:solidFill>
+            </a:endParaRPr>
           </a:p>
         </p:txBody>
       </p:sp>
@@ -5454,7 +5969,13 @@
           <a:lstStyle/>
           <a:p>
             <a:r>
-              <a:rPr lang="ru-RU" dirty="0"/>
+              <a:rPr lang="ru-RU" b="1" dirty="0">
+                <a:solidFill>
+                  <a:schemeClr val="accent1">
+                    <a:lumMod val="75000"/>
+                  </a:schemeClr>
+                </a:solidFill>
+              </a:rPr>
               <a:t>Что это?</a:t>
             </a:r>
           </a:p>
@@ -5479,7 +6000,7 @@
         <p:spPr/>
         <p:txBody>
           <a:bodyPr>
-            <a:normAutofit lnSpcReduction="10000"/>
+            <a:normAutofit fontScale="85000" lnSpcReduction="10000"/>
           </a:bodyPr>
           <a:lstStyle/>
           <a:p>
@@ -5487,30 +6008,38 @@
               <a:buNone/>
             </a:pPr>
             <a:r>
+              <a:rPr lang="ru-RU" b="1" dirty="0" err="1"/>
+              <a:t>Kubernetes</a:t>
+            </a:r>
+            <a:r>
               <a:rPr lang="ru-RU" b="1" dirty="0"/>
+              <a:t> (K8s) </a:t>
+            </a:r>
+            <a:r>
+              <a:rPr lang="ru-RU" dirty="0"/>
+              <a:t>— это система, которая автоматически управляет </a:t>
+            </a:r>
+            <a:r>
+              <a:rPr lang="ru-RU" dirty="0" err="1"/>
+              <a:t>контейнеризированными</a:t>
+            </a:r>
+            <a:r>
+              <a:rPr lang="ru-RU" dirty="0"/>
+              <a:t> приложениями: запускает их, следит за их состоянием, распределяет нагрузку и восстанавливает после сбоев.</a:t>
+            </a:r>
+          </a:p>
+          <a:p>
+            <a:pPr marL="0" indent="0">
+              <a:buNone/>
+            </a:pPr>
+            <a:r>
+              <a:rPr lang="ru-RU" dirty="0" err="1"/>
               <a:t>Kubernetes</a:t>
             </a:r>
             <a:r>
               <a:rPr lang="ru-RU" dirty="0"/>
-              <a:t> </a:t>
-            </a:r>
-            <a:r>
-              <a:rPr lang="en-US" dirty="0"/>
-              <a:t>– </a:t>
-            </a:r>
-            <a:r>
-              <a:rPr lang="ru-RU" dirty="0"/>
-              <a:t>это портативная расширяемая платформа с открытым исходным кодом для управления </a:t>
-            </a:r>
-            <a:r>
-              <a:rPr lang="ru-RU" dirty="0" err="1"/>
-              <a:t>контейнеризованными</a:t>
-            </a:r>
-            <a:r>
-              <a:rPr lang="ru-RU" dirty="0"/>
-              <a:t> рабочими нагрузками и сервисами, которая облегчает как декларативную настройку, так и автоматизацию. </a:t>
-            </a:r>
-            <a:endParaRPr lang="en-US" dirty="0"/>
+              <a:t> управляет контейнерами, запущенными на нескольких серверах (узлах кластера), распределяет между ними нагрузку и поддерживает заданное количество работающих экземпляров приложения.</a:t>
+            </a:r>
           </a:p>
           <a:p>
             <a:pPr marL="0" indent="0">
@@ -5518,7 +6047,7 @@
             </a:pPr>
             <a:r>
               <a:rPr lang="ru-RU" dirty="0"/>
-              <a:t>Kubernetes управляет и запускает контейнеры </a:t>
+              <a:t>Проект был создан в Google и сегодня развивается международным сообществом при участии многих компаний, включая Microsoft, Red Hat, IBM и </a:t>
             </a:r>
             <a:r>
               <a:rPr lang="ru-RU" dirty="0" err="1"/>
@@ -5526,23 +6055,7 @@
             </a:r>
             <a:r>
               <a:rPr lang="ru-RU" dirty="0"/>
-              <a:t> на </a:t>
-            </a:r>
-            <a:r>
-              <a:rPr lang="ru-RU" b="1" dirty="0"/>
-              <a:t>большом количестве хостов</a:t>
-            </a:r>
-            <a:r>
-              <a:rPr lang="ru-RU" dirty="0"/>
-              <a:t>, а так же обеспечивает совместное размещение и репликацию </a:t>
-            </a:r>
-            <a:r>
-              <a:rPr lang="ru-RU" b="1" dirty="0"/>
-              <a:t>большого количества контейнеров</a:t>
-            </a:r>
-            <a:r>
-              <a:rPr lang="ru-RU" dirty="0"/>
-              <a:t>. </a:t>
+              <a:t>.</a:t>
             </a:r>
           </a:p>
           <a:p>
@@ -5551,32 +6064,23 @@
             </a:pPr>
             <a:r>
               <a:rPr lang="ru-RU" dirty="0"/>
-              <a:t>Проект был начат Google и теперь поддерживается многими компаниями, среди которых Microsoft, </a:t>
+              <a:t>Название </a:t>
+            </a:r>
+            <a:r>
+              <a:rPr lang="ru-RU" b="1" dirty="0" err="1"/>
+              <a:t>Kubernetes</a:t>
+            </a:r>
+            <a:r>
+              <a:rPr lang="ru-RU" dirty="0"/>
+              <a:t> происходит от греческого слова, означающего «рулевой» или «штурман», что отражает его роль в управлении </a:t>
             </a:r>
             <a:r>
               <a:rPr lang="ru-RU" dirty="0" err="1"/>
-              <a:t>RedHat</a:t>
-            </a:r>
-            <a:r>
-              <a:rPr lang="ru-RU" dirty="0"/>
-              <a:t>, IBM и </a:t>
-            </a:r>
-            <a:r>
-              <a:rPr lang="ru-RU" dirty="0" err="1"/>
-              <a:t>Docker</a:t>
-            </a:r>
-            <a:r>
-              <a:rPr lang="ru-RU" dirty="0"/>
-              <a:t>.</a:t>
-            </a:r>
-          </a:p>
-          <a:p>
-            <a:pPr marL="0" indent="0">
-              <a:buNone/>
-            </a:pPr>
-            <a:r>
-              <a:rPr lang="ru-RU" dirty="0"/>
-              <a:t>Название Kubernetes происходит от греческого, что означает рулевой или штурман. </a:t>
+              <a:t>контейнеризированными</a:t>
+            </a:r>
+            <a:r>
+              <a:rPr lang="ru-RU" dirty="0"/>
+              <a:t> приложениями (см. логотип в верхней части экрана).</a:t>
             </a:r>
           </a:p>
         </p:txBody>
@@ -5754,14 +6258,32 @@
           <a:lstStyle/>
           <a:p>
             <a:r>
-              <a:rPr lang="ru-RU" sz="4300" dirty="0"/>
+              <a:rPr lang="ru-RU" sz="4300" b="1" dirty="0">
+                <a:solidFill>
+                  <a:schemeClr val="accent1">
+                    <a:lumMod val="75000"/>
+                  </a:schemeClr>
+                </a:solidFill>
+              </a:rPr>
               <a:t>Поиск ошибок в цепочке </a:t>
             </a:r>
             <a:r>
-              <a:rPr lang="en-US" sz="4300" b="1" dirty="0"/>
+              <a:rPr lang="en-US" sz="4300" b="1" dirty="0">
+                <a:solidFill>
+                  <a:schemeClr val="accent1">
+                    <a:lumMod val="75000"/>
+                  </a:schemeClr>
+                </a:solidFill>
+              </a:rPr>
               <a:t>Ingress-Service-Pod</a:t>
             </a:r>
-            <a:endParaRPr lang="ru-RU" sz="4300" b="1" dirty="0"/>
+            <a:endParaRPr lang="ru-RU" sz="4300" b="1" dirty="0">
+              <a:solidFill>
+                <a:schemeClr val="accent1">
+                  <a:lumMod val="75000"/>
+                </a:schemeClr>
+              </a:solidFill>
+            </a:endParaRPr>
           </a:p>
         </p:txBody>
       </p:sp>
@@ -5976,7 +6498,15 @@
             </a:pPr>
             <a:r>
               <a:rPr lang="ru-RU" sz="1600" dirty="0"/>
-              <a:t>Ошибки 502 / 503. Проверяем, видит ли сервис поды (не опечатались ли в метках </a:t>
+              <a:t>Ошибки 502 / 503. Проверяем, есть ли у Service </a:t>
+            </a:r>
+            <a:r>
+              <a:rPr lang="ru-RU" sz="1600" dirty="0" err="1"/>
+              <a:t>Endpoints</a:t>
+            </a:r>
+            <a:r>
+              <a:rPr lang="ru-RU" sz="1600" dirty="0"/>
+              <a:t> (не опечатались ли в метках </a:t>
             </a:r>
             <a:r>
               <a:rPr lang="ru-RU" sz="1600" dirty="0" err="1"/>
@@ -6134,15 +6664,15 @@
             </a:r>
             <a:r>
               <a:rPr lang="ru-RU" sz="1600" dirty="0"/>
-              <a:t> прилетает чистый JSON с ошибкой 500 — </a:t>
-            </a:r>
-            <a:r>
-              <a:rPr lang="ru-RU" sz="1600" dirty="0" err="1"/>
-              <a:t>Ingress</a:t>
+              <a:t> прилетает чистый JSON с ошибкой 500 </a:t>
+            </a:r>
+            <a:r>
+              <a:rPr lang="en-US" sz="1600" dirty="0"/>
+              <a:t>– </a:t>
             </a:r>
             <a:r>
               <a:rPr lang="ru-RU" sz="1600" dirty="0"/>
-              <a:t> и Service сработали идеально, идите читать логи Пода</a:t>
+              <a:t>Чаще всего причина уже внутри приложения.</a:t>
             </a:r>
             <a:endParaRPr lang="en-US" sz="1600" dirty="0"/>
           </a:p>
@@ -6219,6 +6749,60 @@
             <a:r>
               <a:rPr lang="ru-RU" sz="1600" dirty="0"/>
               <a:t>логи соответствующего пода</a:t>
+            </a:r>
+          </a:p>
+          <a:p>
+            <a:pPr marL="0" indent="0">
+              <a:lnSpc>
+                <a:spcPct val="120000"/>
+              </a:lnSpc>
+              <a:spcBef>
+                <a:spcPts val="0"/>
+              </a:spcBef>
+              <a:buNone/>
+            </a:pPr>
+            <a:r>
+              <a:rPr lang="ru-RU" sz="1600" dirty="0"/>
+              <a:t>Важно убедиться, что запрос вообще дошел до приложения.</a:t>
+            </a:r>
+          </a:p>
+        </p:txBody>
+      </p:sp>
+      <p:sp>
+        <p:nvSpPr>
+          <p:cNvPr id="5" name="TextBox 4">
+            <a:extLst>
+              <a:ext uri="{FF2B5EF4-FFF2-40B4-BE49-F238E27FC236}">
+                <a16:creationId xmlns:a16="http://schemas.microsoft.com/office/drawing/2014/main" id="{8A1EA662-04F4-EAA9-0885-7CA2FE465B34}"/>
+              </a:ext>
+            </a:extLst>
+          </p:cNvPr>
+          <p:cNvSpPr txBox="1"/>
+          <p:nvPr/>
+        </p:nvSpPr>
+        <p:spPr>
+          <a:xfrm>
+            <a:off x="600456" y="5895647"/>
+            <a:ext cx="234696" cy="461665"/>
+          </a:xfrm>
+          <a:prstGeom prst="rect">
+            <a:avLst/>
+          </a:prstGeom>
+          <a:noFill/>
+        </p:spPr>
+        <p:txBody>
+          <a:bodyPr wrap="square" rtlCol="0">
+            <a:spAutoFit/>
+          </a:bodyPr>
+          <a:lstStyle/>
+          <a:p>
+            <a:r>
+              <a:rPr lang="ru-RU" sz="2400" dirty="0">
+                <a:solidFill>
+                  <a:srgbClr val="FF0000"/>
+                </a:solidFill>
+              </a:rPr>
+              <a:t>!</a:t>
             </a:r>
           </a:p>
         </p:txBody>
@@ -6283,26 +6867,62 @@
           <a:lstStyle/>
           <a:p>
             <a:r>
-              <a:rPr lang="ru-RU" sz="4000" dirty="0"/>
+              <a:rPr lang="ru-RU" sz="4000" b="1" dirty="0">
+                <a:solidFill>
+                  <a:schemeClr val="accent1">
+                    <a:lumMod val="75000"/>
+                  </a:schemeClr>
+                </a:solidFill>
+              </a:rPr>
               <a:t>Конфигурация стендов (</a:t>
             </a:r>
             <a:r>
-              <a:rPr lang="ru-RU" sz="4000" dirty="0" err="1"/>
+              <a:rPr lang="ru-RU" sz="4000" b="1" dirty="0" err="1">
+                <a:solidFill>
+                  <a:schemeClr val="accent1">
+                    <a:lumMod val="75000"/>
+                  </a:schemeClr>
+                </a:solidFill>
+              </a:rPr>
               <a:t>ConfigMaps</a:t>
             </a:r>
             <a:r>
-              <a:rPr lang="ru-RU" sz="4000" dirty="0"/>
+              <a:rPr lang="ru-RU" sz="4000" b="1" dirty="0">
+                <a:solidFill>
+                  <a:schemeClr val="accent1">
+                    <a:lumMod val="75000"/>
+                  </a:schemeClr>
+                </a:solidFill>
+              </a:rPr>
               <a:t> и </a:t>
             </a:r>
             <a:r>
-              <a:rPr lang="ru-RU" sz="4000" dirty="0" err="1"/>
+              <a:rPr lang="ru-RU" sz="4000" b="1" dirty="0" err="1">
+                <a:solidFill>
+                  <a:schemeClr val="accent1">
+                    <a:lumMod val="75000"/>
+                  </a:schemeClr>
+                </a:solidFill>
+              </a:rPr>
               <a:t>Secrets</a:t>
             </a:r>
             <a:r>
-              <a:rPr lang="ru-RU" sz="4000" dirty="0"/>
+              <a:rPr lang="ru-RU" sz="4000" b="1" dirty="0">
+                <a:solidFill>
+                  <a:schemeClr val="accent1">
+                    <a:lumMod val="75000"/>
+                  </a:schemeClr>
+                </a:solidFill>
+              </a:rPr>
               <a:t>)</a:t>
             </a:r>
-            <a:endParaRPr lang="ru-RU" sz="4300" b="1" dirty="0"/>
+            <a:endParaRPr lang="ru-RU" sz="4300" b="1" dirty="0">
+              <a:solidFill>
+                <a:schemeClr val="accent1">
+                  <a:lumMod val="75000"/>
+                </a:schemeClr>
+              </a:solidFill>
+            </a:endParaRPr>
           </a:p>
         </p:txBody>
       </p:sp>
@@ -6324,8 +6944,8 @@
         </p:nvSpPr>
         <p:spPr>
           <a:xfrm>
-            <a:off x="838200" y="1690688"/>
-            <a:ext cx="10600944" cy="4673536"/>
+            <a:off x="838200" y="1425512"/>
+            <a:ext cx="10600944" cy="4957000"/>
           </a:xfrm>
         </p:spPr>
         <p:txBody>
@@ -6344,14 +6964,14 @@
               <a:buNone/>
             </a:pPr>
             <a:r>
-              <a:rPr lang="ru-RU" sz="2400" b="1" dirty="0"/>
+              <a:rPr lang="ru-RU" sz="2200" b="1" dirty="0"/>
               <a:t>Источники конфигов в </a:t>
             </a:r>
             <a:r>
-              <a:rPr lang="en-US" sz="2400" b="1" dirty="0"/>
+              <a:rPr lang="en-US" sz="2200" b="1" dirty="0"/>
               <a:t>K8s:</a:t>
             </a:r>
-            <a:endParaRPr lang="ru-RU" sz="2400" b="1" dirty="0"/>
+            <a:endParaRPr lang="ru-RU" sz="2200" b="1" dirty="0"/>
           </a:p>
           <a:p>
             <a:pPr>
@@ -6363,32 +6983,23 @@
               </a:spcBef>
             </a:pPr>
             <a:r>
-              <a:rPr lang="ru-RU" sz="2400" b="1" dirty="0" err="1"/>
+              <a:rPr lang="ru-RU" sz="2200" b="1" dirty="0" err="1"/>
               <a:t>ConfigMap</a:t>
             </a:r>
             <a:r>
-              <a:rPr lang="ru-RU" sz="2400" b="1" dirty="0"/>
+              <a:rPr lang="ru-RU" sz="2200" b="1" dirty="0"/>
               <a:t>:</a:t>
             </a:r>
             <a:r>
-              <a:rPr lang="ru-RU" sz="2400" dirty="0"/>
-              <a:t> Хранит открытые данные (текст, конфигурационные файлы .</a:t>
-            </a:r>
-            <a:r>
-              <a:rPr lang="ru-RU" sz="2400" dirty="0" err="1"/>
-              <a:t>yaml</a:t>
-            </a:r>
-            <a:r>
-              <a:rPr lang="ru-RU" sz="2400" dirty="0"/>
-              <a:t> или .</a:t>
-            </a:r>
-            <a:r>
-              <a:rPr lang="ru-RU" sz="2400" dirty="0" err="1"/>
-              <a:t>json</a:t>
-            </a:r>
-            <a:r>
-              <a:rPr lang="ru-RU" sz="2400" dirty="0"/>
-              <a:t>, URL-адреса сторонних API).</a:t>
+              <a:rPr lang="ru-RU" sz="2200" dirty="0"/>
+              <a:t> Хранит настройки приложения: параметры конфигурации, </a:t>
+            </a:r>
+            <a:br>
+              <a:rPr lang="ru-RU" sz="2200" dirty="0"/>
+            </a:br>
+            <a:r>
+              <a:rPr lang="ru-RU" sz="2200" dirty="0"/>
+              <a:t>URL-адреса сервисов, текстовые файлы, YAML и JSON.</a:t>
             </a:r>
           </a:p>
           <a:p>
@@ -6401,25 +7012,22 @@
               </a:spcBef>
             </a:pPr>
             <a:r>
-              <a:rPr lang="ru-RU" sz="2400" b="1" dirty="0"/>
+              <a:rPr lang="ru-RU" sz="2200" b="1" dirty="0"/>
               <a:t>Secret:</a:t>
             </a:r>
             <a:r>
-              <a:rPr lang="ru-RU" sz="2400" dirty="0"/>
-              <a:t> Хранит зашифрованные (в формате Base64) приватные данные (пароли к БД, токены авторизации, SSL-ключи).</a:t>
-            </a:r>
-            <a:endParaRPr lang="en-US" sz="2400" dirty="0"/>
-          </a:p>
-          <a:p>
-            <a:pPr>
-              <a:lnSpc>
-                <a:spcPct val="120000"/>
-              </a:lnSpc>
-              <a:spcBef>
-                <a:spcPts val="0"/>
-              </a:spcBef>
-            </a:pPr>
-            <a:endParaRPr lang="en-US" sz="1200" dirty="0"/>
+              <a:rPr lang="ru-RU" sz="2200" dirty="0"/>
+              <a:t> Хранит конфиденциальные данные (пароли, токены, сертификаты и т.д.). В </a:t>
+            </a:r>
+            <a:r>
+              <a:rPr lang="ru-RU" sz="2200" dirty="0" err="1"/>
+              <a:t>Kubernetes</a:t>
+            </a:r>
+            <a:r>
+              <a:rPr lang="ru-RU" sz="2200" dirty="0"/>
+              <a:t> они обычно хранятся в кодировке Base64 (это не шифрование).</a:t>
+            </a:r>
+            <a:endParaRPr lang="en-US" sz="2200" dirty="0"/>
           </a:p>
           <a:p>
             <a:pPr marL="0" indent="0">
@@ -6432,22 +7040,31 @@
               <a:buNone/>
             </a:pPr>
             <a:r>
-              <a:rPr lang="ru-RU" sz="2400" dirty="0"/>
-              <a:t>Потенциальная проблема (пример): В конфиге для стенда </a:t>
-            </a:r>
-            <a:r>
-              <a:rPr lang="en-US" sz="2400" dirty="0"/>
-              <a:t>A </a:t>
-            </a:r>
-            <a:r>
-              <a:rPr lang="ru-RU" sz="2400" dirty="0"/>
-              <a:t>забыли перезаписать URL, и приложение стучится на адрес стенда </a:t>
-            </a:r>
-            <a:r>
-              <a:rPr lang="en-US" sz="2400" dirty="0"/>
-              <a:t>B.</a:t>
-            </a:r>
-            <a:endParaRPr lang="ru-RU" sz="2400" dirty="0"/>
+              <a:rPr lang="ru-RU" sz="2200" dirty="0"/>
+              <a:t>Потенциальная проблема (пример): после развертывания </a:t>
+            </a:r>
+            <a:br>
+              <a:rPr lang="ru-RU" sz="2200" dirty="0"/>
+            </a:br>
+            <a:r>
+              <a:rPr lang="ru-RU" sz="2200" dirty="0"/>
+              <a:t>на тестовом стенде приложение обращается к API другого </a:t>
+            </a:r>
+            <a:br>
+              <a:rPr lang="ru-RU" sz="2200" dirty="0"/>
+            </a:br>
+            <a:r>
+              <a:rPr lang="ru-RU" sz="2200" dirty="0"/>
+              <a:t>окружения, потому что в </a:t>
+            </a:r>
+            <a:r>
+              <a:rPr lang="ru-RU" sz="2200" dirty="0" err="1"/>
+              <a:t>ConfigMap</a:t>
+            </a:r>
+            <a:r>
+              <a:rPr lang="ru-RU" sz="2200" dirty="0"/>
+              <a:t> остался неправильный URL.</a:t>
+            </a:r>
           </a:p>
           <a:p>
             <a:pPr marL="0" indent="0">
@@ -6459,7 +7076,37 @@
               </a:spcBef>
               <a:buNone/>
             </a:pPr>
-            <a:endParaRPr lang="ru-RU" sz="1050" dirty="0"/>
+            <a:r>
+              <a:rPr lang="ru-RU" sz="2200" dirty="0"/>
+              <a:t>В </a:t>
+            </a:r>
+            <a:r>
+              <a:rPr lang="ru-RU" sz="2200" b="1" dirty="0" err="1"/>
+              <a:t>Lens</a:t>
+            </a:r>
+            <a:r>
+              <a:rPr lang="ru-RU" sz="2200" b="1" dirty="0"/>
+              <a:t>: </a:t>
+            </a:r>
+            <a:r>
+              <a:rPr lang="ru-RU" sz="2200" dirty="0"/>
+              <a:t>При наличии необходимых прав можно открыть </a:t>
+            </a:r>
+            <a:r>
+              <a:rPr lang="ru-RU" sz="2200" b="1" dirty="0"/>
+              <a:t>Secret</a:t>
+            </a:r>
+            <a:r>
+              <a:rPr lang="ru-RU" sz="2200" dirty="0"/>
+              <a:t> </a:t>
+            </a:r>
+            <a:br>
+              <a:rPr lang="ru-RU" sz="2200" dirty="0"/>
+            </a:br>
+            <a:r>
+              <a:rPr lang="ru-RU" sz="2200" dirty="0"/>
+              <a:t>и посмотреть его содержимое в декодированном виде (иконка «глаз»).</a:t>
+            </a:r>
           </a:p>
           <a:p>
             <a:pPr marL="0" indent="0">
@@ -6472,36 +7119,53 @@
               <a:buNone/>
             </a:pPr>
             <a:r>
-              <a:rPr lang="ru-RU" sz="2400" dirty="0"/>
-              <a:t>Для </a:t>
-            </a:r>
-            <a:r>
-              <a:rPr lang="ru-RU" sz="2400" dirty="0" err="1"/>
-              <a:t>Secrets</a:t>
-            </a:r>
-            <a:r>
-              <a:rPr lang="ru-RU" sz="2400" i="1" dirty="0"/>
-              <a:t>:</a:t>
-            </a:r>
-            <a:r>
-              <a:rPr lang="ru-RU" sz="2400" dirty="0"/>
-              <a:t> в </a:t>
-            </a:r>
-            <a:r>
-              <a:rPr lang="ru-RU" sz="2400" dirty="0" err="1"/>
-              <a:t>Lens</a:t>
-            </a:r>
-            <a:r>
-              <a:rPr lang="ru-RU" sz="2400" dirty="0"/>
-              <a:t> нужно нажать на иконку «глаза», чтобы </a:t>
-            </a:r>
-            <a:br>
-              <a:rPr lang="ru-RU" sz="2400" dirty="0"/>
-            </a:br>
-            <a:r>
-              <a:rPr lang="ru-RU" sz="2400" dirty="0"/>
-              <a:t>декодировать скрытые пароли из Base64 в читаемый текст.</a:t>
-            </a:r>
+              <a:rPr lang="ru-RU" sz="2200" dirty="0"/>
+              <a:t>После изменения </a:t>
+            </a:r>
+            <a:r>
+              <a:rPr lang="ru-RU" sz="2200" dirty="0" err="1"/>
+              <a:t>ConfigMap</a:t>
+            </a:r>
+            <a:r>
+              <a:rPr lang="ru-RU" sz="2200" dirty="0"/>
+              <a:t> или Secret приложение не всегда сразу начинает использовать новые значения. Часто требуется перезапуск </a:t>
+            </a:r>
+            <a:r>
+              <a:rPr lang="ru-RU" sz="2200" dirty="0" err="1"/>
+              <a:t>Pod</a:t>
+            </a:r>
+            <a:r>
+              <a:rPr lang="ru-RU" sz="2200" dirty="0"/>
+              <a:t> или </a:t>
+            </a:r>
+            <a:r>
+              <a:rPr lang="ru-RU" sz="2200" dirty="0" err="1"/>
+              <a:t>rollout</a:t>
+            </a:r>
+            <a:r>
+              <a:rPr lang="ru-RU" sz="2200" dirty="0"/>
+              <a:t> </a:t>
+            </a:r>
+            <a:r>
+              <a:rPr lang="ru-RU" sz="2200" dirty="0" err="1"/>
+              <a:t>Deployment</a:t>
+            </a:r>
+            <a:r>
+              <a:rPr lang="ru-RU" sz="2200" dirty="0"/>
+              <a:t>.</a:t>
+            </a:r>
+          </a:p>
+          <a:p>
+            <a:pPr marL="0" indent="0">
+              <a:lnSpc>
+                <a:spcPct val="120000"/>
+              </a:lnSpc>
+              <a:spcBef>
+                <a:spcPts val="0"/>
+              </a:spcBef>
+              <a:buNone/>
+            </a:pPr>
+            <a:endParaRPr lang="ru-RU" sz="2200" dirty="0"/>
           </a:p>
         </p:txBody>
       </p:sp>
@@ -6527,7 +7191,7 @@
         </p:blipFill>
         <p:spPr>
           <a:xfrm>
-            <a:off x="9823258" y="4826665"/>
+            <a:off x="9923842" y="3606161"/>
             <a:ext cx="1615886" cy="1826327"/>
           </a:xfrm>
           <a:prstGeom prst="rect">
@@ -6535,6 +7199,45 @@
           </a:prstGeom>
         </p:spPr>
       </p:pic>
+      <p:sp>
+        <p:nvSpPr>
+          <p:cNvPr id="8" name="TextBox 7">
+            <a:extLst>
+              <a:ext uri="{FF2B5EF4-FFF2-40B4-BE49-F238E27FC236}">
+                <a16:creationId xmlns:a16="http://schemas.microsoft.com/office/drawing/2014/main" id="{F0928384-470B-E162-707D-69856CB5FF48}"/>
+              </a:ext>
+            </a:extLst>
+          </p:cNvPr>
+          <p:cNvSpPr txBox="1"/>
+          <p:nvPr/>
+        </p:nvSpPr>
+        <p:spPr>
+          <a:xfrm>
+            <a:off x="603504" y="5529887"/>
+            <a:ext cx="234696" cy="646331"/>
+          </a:xfrm>
+          <a:prstGeom prst="rect">
+            <a:avLst/>
+          </a:prstGeom>
+          <a:noFill/>
+        </p:spPr>
+        <p:txBody>
+          <a:bodyPr wrap="square" rtlCol="0">
+            <a:spAutoFit/>
+          </a:bodyPr>
+          <a:lstStyle/>
+          <a:p>
+            <a:r>
+              <a:rPr lang="ru-RU" sz="3600" dirty="0">
+                <a:solidFill>
+                  <a:srgbClr val="FF0000"/>
+                </a:solidFill>
+              </a:rPr>
+              <a:t>!</a:t>
+            </a:r>
+          </a:p>
+        </p:txBody>
+      </p:sp>
     </p:spTree>
     <p:extLst>
       <p:ext uri="{BB962C8B-B14F-4D97-AF65-F5344CB8AC3E}">
@@ -6595,26 +7298,62 @@
           <a:lstStyle/>
           <a:p>
             <a:r>
-              <a:rPr lang="ru-RU" sz="4000" dirty="0"/>
+              <a:rPr lang="ru-RU" sz="4000" b="1" dirty="0">
+                <a:solidFill>
+                  <a:schemeClr val="accent1">
+                    <a:lumMod val="75000"/>
+                  </a:schemeClr>
+                </a:solidFill>
+              </a:rPr>
               <a:t>Конфигурация стендов (</a:t>
             </a:r>
             <a:r>
-              <a:rPr lang="ru-RU" sz="4000" dirty="0" err="1"/>
+              <a:rPr lang="ru-RU" sz="4000" b="1" dirty="0" err="1">
+                <a:solidFill>
+                  <a:schemeClr val="accent1">
+                    <a:lumMod val="75000"/>
+                  </a:schemeClr>
+                </a:solidFill>
+              </a:rPr>
               <a:t>ConfigMaps</a:t>
             </a:r>
             <a:r>
-              <a:rPr lang="ru-RU" sz="4000" dirty="0"/>
+              <a:rPr lang="ru-RU" sz="4000" b="1" dirty="0">
+                <a:solidFill>
+                  <a:schemeClr val="accent1">
+                    <a:lumMod val="75000"/>
+                  </a:schemeClr>
+                </a:solidFill>
+              </a:rPr>
               <a:t> и </a:t>
             </a:r>
             <a:r>
-              <a:rPr lang="ru-RU" sz="4000" dirty="0" err="1"/>
+              <a:rPr lang="ru-RU" sz="4000" b="1" dirty="0" err="1">
+                <a:solidFill>
+                  <a:schemeClr val="accent1">
+                    <a:lumMod val="75000"/>
+                  </a:schemeClr>
+                </a:solidFill>
+              </a:rPr>
               <a:t>Secrets</a:t>
             </a:r>
             <a:r>
-              <a:rPr lang="ru-RU" sz="4000" dirty="0"/>
+              <a:rPr lang="ru-RU" sz="4000" b="1" dirty="0">
+                <a:solidFill>
+                  <a:schemeClr val="accent1">
+                    <a:lumMod val="75000"/>
+                  </a:schemeClr>
+                </a:solidFill>
+              </a:rPr>
               <a:t>)</a:t>
             </a:r>
-            <a:endParaRPr lang="ru-RU" sz="4300" b="1" dirty="0"/>
+            <a:endParaRPr lang="ru-RU" sz="4300" b="1" dirty="0">
+              <a:solidFill>
+                <a:schemeClr val="accent1">
+                  <a:lumMod val="75000"/>
+                </a:schemeClr>
+              </a:solidFill>
+            </a:endParaRPr>
           </a:p>
         </p:txBody>
       </p:sp>
@@ -6650,159 +7389,6 @@
           </a:prstGeom>
         </p:spPr>
       </p:pic>
-      <p:sp>
-        <p:nvSpPr>
-          <p:cNvPr id="13" name="TextBox 12">
-            <a:extLst>
-              <a:ext uri="{FF2B5EF4-FFF2-40B4-BE49-F238E27FC236}">
-                <a16:creationId xmlns:a16="http://schemas.microsoft.com/office/drawing/2014/main" id="{B7046DCD-D979-8BF6-F903-66F67CA264D4}"/>
-              </a:ext>
-            </a:extLst>
-          </p:cNvPr>
-          <p:cNvSpPr txBox="1"/>
-          <p:nvPr/>
-        </p:nvSpPr>
-        <p:spPr>
-          <a:xfrm>
-            <a:off x="676656" y="6163184"/>
-            <a:ext cx="11305794" cy="646331"/>
-          </a:xfrm>
-          <a:prstGeom prst="rect">
-            <a:avLst/>
-          </a:prstGeom>
-          <a:noFill/>
-        </p:spPr>
-        <p:txBody>
-          <a:bodyPr wrap="square">
-            <a:spAutoFit/>
-          </a:bodyPr>
-          <a:lstStyle/>
-          <a:p>
-            <a:pPr>
-              <a:spcBef>
-                <a:spcPts val="900"/>
-              </a:spcBef>
-              <a:spcAft>
-                <a:spcPts val="1200"/>
-              </a:spcAft>
-            </a:pPr>
-            <a:r>
-              <a:rPr lang="ru-RU" sz="1800" b="0" u="none" strike="noStrike" dirty="0">
-                <a:effectLst/>
-                <a:latin typeface="Google Sans"/>
-              </a:rPr>
-              <a:t>Если вы просто изменили </a:t>
-            </a:r>
-            <a:r>
-              <a:rPr lang="ru-RU" sz="1800" b="0" u="none" strike="noStrike" dirty="0" err="1">
-                <a:effectLst/>
-                <a:latin typeface="Google Sans"/>
-              </a:rPr>
-              <a:t>ConfigMap</a:t>
-            </a:r>
-            <a:r>
-              <a:rPr lang="ru-RU" sz="1800" b="0" u="none" strike="noStrike" dirty="0">
-                <a:effectLst/>
-                <a:latin typeface="Google Sans"/>
-              </a:rPr>
-              <a:t>, </a:t>
-            </a:r>
-            <a:r>
-              <a:rPr lang="ru-RU" sz="1800" b="1" u="none" strike="noStrike" dirty="0">
-                <a:effectLst/>
-                <a:latin typeface="Google Sans"/>
-              </a:rPr>
-              <a:t>приложение в поде об этом не узнает</a:t>
-            </a:r>
-            <a:r>
-              <a:rPr lang="ru-RU" sz="1800" b="0" u="none" strike="noStrike" dirty="0">
-                <a:effectLst/>
-                <a:latin typeface="Google Sans"/>
-              </a:rPr>
-              <a:t>. Под уже запущен и прочитал старые переменные при старте. Необходимо перезапустить под (</a:t>
-            </a:r>
-            <a:r>
-              <a:rPr lang="ru-RU" dirty="0"/>
-              <a:t>Обычно </a:t>
-            </a:r>
-            <a:r>
-              <a:rPr lang="ru-RU" dirty="0" err="1"/>
-              <a:t>kubectl</a:t>
-            </a:r>
-            <a:r>
-              <a:rPr lang="ru-RU" dirty="0"/>
-              <a:t> </a:t>
-            </a:r>
-            <a:r>
-              <a:rPr lang="ru-RU" dirty="0" err="1"/>
-              <a:t>rollout</a:t>
-            </a:r>
-            <a:r>
-              <a:rPr lang="ru-RU" dirty="0"/>
-              <a:t> </a:t>
-            </a:r>
-            <a:r>
-              <a:rPr lang="ru-RU" dirty="0" err="1"/>
-              <a:t>restart</a:t>
-            </a:r>
-            <a:r>
-              <a:rPr lang="ru-RU" dirty="0"/>
-              <a:t> </a:t>
-            </a:r>
-            <a:r>
-              <a:rPr lang="ru-RU" dirty="0" err="1"/>
-              <a:t>deployment</a:t>
-            </a:r>
-            <a:r>
-              <a:rPr lang="ru-RU" dirty="0"/>
-              <a:t>)</a:t>
-            </a:r>
-            <a:endParaRPr lang="ru-RU" sz="1800" b="0" u="none" strike="noStrike" dirty="0">
-              <a:effectLst/>
-              <a:latin typeface="Google Sans"/>
-            </a:endParaRPr>
-          </a:p>
-        </p:txBody>
-      </p:sp>
-      <p:sp>
-        <p:nvSpPr>
-          <p:cNvPr id="14" name="TextBox 13">
-            <a:extLst>
-              <a:ext uri="{FF2B5EF4-FFF2-40B4-BE49-F238E27FC236}">
-                <a16:creationId xmlns:a16="http://schemas.microsoft.com/office/drawing/2014/main" id="{EBFCC87C-400A-256C-48A0-DD37AA8A4F3E}"/>
-              </a:ext>
-            </a:extLst>
-          </p:cNvPr>
-          <p:cNvSpPr txBox="1"/>
-          <p:nvPr/>
-        </p:nvSpPr>
-        <p:spPr>
-          <a:xfrm>
-            <a:off x="486821" y="6101629"/>
-            <a:ext cx="351378" cy="707886"/>
-          </a:xfrm>
-          <a:prstGeom prst="rect">
-            <a:avLst/>
-          </a:prstGeom>
-          <a:noFill/>
-        </p:spPr>
-        <p:txBody>
-          <a:bodyPr wrap="none" rtlCol="0">
-            <a:spAutoFit/>
-          </a:bodyPr>
-          <a:lstStyle/>
-          <a:p>
-            <a:r>
-              <a:rPr lang="ru-RU" sz="4000" dirty="0">
-                <a:solidFill>
-                  <a:srgbClr val="FF0000"/>
-                </a:solidFill>
-              </a:rPr>
-              <a:t>!</a:t>
-            </a:r>
-          </a:p>
-        </p:txBody>
-      </p:sp>
     </p:spTree>
     <p:extLst>
       <p:ext uri="{BB962C8B-B14F-4D97-AF65-F5344CB8AC3E}">
@@ -6863,10 +7449,42 @@
           <a:lstStyle/>
           <a:p>
             <a:r>
-              <a:rPr lang="ru-RU" sz="4000" dirty="0"/>
-              <a:t>Статусы подов</a:t>
-            </a:r>
-            <a:endParaRPr lang="ru-RU" sz="4300" b="1" dirty="0"/>
+              <a:rPr lang="ru-RU" sz="4000" b="1" dirty="0">
+                <a:solidFill>
+                  <a:schemeClr val="accent1">
+                    <a:lumMod val="75000"/>
+                  </a:schemeClr>
+                </a:solidFill>
+              </a:rPr>
+              <a:t>Типичные статусы </a:t>
+            </a:r>
+            <a:r>
+              <a:rPr lang="ru-RU" sz="4000" b="1" dirty="0" err="1">
+                <a:solidFill>
+                  <a:schemeClr val="accent1">
+                    <a:lumMod val="75000"/>
+                  </a:schemeClr>
+                </a:solidFill>
+              </a:rPr>
+              <a:t>Pod</a:t>
+            </a:r>
+            <a:r>
+              <a:rPr lang="ru-RU" sz="4000" b="1" dirty="0">
+                <a:solidFill>
+                  <a:schemeClr val="accent1">
+                    <a:lumMod val="75000"/>
+                  </a:schemeClr>
+                </a:solidFill>
+              </a:rPr>
+              <a:t> и их диагностика</a:t>
+            </a:r>
+            <a:endParaRPr lang="ru-RU" sz="4300" b="1" dirty="0">
+              <a:solidFill>
+                <a:schemeClr val="accent1">
+                  <a:lumMod val="75000"/>
+                </a:schemeClr>
+              </a:solidFill>
+            </a:endParaRPr>
           </a:p>
         </p:txBody>
       </p:sp>
@@ -6888,13 +7506,13 @@
         </p:nvSpPr>
         <p:spPr>
           <a:xfrm>
-            <a:off x="838200" y="1509705"/>
-            <a:ext cx="10515600" cy="4351338"/>
+            <a:off x="838200" y="1509704"/>
+            <a:ext cx="10515600" cy="4918527"/>
           </a:xfrm>
         </p:spPr>
         <p:txBody>
           <a:bodyPr>
-            <a:normAutofit fontScale="92500" lnSpcReduction="10000"/>
+            <a:normAutofit fontScale="92500" lnSpcReduction="20000"/>
           </a:bodyPr>
           <a:lstStyle/>
           <a:p>
@@ -6911,7 +7529,31 @@
             </a:r>
             <a:r>
               <a:rPr lang="ru-RU" sz="2400" dirty="0"/>
-              <a:t> — Всё отлично, приложение запущено и готово к тестированию.</a:t>
+              <a:t> </a:t>
+            </a:r>
+            <a:r>
+              <a:rPr lang="en-US" sz="2400" dirty="0"/>
+              <a:t>–</a:t>
+            </a:r>
+            <a:r>
+              <a:rPr lang="ru-RU" sz="2400" dirty="0"/>
+              <a:t> контейнер запущен. Если </a:t>
+            </a:r>
+            <a:r>
+              <a:rPr lang="ru-RU" sz="2400" dirty="0" err="1"/>
+              <a:t>Pod</a:t>
+            </a:r>
+            <a:r>
+              <a:rPr lang="ru-RU" sz="2400" dirty="0"/>
+              <a:t> также находится в состоянии </a:t>
+            </a:r>
+            <a:r>
+              <a:rPr lang="ru-RU" sz="2400" b="1" dirty="0"/>
+              <a:t>Ready</a:t>
+            </a:r>
+            <a:r>
+              <a:rPr lang="ru-RU" sz="2400" dirty="0"/>
+              <a:t>, приложение готово принимать запросы.</a:t>
             </a:r>
           </a:p>
           <a:p>
@@ -6928,7 +7570,47 @@
             </a:r>
             <a:r>
               <a:rPr lang="ru-RU" sz="2400" dirty="0"/>
-              <a:t> — Кластеру не хватает ресурсов (CPU/RAM). K8s ждет, пока освободится место.</a:t>
+              <a:t> </a:t>
+            </a:r>
+            <a:r>
+              <a:rPr lang="en-US" sz="2400" dirty="0"/>
+              <a:t>–</a:t>
+            </a:r>
+            <a:r>
+              <a:rPr lang="ru-RU" sz="2400" dirty="0"/>
+              <a:t> </a:t>
+            </a:r>
+            <a:r>
+              <a:rPr lang="ru-RU" sz="2400" dirty="0" err="1"/>
+              <a:t>Kubernetes</a:t>
+            </a:r>
+            <a:r>
+              <a:rPr lang="ru-RU" sz="2400" dirty="0"/>
+              <a:t> пока не может запустить </a:t>
+            </a:r>
+            <a:r>
+              <a:rPr lang="ru-RU" sz="2400" dirty="0" err="1"/>
+              <a:t>Pod</a:t>
+            </a:r>
+            <a:r>
+              <a:rPr lang="ru-RU" sz="2400" dirty="0"/>
+              <a:t>. Чаще всего не хватает ресурсов (CPU/RAM) или нет подходящей </a:t>
+            </a:r>
+            <a:r>
+              <a:rPr lang="ru-RU" sz="2400" dirty="0" err="1"/>
+              <a:t>Worker</a:t>
+            </a:r>
+            <a:r>
+              <a:rPr lang="ru-RU" sz="2400" dirty="0"/>
+              <a:t> </a:t>
+            </a:r>
+            <a:r>
+              <a:rPr lang="ru-RU" sz="2400" dirty="0" err="1"/>
+              <a:t>Node</a:t>
+            </a:r>
+            <a:r>
+              <a:rPr lang="ru-RU" sz="2400" dirty="0"/>
+              <a:t>.</a:t>
             </a:r>
           </a:p>
           <a:p>
@@ -6945,19 +7627,35 @@
             </a:r>
             <a:r>
               <a:rPr lang="ru-RU" sz="2400" dirty="0"/>
-              <a:t> — Возможные причины: опечатка в названии или теге образа контейнера, нет доступа к </a:t>
+              <a:t> </a:t>
             </a:r>
             <a:r>
               <a:rPr lang="en-US" sz="2400" dirty="0"/>
-              <a:t>registry, </a:t>
-            </a:r>
-            <a:r>
-              <a:rPr lang="ru-RU" sz="2400"/>
-              <a:t>не существует образ</a:t>
-            </a:r>
-            <a:r>
-              <a:rPr lang="en-US" sz="2400"/>
-              <a:t>. </a:t>
+              <a:t>–</a:t>
+            </a:r>
+            <a:r>
+              <a:rPr lang="ru-RU" sz="2400" dirty="0"/>
+              <a:t> неверное имя или тег образа; образ отсутствует в </a:t>
+            </a:r>
+            <a:r>
+              <a:rPr lang="ru-RU" sz="2400" dirty="0" err="1"/>
+              <a:t>registry</a:t>
+            </a:r>
+            <a:r>
+              <a:rPr lang="ru-RU" sz="2400" dirty="0"/>
+              <a:t>; нет доступа к </a:t>
+            </a:r>
+            <a:r>
+              <a:rPr lang="ru-RU" sz="2400" dirty="0" err="1"/>
+              <a:t>registry</a:t>
+            </a:r>
+            <a:r>
+              <a:rPr lang="ru-RU" sz="2400" dirty="0"/>
+              <a:t>.</a:t>
+            </a:r>
+            <a:r>
+              <a:rPr lang="en-US" sz="2400" dirty="0"/>
+              <a:t> </a:t>
             </a:r>
             <a:r>
               <a:rPr lang="ru-RU" sz="2400" dirty="0"/>
@@ -6978,7 +7676,23 @@
             </a:r>
             <a:r>
               <a:rPr lang="ru-RU" sz="2400" dirty="0"/>
-              <a:t> — Приложение падает сразу после старта (ошибка в коде, упала БД или не хватает конфига).</a:t>
+              <a:t> </a:t>
+            </a:r>
+            <a:r>
+              <a:rPr lang="en-US" sz="2400" dirty="0"/>
+              <a:t>–</a:t>
+            </a:r>
+            <a:r>
+              <a:rPr lang="ru-RU" sz="2400" dirty="0"/>
+              <a:t> приложение запускается, завершается с ошибкой и </a:t>
+            </a:r>
+            <a:r>
+              <a:rPr lang="ru-RU" sz="2400" dirty="0" err="1"/>
+              <a:t>Kubernetes</a:t>
+            </a:r>
+            <a:r>
+              <a:rPr lang="ru-RU" sz="2400" dirty="0"/>
+              <a:t> постоянно пытается перезапустить его.</a:t>
             </a:r>
           </a:p>
           <a:p>
@@ -7039,6 +7753,92 @@
               <a:t>, Liveness probe failed).</a:t>
             </a:r>
             <a:endParaRPr lang="ru-RU" sz="2400" dirty="0"/>
+          </a:p>
+          <a:p>
+            <a:pPr marL="0" indent="0">
+              <a:buNone/>
+            </a:pPr>
+            <a:r>
+              <a:rPr lang="ru-RU" sz="2400" dirty="0"/>
+              <a:t>Обращайте внимание не только на статус </a:t>
+            </a:r>
+            <a:r>
+              <a:rPr lang="ru-RU" sz="2400" dirty="0" err="1"/>
+              <a:t>Pod</a:t>
+            </a:r>
+            <a:r>
+              <a:rPr lang="ru-RU" sz="2400" dirty="0"/>
+              <a:t>, но и на колонку </a:t>
+            </a:r>
+            <a:r>
+              <a:rPr lang="ru-RU" sz="2400" b="1" dirty="0"/>
+              <a:t>READY</a:t>
+            </a:r>
+            <a:r>
+              <a:rPr lang="ru-RU" sz="2400" dirty="0"/>
+              <a:t>. </a:t>
+            </a:r>
+            <a:r>
+              <a:rPr lang="ru-RU" sz="2400" dirty="0" err="1"/>
+              <a:t>Pod</a:t>
+            </a:r>
+            <a:r>
+              <a:rPr lang="ru-RU" sz="2400" dirty="0"/>
+              <a:t> может быть </a:t>
+            </a:r>
+            <a:r>
+              <a:rPr lang="ru-RU" sz="2400" b="1" dirty="0" err="1"/>
+              <a:t>Running</a:t>
+            </a:r>
+            <a:r>
+              <a:rPr lang="ru-RU" sz="2400" dirty="0"/>
+              <a:t>, но еще не готов принимать трафик.</a:t>
+            </a:r>
+          </a:p>
+          <a:p>
+            <a:pPr marL="0" indent="0">
+              <a:buNone/>
+            </a:pPr>
+            <a:endParaRPr lang="ru-RU" sz="2400" dirty="0"/>
+          </a:p>
+        </p:txBody>
+      </p:sp>
+      <p:sp>
+        <p:nvSpPr>
+          <p:cNvPr id="4" name="TextBox 3">
+            <a:extLst>
+              <a:ext uri="{FF2B5EF4-FFF2-40B4-BE49-F238E27FC236}">
+                <a16:creationId xmlns:a16="http://schemas.microsoft.com/office/drawing/2014/main" id="{D40D3F48-6CCC-C80E-591D-B7F3E59773A7}"/>
+              </a:ext>
+            </a:extLst>
+          </p:cNvPr>
+          <p:cNvSpPr txBox="1"/>
+          <p:nvPr/>
+        </p:nvSpPr>
+        <p:spPr>
+          <a:xfrm>
+            <a:off x="603504" y="5348296"/>
+            <a:ext cx="234696" cy="646331"/>
+          </a:xfrm>
+          <a:prstGeom prst="rect">
+            <a:avLst/>
+          </a:prstGeom>
+          <a:noFill/>
+        </p:spPr>
+        <p:txBody>
+          <a:bodyPr wrap="square" rtlCol="0">
+            <a:spAutoFit/>
+          </a:bodyPr>
+          <a:lstStyle/>
+          <a:p>
+            <a:r>
+              <a:rPr lang="ru-RU" sz="3600" dirty="0">
+                <a:solidFill>
+                  <a:srgbClr val="FF0000"/>
+                </a:solidFill>
+              </a:rPr>
+              <a:t>!</a:t>
+            </a:r>
           </a:p>
         </p:txBody>
       </p:sp>
@@ -7102,18 +7902,42 @@
           <a:lstStyle/>
           <a:p>
             <a:r>
-              <a:rPr lang="en-US" sz="4000" dirty="0"/>
+              <a:rPr lang="en-US" sz="4000" b="1" dirty="0">
+                <a:solidFill>
+                  <a:schemeClr val="accent1">
+                    <a:lumMod val="75000"/>
+                  </a:schemeClr>
+                </a:solidFill>
+              </a:rPr>
               <a:t>Readiness </a:t>
             </a:r>
             <a:r>
-              <a:rPr lang="ru-RU" sz="4000" dirty="0"/>
+              <a:rPr lang="ru-RU" sz="4000" b="1" dirty="0">
+                <a:solidFill>
+                  <a:schemeClr val="accent1">
+                    <a:lumMod val="75000"/>
+                  </a:schemeClr>
+                </a:solidFill>
+              </a:rPr>
               <a:t>и </a:t>
             </a:r>
             <a:r>
-              <a:rPr lang="en-US" sz="4000" dirty="0"/>
+              <a:rPr lang="en-US" sz="4000" b="1" dirty="0">
+                <a:solidFill>
+                  <a:schemeClr val="accent1">
+                    <a:lumMod val="75000"/>
+                  </a:schemeClr>
+                </a:solidFill>
+              </a:rPr>
               <a:t>Liveness</a:t>
             </a:r>
-            <a:endParaRPr lang="ru-RU" sz="4300" b="1" dirty="0"/>
+            <a:endParaRPr lang="ru-RU" sz="4300" b="1" dirty="0">
+              <a:solidFill>
+                <a:schemeClr val="accent1">
+                  <a:lumMod val="75000"/>
+                </a:schemeClr>
+              </a:solidFill>
+            </a:endParaRPr>
           </a:p>
         </p:txBody>
       </p:sp>
@@ -7288,13 +8112,13 @@
           <p:nvPr>
             <p:extLst>
               <p:ext uri="{D42A27DB-BD31-4B8C-83A1-F6EECF244321}">
-                <p14:modId xmlns:p14="http://schemas.microsoft.com/office/powerpoint/2010/main" val="18696870"/>
+                <p14:modId xmlns:p14="http://schemas.microsoft.com/office/powerpoint/2010/main" val="889147090"/>
               </p:ext>
             </p:extLst>
           </p:nvPr>
         </p:nvGraphicFramePr>
         <p:xfrm>
-          <a:off x="2256536" y="4817928"/>
+          <a:off x="2256536" y="4689912"/>
           <a:ext cx="7678928" cy="1674947"/>
         </p:xfrm>
         <a:graphic>
@@ -7502,18 +8326,42 @@
           <a:lstStyle/>
           <a:p>
             <a:r>
-              <a:rPr lang="en-US" sz="4000" dirty="0"/>
+              <a:rPr lang="en-US" sz="4000" b="1" dirty="0">
+                <a:solidFill>
+                  <a:schemeClr val="accent1">
+                    <a:lumMod val="75000"/>
+                  </a:schemeClr>
+                </a:solidFill>
+              </a:rPr>
               <a:t>Readiness </a:t>
             </a:r>
             <a:r>
-              <a:rPr lang="ru-RU" sz="4000" dirty="0"/>
+              <a:rPr lang="ru-RU" sz="4000" b="1" dirty="0">
+                <a:solidFill>
+                  <a:schemeClr val="accent1">
+                    <a:lumMod val="75000"/>
+                  </a:schemeClr>
+                </a:solidFill>
+              </a:rPr>
               <a:t>и </a:t>
             </a:r>
             <a:r>
-              <a:rPr lang="en-US" sz="4000" dirty="0"/>
+              <a:rPr lang="en-US" sz="4000" b="1" dirty="0">
+                <a:solidFill>
+                  <a:schemeClr val="accent1">
+                    <a:lumMod val="75000"/>
+                  </a:schemeClr>
+                </a:solidFill>
+              </a:rPr>
               <a:t>Liveness</a:t>
             </a:r>
-            <a:endParaRPr lang="ru-RU" sz="4300" b="1" dirty="0"/>
+            <a:endParaRPr lang="ru-RU" sz="4300" b="1" dirty="0">
+              <a:solidFill>
+                <a:schemeClr val="accent1">
+                  <a:lumMod val="75000"/>
+                </a:schemeClr>
+              </a:solidFill>
+            </a:endParaRPr>
           </a:p>
         </p:txBody>
       </p:sp>
@@ -7652,10 +8500,32 @@
           <a:lstStyle/>
           <a:p>
             <a:r>
-              <a:rPr lang="en-US" sz="4300" b="1" dirty="0" err="1"/>
+              <a:rPr lang="ru-RU" sz="4300" b="1" dirty="0">
+                <a:solidFill>
+                  <a:schemeClr val="accent1">
+                    <a:lumMod val="75000"/>
+                  </a:schemeClr>
+                </a:solidFill>
+              </a:rPr>
+              <a:t>Практика с </a:t>
+            </a:r>
+            <a:r>
+              <a:rPr lang="en-US" sz="4300" b="1" dirty="0" err="1">
+                <a:solidFill>
+                  <a:schemeClr val="accent1">
+                    <a:lumMod val="75000"/>
+                  </a:schemeClr>
+                </a:solidFill>
+              </a:rPr>
               <a:t>Minikube</a:t>
             </a:r>
-            <a:endParaRPr lang="ru-RU" sz="4300" b="1" dirty="0"/>
+            <a:endParaRPr lang="ru-RU" sz="4300" b="1" dirty="0">
+              <a:solidFill>
+                <a:schemeClr val="accent1">
+                  <a:lumMod val="75000"/>
+                </a:schemeClr>
+              </a:solidFill>
+            </a:endParaRPr>
           </a:p>
         </p:txBody>
       </p:sp>
@@ -7675,10 +8545,15 @@
             <p:ph idx="1"/>
           </p:nvPr>
         </p:nvSpPr>
-        <p:spPr/>
+        <p:spPr>
+          <a:xfrm>
+            <a:off x="838200" y="1560448"/>
+            <a:ext cx="10515600" cy="4721479"/>
+          </a:xfrm>
+        </p:spPr>
         <p:txBody>
           <a:bodyPr>
-            <a:normAutofit/>
+            <a:normAutofit fontScale="92500" lnSpcReduction="10000"/>
           </a:bodyPr>
           <a:lstStyle/>
           <a:p>
@@ -7687,36 +8562,23 @@
             </a:pPr>
             <a:r>
               <a:rPr lang="ru-RU" dirty="0"/>
-              <a:t>Для желающих разобраться лучше в теме предлагается выполнить «домашнее задание» - настроить свой кластер </a:t>
-            </a:r>
-            <a:r>
-              <a:rPr lang="en-US" dirty="0" err="1"/>
-              <a:t>minikube</a:t>
-            </a:r>
-            <a:r>
-              <a:rPr lang="en-US" dirty="0"/>
-              <a:t>. </a:t>
-            </a:r>
-          </a:p>
-          <a:p>
-            <a:pPr marL="0" indent="0">
-              <a:buNone/>
-            </a:pPr>
+              <a:t>Для тех, кто хочет лучше разобраться в </a:t>
+            </a:r>
+            <a:r>
+              <a:rPr lang="ru-RU" dirty="0" err="1"/>
+              <a:t>Kubernetes</a:t>
+            </a:r>
+            <a:r>
+              <a:rPr lang="ru-RU" dirty="0"/>
+              <a:t>, рекомендуется самостоятельно развернуть локальный кластер </a:t>
+            </a:r>
             <a:r>
               <a:rPr lang="ru-RU" b="1" dirty="0" err="1"/>
               <a:t>Minikube</a:t>
             </a:r>
             <a:r>
               <a:rPr lang="ru-RU" dirty="0"/>
-              <a:t> позволит легко запустить локальный </a:t>
-            </a:r>
-            <a:r>
-              <a:rPr lang="ru-RU" b="1" dirty="0"/>
-              <a:t>одноузловой</a:t>
-            </a:r>
-            <a:r>
-              <a:rPr lang="ru-RU" dirty="0"/>
-              <a:t> кластер Kubernetes (K8s) на обычном ПК внутри виртуальной машины или контейнера (в нашем случае). </a:t>
+              <a:t>.</a:t>
             </a:r>
           </a:p>
           <a:p>
@@ -7724,8 +8586,20 @@
               <a:buNone/>
             </a:pPr>
             <a:r>
-              <a:rPr lang="ru-RU" dirty="0"/>
-              <a:t>Он идеален для изучения K8s, тестирования конфигураций и локальной разработки.</a:t>
+              <a:rPr lang="ru-RU" b="1" dirty="0" err="1"/>
+              <a:t>Minikube</a:t>
+            </a:r>
+            <a:r>
+              <a:rPr lang="ru-RU" dirty="0"/>
+              <a:t> позволяет запустить полноценный одноузловой </a:t>
+            </a:r>
+            <a:r>
+              <a:rPr lang="ru-RU" dirty="0" err="1"/>
+              <a:t>Kubernetes</a:t>
+            </a:r>
+            <a:r>
+              <a:rPr lang="ru-RU" dirty="0"/>
+              <a:t>-кластер на обычном компьютере (в виртуальной машине или контейнере) и безопасно экспериментировать с его настройкой.</a:t>
             </a:r>
           </a:p>
           <a:p>
@@ -7734,7 +8608,24 @@
             </a:pPr>
             <a:r>
               <a:rPr lang="ru-RU" dirty="0"/>
-              <a:t>В практической части мы развернем </a:t>
+              <a:t>Он отлично подходит для изучения </a:t>
+            </a:r>
+            <a:r>
+              <a:rPr lang="ru-RU" dirty="0" err="1"/>
+              <a:t>Kubernetes</a:t>
+            </a:r>
+            <a:r>
+              <a:rPr lang="ru-RU" dirty="0"/>
+              <a:t>, проверки конфигураций и локальной разработки.</a:t>
+            </a:r>
+          </a:p>
+          <a:p>
+            <a:pPr marL="0" indent="0">
+              <a:buNone/>
+            </a:pPr>
+            <a:r>
+              <a:rPr lang="ru-RU" dirty="0"/>
+              <a:t>На практической части мы развернем </a:t>
             </a:r>
             <a:r>
               <a:rPr lang="ru-RU" dirty="0" err="1"/>
@@ -7742,7 +8633,72 @@
             </a:r>
             <a:r>
               <a:rPr lang="ru-RU" dirty="0"/>
-              <a:t> и создадим свое первое приложение - «Банк котиков». Вы увидите все компоненты в действии.</a:t>
+              <a:t>, создадим свое первое приложение – </a:t>
+            </a:r>
+            <a:r>
+              <a:rPr lang="ru-RU" b="1" dirty="0"/>
+              <a:t>«Банк котиков»</a:t>
+            </a:r>
+            <a:r>
+              <a:rPr lang="ru-RU" dirty="0"/>
+              <a:t> – и увидим, как работают </a:t>
+            </a:r>
+            <a:r>
+              <a:rPr lang="ru-RU" dirty="0" err="1"/>
+              <a:t>Pod</a:t>
+            </a:r>
+            <a:r>
+              <a:rPr lang="ru-RU" dirty="0"/>
+              <a:t>, </a:t>
+            </a:r>
+            <a:r>
+              <a:rPr lang="ru-RU" dirty="0" err="1"/>
+              <a:t>Deployment</a:t>
+            </a:r>
+            <a:r>
+              <a:rPr lang="ru-RU" dirty="0"/>
+              <a:t>, Service, </a:t>
+            </a:r>
+            <a:r>
+              <a:rPr lang="ru-RU" dirty="0" err="1"/>
+              <a:t>Ingress</a:t>
+            </a:r>
+            <a:r>
+              <a:rPr lang="ru-RU" dirty="0"/>
+              <a:t>, </a:t>
+            </a:r>
+            <a:r>
+              <a:rPr lang="ru-RU" dirty="0" err="1"/>
+              <a:t>ConfigMap</a:t>
+            </a:r>
+            <a:r>
+              <a:rPr lang="ru-RU" dirty="0"/>
+              <a:t> и другие компоненты </a:t>
+            </a:r>
+            <a:r>
+              <a:rPr lang="ru-RU" dirty="0" err="1"/>
+              <a:t>Kubernetes</a:t>
+            </a:r>
+            <a:r>
+              <a:rPr lang="ru-RU" dirty="0"/>
+              <a:t>.</a:t>
+            </a:r>
+          </a:p>
+          <a:p>
+            <a:pPr marL="0" indent="0">
+              <a:buNone/>
+            </a:pPr>
+            <a:r>
+              <a:rPr lang="ru-RU" dirty="0"/>
+              <a:t>Главная цель практики — перестать бояться </a:t>
+            </a:r>
+            <a:r>
+              <a:rPr lang="ru-RU" dirty="0" err="1"/>
+              <a:t>Kubernetes</a:t>
+            </a:r>
+            <a:r>
+              <a:rPr lang="ru-RU" dirty="0"/>
+              <a:t> и научиться уверенно пользоваться им в повседневной работе QA.</a:t>
             </a:r>
           </a:p>
         </p:txBody>
@@ -7799,8 +8755,34 @@
           <a:lstStyle/>
           <a:p>
             <a:r>
-              <a:rPr lang="ru-RU" dirty="0"/>
-              <a:t>Зачем это?</a:t>
+              <a:rPr lang="ru-RU" b="1" dirty="0">
+                <a:solidFill>
+                  <a:schemeClr val="accent1">
+                    <a:lumMod val="75000"/>
+                  </a:schemeClr>
+                </a:solidFill>
+              </a:rPr>
+              <a:t>Зачем нужен </a:t>
+            </a:r>
+            <a:r>
+              <a:rPr lang="en-US" b="1" dirty="0">
+                <a:solidFill>
+                  <a:schemeClr val="accent1">
+                    <a:lumMod val="75000"/>
+                  </a:schemeClr>
+                </a:solidFill>
+              </a:rPr>
+              <a:t>k8s</a:t>
+            </a:r>
+            <a:r>
+              <a:rPr lang="ru-RU" b="1" dirty="0">
+                <a:solidFill>
+                  <a:schemeClr val="accent1">
+                    <a:lumMod val="75000"/>
+                  </a:schemeClr>
+                </a:solidFill>
+              </a:rPr>
+              <a:t>?</a:t>
             </a:r>
           </a:p>
         </p:txBody>
@@ -7821,10 +8803,15 @@
             <p:ph idx="1"/>
           </p:nvPr>
         </p:nvSpPr>
-        <p:spPr/>
+        <p:spPr>
+          <a:xfrm>
+            <a:off x="838200" y="1690688"/>
+            <a:ext cx="10515600" cy="4776343"/>
+          </a:xfrm>
+        </p:spPr>
         <p:txBody>
           <a:bodyPr>
-            <a:normAutofit fontScale="92500" lnSpcReduction="10000"/>
+            <a:normAutofit fontScale="92500" lnSpcReduction="20000"/>
           </a:bodyPr>
           <a:lstStyle/>
           <a:p>
@@ -7833,22 +8820,80 @@
               <a:t>Мониторинг сервисов и распределение нагрузки</a:t>
             </a:r>
             <a:r>
+              <a:rPr lang="en-US" sz="2000" b="1" dirty="0"/>
+              <a:t> – </a:t>
+            </a:r>
+            <a:r>
+              <a:rPr lang="ru-RU" sz="2000" dirty="0" err="1"/>
+              <a:t>Kubernetes</a:t>
+            </a:r>
+            <a:r>
               <a:rPr lang="ru-RU" sz="2000" dirty="0"/>
-              <a:t> Может обнаружить контейнер, используя имя DNS или собственный IP-адрес. Если трафик в контейнере высокий, может сбалансировать нагрузку и распределить сетевой трафик, чтобы развертывание было стабильным.</a:t>
-            </a:r>
-          </a:p>
-          <a:p>
-            <a:r>
-              <a:rPr lang="ru-RU" sz="2000" b="1" dirty="0" err="1"/>
-              <a:t>Оркестрация</a:t>
-            </a:r>
+              <a:t> предоставляет приложениям постоянные адреса (DNS-имена) и автоматически распределяет входящий трафик между работающими экземплярами приложения. </a:t>
+            </a:r>
+            <a:r>
+              <a:rPr lang="ru-RU" sz="2000" i="1" dirty="0">
+                <a:solidFill>
+                  <a:schemeClr val="accent1">
+                    <a:lumMod val="75000"/>
+                  </a:schemeClr>
+                </a:solidFill>
+              </a:rPr>
+              <a:t>Поэтому</a:t>
+            </a:r>
+            <a:r>
+              <a:rPr lang="en-US" sz="2000" i="1" dirty="0">
+                <a:solidFill>
+                  <a:schemeClr val="accent1">
+                    <a:lumMod val="75000"/>
+                  </a:schemeClr>
+                </a:solidFill>
+              </a:rPr>
+              <a:t> </a:t>
+            </a:r>
+            <a:r>
+              <a:rPr lang="ru-RU" sz="2000" i="1" dirty="0">
+                <a:solidFill>
+                  <a:schemeClr val="accent1">
+                    <a:lumMod val="75000"/>
+                  </a:schemeClr>
+                </a:solidFill>
+              </a:rPr>
+              <a:t>нет резона обращаться к </a:t>
+            </a:r>
+            <a:r>
+              <a:rPr lang="ru-RU" sz="2000" i="1" dirty="0" err="1">
+                <a:solidFill>
+                  <a:schemeClr val="accent1">
+                    <a:lumMod val="75000"/>
+                  </a:schemeClr>
+                </a:solidFill>
+              </a:rPr>
+              <a:t>Pod</a:t>
+            </a:r>
+            <a:r>
+              <a:rPr lang="ru-RU" sz="2000" i="1" dirty="0">
+                <a:solidFill>
+                  <a:schemeClr val="accent1">
+                    <a:lumMod val="75000"/>
+                  </a:schemeClr>
+                </a:solidFill>
+              </a:rPr>
+              <a:t> по его IP.</a:t>
+            </a:r>
+          </a:p>
+          <a:p>
             <a:r>
               <a:rPr lang="ru-RU" sz="2000" b="1" dirty="0"/>
-              <a:t> хранилища</a:t>
+              <a:t>Работа с хранилищем</a:t>
+            </a:r>
+            <a:r>
+              <a:rPr lang="en-US" sz="2000" b="1" dirty="0"/>
+              <a:t> – </a:t>
             </a:r>
             <a:r>
               <a:rPr lang="ru-RU" sz="2000" dirty="0"/>
-              <a:t> Позволяет автоматически смонтировать систему хранения по выбору.</a:t>
+              <a:t>Позволяет автоматически подключать постоянные хранилища данных к приложениям независимо от того, на каком узле они запущены.</a:t>
             </a:r>
           </a:p>
           <a:p>
@@ -7857,19 +8902,12 @@
               <a:t>Автоматическое развертывание и откаты</a:t>
             </a:r>
             <a:r>
+              <a:rPr lang="en-US" sz="2000" b="1" dirty="0"/>
+              <a:t> – </a:t>
+            </a:r>
+            <a:r>
               <a:rPr lang="ru-RU" sz="2000" dirty="0"/>
-              <a:t> Можно описать желаемое состояние развернутых контейнеров и изменить фактическое состояние на желаемое. </a:t>
-            </a:r>
-            <a:endParaRPr lang="en-US" sz="2000" dirty="0"/>
-          </a:p>
-          <a:p>
-            <a:r>
-              <a:rPr lang="ru-RU" sz="2000" b="1" dirty="0"/>
-              <a:t>Автоматическое распределение нагрузки</a:t>
-            </a:r>
-            <a:r>
-              <a:rPr lang="ru-RU" sz="2000" dirty="0"/>
-              <a:t> Вы предоставляете Kubernetes кластер узлов, который он может использовать для запуска контейнерных задач. </a:t>
+              <a:t>Поддерживает декларативный подход: вы описываете желаемое состояние приложения, а </a:t>
             </a:r>
             <a:r>
               <a:rPr lang="ru-RU" sz="2000" dirty="0" err="1"/>
@@ -7877,35 +8915,167 @@
             </a:r>
             <a:r>
               <a:rPr lang="ru-RU" sz="2000" dirty="0"/>
-              <a:t> может разместить контейнеры на ваших узлах так, чтобы наиболее эффективно использовать ресурсы.</a:t>
+              <a:t> приводит кластер к этому состоянию. При необходимости можно выполнить откат на предыдущую версию. </a:t>
+            </a:r>
+            <a:r>
+              <a:rPr lang="ru-RU" sz="2000" i="1" dirty="0">
+                <a:solidFill>
+                  <a:schemeClr val="accent1">
+                    <a:lumMod val="75000"/>
+                  </a:schemeClr>
+                </a:solidFill>
+              </a:rPr>
+              <a:t>После релиза некоторое время могут существовать старые и новые </a:t>
+            </a:r>
+            <a:r>
+              <a:rPr lang="ru-RU" sz="2000" i="1" dirty="0" err="1">
+                <a:solidFill>
+                  <a:schemeClr val="accent1">
+                    <a:lumMod val="75000"/>
+                  </a:schemeClr>
+                </a:solidFill>
+              </a:rPr>
+              <a:t>Pod</a:t>
+            </a:r>
+            <a:r>
+              <a:rPr lang="ru-RU" sz="2000" i="1" dirty="0">
+                <a:solidFill>
+                  <a:schemeClr val="accent1">
+                    <a:lumMod val="75000"/>
+                  </a:schemeClr>
+                </a:solidFill>
+              </a:rPr>
+              <a:t> одновременно.</a:t>
             </a:r>
           </a:p>
           <a:p>
             <a:r>
               <a:rPr lang="ru-RU" sz="2000" b="1" dirty="0"/>
-              <a:t>Самоконтроль</a:t>
+              <a:t>Оптимальное размещение контейнеров</a:t>
+            </a:r>
+            <a:r>
+              <a:rPr lang="en-US" sz="2000" b="1" dirty="0"/>
+              <a:t> – </a:t>
             </a:r>
             <a:r>
               <a:rPr lang="ru-RU" sz="2000" dirty="0"/>
-              <a:t> Перезапускает отказавшие контейнеры, заменяет и завершает работу контейнеров, которые не проходят определенную пользователем проверку работоспособности, и не показывает их клиентам, пока они не будут готовы к обслуживанию.</a:t>
+              <a:t>Автоматически выбирает, на каких узлах кластера запускать контейнеры, чтобы эффективно использовать доступные ресурсы (CPU и память).</a:t>
             </a:r>
           </a:p>
           <a:p>
             <a:r>
               <a:rPr lang="ru-RU" sz="2000" b="1" dirty="0"/>
-              <a:t>Управление конфиденциальной информацией и конфигурацией</a:t>
+              <a:t>Самовосстановление (Self-</a:t>
+            </a:r>
+            <a:r>
+              <a:rPr lang="ru-RU" sz="2000" b="1" dirty="0" err="1"/>
+              <a:t>healing</a:t>
+            </a:r>
+            <a:r>
+              <a:rPr lang="ru-RU" sz="2000" b="1" dirty="0"/>
+              <a:t>)</a:t>
+            </a:r>
+            <a:r>
+              <a:rPr lang="en-US" sz="2000" b="1" dirty="0"/>
+              <a:t> – </a:t>
             </a:r>
             <a:r>
               <a:rPr lang="ru-RU" sz="2000" dirty="0"/>
-              <a:t> Kubernetes может хранить и управлять конфиденциальной информацией, такой как пароли, </a:t>
+              <a:t>Следит за состоянием приложений: перезапускает контейнеры при сбоях, заменяет отказавшие </a:t>
             </a:r>
             <a:r>
               <a:rPr lang="ru-RU" sz="2000" dirty="0" err="1"/>
-              <a:t>OAuth</a:t>
+              <a:t>Pod'ы</a:t>
             </a:r>
             <a:r>
               <a:rPr lang="ru-RU" sz="2000" dirty="0"/>
-              <a:t>-токены и ключи SSH. </a:t>
+              <a:t> и не направляет трафик на приложение, пока оно не будет готово принимать запросы.</a:t>
+            </a:r>
+            <a:r>
+              <a:rPr lang="en-US" sz="2000" dirty="0"/>
+              <a:t> </a:t>
+            </a:r>
+            <a:r>
+              <a:rPr lang="ru-RU" sz="2100" i="1" dirty="0">
+                <a:solidFill>
+                  <a:schemeClr val="accent1">
+                    <a:lumMod val="75000"/>
+                  </a:schemeClr>
+                </a:solidFill>
+              </a:rPr>
+              <a:t>Поэтому удаление </a:t>
+            </a:r>
+            <a:r>
+              <a:rPr lang="ru-RU" sz="2100" i="1" dirty="0" err="1">
+                <a:solidFill>
+                  <a:schemeClr val="accent1">
+                    <a:lumMod val="75000"/>
+                  </a:schemeClr>
+                </a:solidFill>
+              </a:rPr>
+              <a:t>Pod</a:t>
+            </a:r>
+            <a:r>
+              <a:rPr lang="ru-RU" sz="2100" i="1" dirty="0">
+                <a:solidFill>
+                  <a:schemeClr val="accent1">
+                    <a:lumMod val="75000"/>
+                  </a:schemeClr>
+                </a:solidFill>
+              </a:rPr>
+              <a:t> обычно не приводит к падению приложения.</a:t>
+            </a:r>
+          </a:p>
+          <a:p>
+            <a:r>
+              <a:rPr lang="ru-RU" sz="2000" b="1" dirty="0"/>
+              <a:t>Управление конфигурацией и секретами</a:t>
+            </a:r>
+            <a:r>
+              <a:rPr lang="en-US" sz="2000" b="1" dirty="0"/>
+              <a:t> – </a:t>
+            </a:r>
+            <a:r>
+              <a:rPr lang="ru-RU" sz="2000" dirty="0"/>
+              <a:t>Позволяет хранить настройки приложения (</a:t>
+            </a:r>
+            <a:r>
+              <a:rPr lang="ru-RU" sz="2000" dirty="0" err="1"/>
+              <a:t>ConfigMap</a:t>
+            </a:r>
+            <a:r>
+              <a:rPr lang="ru-RU" sz="2000" dirty="0"/>
+              <a:t>) и конфиденциальные данные (Secret), такие как пароли, токены и ключи. </a:t>
+            </a:r>
+            <a:r>
+              <a:rPr lang="ru-RU" sz="2100" i="1" dirty="0">
+                <a:solidFill>
+                  <a:schemeClr val="accent1">
+                    <a:lumMod val="75000"/>
+                  </a:schemeClr>
+                </a:solidFill>
+              </a:rPr>
+              <a:t>Изменение </a:t>
+            </a:r>
+            <a:r>
+              <a:rPr lang="ru-RU" sz="2100" i="1" dirty="0" err="1">
+                <a:solidFill>
+                  <a:schemeClr val="accent1">
+                    <a:lumMod val="75000"/>
+                  </a:schemeClr>
+                </a:solidFill>
+              </a:rPr>
+              <a:t>ConfigMap</a:t>
+            </a:r>
+            <a:r>
+              <a:rPr lang="ru-RU" sz="2100" i="1" dirty="0">
+                <a:solidFill>
+                  <a:schemeClr val="accent1">
+                    <a:lumMod val="75000"/>
+                  </a:schemeClr>
+                </a:solidFill>
+              </a:rPr>
+              <a:t> не всегда сразу влияет на приложение.</a:t>
             </a:r>
           </a:p>
         </p:txBody>
@@ -7962,7 +9132,13 @@
           <a:lstStyle/>
           <a:p>
             <a:r>
-              <a:rPr lang="ru-RU" dirty="0"/>
+              <a:rPr lang="ru-RU" b="1" dirty="0">
+                <a:solidFill>
+                  <a:schemeClr val="accent1">
+                    <a:lumMod val="75000"/>
+                  </a:schemeClr>
+                </a:solidFill>
+              </a:rPr>
               <a:t>Основные компоненты</a:t>
             </a:r>
           </a:p>
@@ -8053,14 +9229,32 @@
           <a:lstStyle/>
           <a:p>
             <a:r>
-              <a:rPr lang="ru-RU" dirty="0"/>
+              <a:rPr lang="ru-RU" b="1" dirty="0">
+                <a:solidFill>
+                  <a:schemeClr val="accent1">
+                    <a:lumMod val="75000"/>
+                  </a:schemeClr>
+                </a:solidFill>
+              </a:rPr>
               <a:t>Основные компоненты. </a:t>
             </a:r>
             <a:r>
-              <a:rPr lang="en-US" dirty="0"/>
+              <a:rPr lang="en-US" b="1" dirty="0">
+                <a:solidFill>
+                  <a:schemeClr val="accent1">
+                    <a:lumMod val="75000"/>
+                  </a:schemeClr>
+                </a:solidFill>
+              </a:rPr>
               <a:t>Control Plane</a:t>
             </a:r>
-            <a:endParaRPr lang="ru-RU" dirty="0"/>
+            <a:endParaRPr lang="ru-RU" b="1" dirty="0">
+              <a:solidFill>
+                <a:schemeClr val="accent1">
+                  <a:lumMod val="75000"/>
+                </a:schemeClr>
+              </a:solidFill>
+            </a:endParaRPr>
           </a:p>
         </p:txBody>
       </p:sp>
@@ -8083,7 +9277,7 @@
         <p:spPr/>
         <p:txBody>
           <a:bodyPr>
-            <a:normAutofit fontScale="92500" lnSpcReduction="10000"/>
+            <a:normAutofit fontScale="85000" lnSpcReduction="10000"/>
           </a:bodyPr>
           <a:lstStyle/>
           <a:p>
@@ -8096,15 +9290,15 @@
             </a:r>
             <a:r>
               <a:rPr lang="ru-RU" dirty="0"/>
-              <a:t> — единственная точка входа. Всё</a:t>
-            </a:r>
-            <a:r>
-              <a:rPr lang="en-US" dirty="0"/>
-              <a:t> </a:t>
-            </a:r>
-            <a:r>
-              <a:rPr lang="ru-RU" dirty="0"/>
-              <a:t>управление через </a:t>
+              <a:t> – единственная точка входа в </a:t>
+            </a:r>
+            <a:r>
+              <a:rPr lang="ru-RU" dirty="0" err="1"/>
+              <a:t>Kubernetes</a:t>
+            </a:r>
+            <a:r>
+              <a:rPr lang="ru-RU" dirty="0"/>
+              <a:t>. Все команды </a:t>
             </a:r>
             <a:r>
               <a:rPr lang="ru-RU" dirty="0" err="1"/>
@@ -8112,15 +9306,15 @@
             </a:r>
             <a:r>
               <a:rPr lang="ru-RU" dirty="0"/>
-              <a:t> (инструмент командной строки) или через CI/CD-</a:t>
+              <a:t>, </a:t>
             </a:r>
             <a:r>
               <a:rPr lang="ru-RU" dirty="0" err="1"/>
-              <a:t>пайплайн</a:t>
-            </a:r>
-            <a:r>
-              <a:rPr lang="ru-RU" dirty="0"/>
-              <a:t>, проходит через него. </a:t>
+              <a:t>Lens</a:t>
+            </a:r>
+            <a:r>
+              <a:rPr lang="ru-RU" dirty="0"/>
+              <a:t>, CI/CD и другие инструменты взаимодействуют с кластером через API Server.</a:t>
             </a:r>
           </a:p>
           <a:p>
@@ -8133,7 +9327,7 @@
             </a:r>
             <a:r>
               <a:rPr lang="ru-RU" dirty="0"/>
-              <a:t> решает, на каком узле запускать новый под, анализируя доступные ресурсы. </a:t>
+              <a:t> решает, на каком узле запускать новый под, учитывая доступные ресурсы (CPU, память и другие ограничения). </a:t>
             </a:r>
           </a:p>
           <a:p>
@@ -8150,7 +9344,15 @@
             </a:r>
             <a:r>
               <a:rPr lang="ru-RU" dirty="0"/>
-              <a:t> — запускает процессы приведения текущего состояния кластера к желаемому (контроллеры: количество реплик, связь сервисов и подов, сбои нод и т.д.). Здесь: </a:t>
+              <a:t> следит, чтобы фактическое состояние кластера соответствовало описанному в конфигурации. Например, поддерживает нужное количество </a:t>
+            </a:r>
+            <a:r>
+              <a:rPr lang="ru-RU" dirty="0" err="1"/>
+              <a:t>Pod'ов</a:t>
+            </a:r>
+            <a:r>
+              <a:rPr lang="ru-RU" dirty="0"/>
+              <a:t>, восстанавливает их после сбоев и управляет другими контроллерами. Здесь: </a:t>
             </a:r>
             <a:r>
               <a:rPr lang="ru-RU" dirty="0" err="1"/>
@@ -8211,7 +9413,15 @@
             </a:r>
             <a:r>
               <a:rPr lang="ru-RU" dirty="0"/>
-              <a:t> — распределённое </a:t>
+              <a:t>  – база данных </a:t>
+            </a:r>
+            <a:r>
+              <a:rPr lang="ru-RU" dirty="0" err="1"/>
+              <a:t>Kubernetes</a:t>
+            </a:r>
+            <a:r>
+              <a:rPr lang="ru-RU" dirty="0"/>
+              <a:t> (</a:t>
             </a:r>
             <a:r>
               <a:rPr lang="ru-RU" dirty="0" err="1"/>
@@ -8219,15 +9429,7 @@
             </a:r>
             <a:r>
               <a:rPr lang="ru-RU" dirty="0"/>
-              <a:t> хранилище, где хранится </a:t>
-            </a:r>
-            <a:r>
-              <a:rPr lang="ru-RU" b="1" dirty="0"/>
-              <a:t>всё состояние кластера</a:t>
-            </a:r>
-            <a:r>
-              <a:rPr lang="ru-RU" dirty="0"/>
-              <a:t>. Потеряете </a:t>
+              <a:t> хранилище), в которой хранится всё состояние кластера. Потеряете </a:t>
             </a:r>
             <a:r>
               <a:rPr lang="ru-RU" dirty="0" err="1"/>
@@ -8237,6 +9439,64 @@
               <a:rPr lang="ru-RU" dirty="0"/>
               <a:t> без бэкапа — потеряете кластер.</a:t>
             </a:r>
+          </a:p>
+          <a:p>
+            <a:pPr marL="0" indent="0">
+              <a:buNone/>
+            </a:pPr>
+            <a:r>
+              <a:rPr lang="ru-RU" b="1" dirty="0" err="1"/>
+              <a:t>kubectl</a:t>
+            </a:r>
+            <a:r>
+              <a:rPr lang="ru-RU" b="1" dirty="0"/>
+              <a:t> </a:t>
+            </a:r>
+            <a:r>
+              <a:rPr lang="ru-RU" dirty="0"/>
+              <a:t>➜ </a:t>
+            </a:r>
+            <a:r>
+              <a:rPr lang="ru-RU" b="1" dirty="0"/>
+              <a:t>API Server </a:t>
+            </a:r>
+            <a:r>
+              <a:rPr lang="ru-RU" dirty="0"/>
+              <a:t>➜ </a:t>
+            </a:r>
+            <a:r>
+              <a:rPr lang="ru-RU" b="1" dirty="0" err="1"/>
+              <a:t>Controller</a:t>
+            </a:r>
+            <a:r>
+              <a:rPr lang="ru-RU" b="1" dirty="0"/>
+              <a:t> Manager / </a:t>
+            </a:r>
+            <a:r>
+              <a:rPr lang="ru-RU" b="1" dirty="0" err="1"/>
+              <a:t>Scheduler</a:t>
+            </a:r>
+            <a:r>
+              <a:rPr lang="ru-RU" b="1" dirty="0"/>
+              <a:t> </a:t>
+            </a:r>
+            <a:r>
+              <a:rPr lang="ru-RU" dirty="0"/>
+              <a:t>➜ </a:t>
+            </a:r>
+            <a:r>
+              <a:rPr lang="ru-RU" b="1" dirty="0" err="1"/>
+              <a:t>Worker</a:t>
+            </a:r>
+            <a:r>
+              <a:rPr lang="ru-RU" b="1" dirty="0"/>
+              <a:t> </a:t>
+            </a:r>
+            <a:r>
+              <a:rPr lang="ru-RU" b="1" dirty="0" err="1"/>
+              <a:t>Node</a:t>
+            </a:r>
+            <a:endParaRPr lang="ru-RU" b="1" dirty="0"/>
           </a:p>
         </p:txBody>
       </p:sp>
@@ -8292,14 +9552,32 @@
           <a:lstStyle/>
           <a:p>
             <a:r>
-              <a:rPr lang="ru-RU" dirty="0"/>
+              <a:rPr lang="ru-RU" b="1" dirty="0">
+                <a:solidFill>
+                  <a:schemeClr val="accent1">
+                    <a:lumMod val="75000"/>
+                  </a:schemeClr>
+                </a:solidFill>
+              </a:rPr>
               <a:t>Основные компоненты. </a:t>
             </a:r>
             <a:r>
-              <a:rPr lang="en-US" dirty="0"/>
+              <a:rPr lang="en-US" b="1" dirty="0">
+                <a:solidFill>
+                  <a:schemeClr val="accent1">
+                    <a:lumMod val="75000"/>
+                  </a:schemeClr>
+                </a:solidFill>
+              </a:rPr>
               <a:t>Worker node</a:t>
             </a:r>
-            <a:endParaRPr lang="ru-RU" dirty="0"/>
+            <a:endParaRPr lang="ru-RU" b="1" dirty="0">
+              <a:solidFill>
+                <a:schemeClr val="accent1">
+                  <a:lumMod val="75000"/>
+                </a:schemeClr>
+              </a:solidFill>
+            </a:endParaRPr>
           </a:p>
         </p:txBody>
       </p:sp>
@@ -8322,7 +9600,7 @@
         <p:spPr/>
         <p:txBody>
           <a:bodyPr>
-            <a:normAutofit fontScale="92500" lnSpcReduction="10000"/>
+            <a:normAutofit fontScale="85000" lnSpcReduction="10000"/>
           </a:bodyPr>
           <a:lstStyle/>
           <a:p>
@@ -8330,26 +9608,21 @@
               <a:buNone/>
             </a:pPr>
             <a:r>
-              <a:rPr lang="en-US" b="1" dirty="0"/>
-              <a:t>pod</a:t>
-            </a:r>
-            <a:r>
-              <a:rPr lang="en-US" dirty="0"/>
-              <a:t> – </a:t>
-            </a:r>
-            <a:r>
-              <a:rPr lang="ru-RU" dirty="0"/>
-              <a:t>это абстрактный объект Kubernetes, представляющий собой группу из одного или нескольких контейнеров приложения. Контейнеры внутри </a:t>
+              <a:rPr lang="ru-RU" b="1" dirty="0" err="1"/>
+              <a:t>Pod</a:t>
+            </a:r>
+            <a:r>
+              <a:rPr lang="ru-RU" dirty="0"/>
+              <a:t> – минимальная единица развертывания в </a:t>
             </a:r>
             <a:r>
               <a:rPr lang="ru-RU" dirty="0" err="1"/>
-              <a:t>Pod</a:t>
-            </a:r>
-            <a:r>
-              <a:rPr lang="ru-RU" dirty="0"/>
-              <a:t> совместно используют сеть и хранилище.</a:t>
-            </a:r>
-            <a:endParaRPr lang="en-US" b="1" dirty="0"/>
+              <a:t>Kubernetes</a:t>
+            </a:r>
+            <a:r>
+              <a:rPr lang="ru-RU" dirty="0"/>
+              <a:t>. Обычно содержит один или несколько контейнеров приложения, которые совместно используют сеть и хранилище.</a:t>
+            </a:r>
           </a:p>
           <a:p>
             <a:pPr marL="0" indent="0">
@@ -8361,17 +9634,101 @@
             </a:r>
             <a:r>
               <a:rPr lang="ru-RU" dirty="0"/>
-              <a:t> — агент на ноде, который отслеживает </a:t>
-            </a:r>
-            <a:r>
-              <a:rPr lang="en-US" dirty="0" err="1"/>
+              <a:t> – агент, работающий на каждой </a:t>
+            </a:r>
+            <a:r>
+              <a:rPr lang="ru-RU" dirty="0" err="1"/>
+              <a:t>Worker</a:t>
+            </a:r>
+            <a:r>
+              <a:rPr lang="ru-RU" dirty="0"/>
+              <a:t> </a:t>
+            </a:r>
+            <a:r>
+              <a:rPr lang="ru-RU" dirty="0" err="1"/>
+              <a:t>Node</a:t>
+            </a:r>
+            <a:r>
+              <a:rPr lang="ru-RU" dirty="0"/>
+              <a:t>. Получает информацию от API Server (</a:t>
+            </a:r>
+            <a:r>
+              <a:rPr lang="ru-RU" dirty="0" err="1"/>
               <a:t>podSpec</a:t>
             </a:r>
             <a:r>
               <a:rPr lang="ru-RU" dirty="0"/>
-              <a:t> в API Server и приводит запущенные на ноде контейнеры к описанному состоянию. Перезапустит контейнер, если тот зависнет. </a:t>
-            </a:r>
-            <a:endParaRPr lang="en-US" dirty="0"/>
+              <a:t>), следит за состоянием </a:t>
+            </a:r>
+            <a:r>
+              <a:rPr lang="ru-RU" dirty="0" err="1"/>
+              <a:t>Pod'ов</a:t>
+            </a:r>
+            <a:r>
+              <a:rPr lang="ru-RU" dirty="0"/>
+              <a:t> и обеспечивает их запуск и работу. Если контейнер завершился с ошибкой, </a:t>
+            </a:r>
+            <a:r>
+              <a:rPr lang="ru-RU" dirty="0" err="1"/>
+              <a:t>kubelet</a:t>
+            </a:r>
+            <a:r>
+              <a:rPr lang="ru-RU" dirty="0"/>
+              <a:t> запустит его заново. </a:t>
+            </a:r>
+            <a:br>
+              <a:rPr lang="ru-RU" dirty="0"/>
+            </a:br>
+            <a:r>
+              <a:rPr lang="ru-RU" i="1" dirty="0">
+                <a:solidFill>
+                  <a:schemeClr val="accent1">
+                    <a:lumMod val="75000"/>
+                  </a:schemeClr>
+                </a:solidFill>
+              </a:rPr>
+              <a:t>Если контейнер неожиданно перезапустился, это не всегда означает, что его кто-то вручную перезапустил – это мог сделать </a:t>
+            </a:r>
+            <a:r>
+              <a:rPr lang="ru-RU" i="1" dirty="0" err="1">
+                <a:solidFill>
+                  <a:schemeClr val="accent1">
+                    <a:lumMod val="75000"/>
+                  </a:schemeClr>
+                </a:solidFill>
+              </a:rPr>
+              <a:t>kubelet</a:t>
+            </a:r>
+            <a:r>
+              <a:rPr lang="ru-RU" i="1" dirty="0">
+                <a:solidFill>
+                  <a:schemeClr val="accent1">
+                    <a:lumMod val="75000"/>
+                  </a:schemeClr>
+                </a:solidFill>
+              </a:rPr>
+              <a:t> по решению </a:t>
+            </a:r>
+            <a:r>
+              <a:rPr lang="ru-RU" i="1" dirty="0" err="1">
+                <a:solidFill>
+                  <a:schemeClr val="accent1">
+                    <a:lumMod val="75000"/>
+                  </a:schemeClr>
+                </a:solidFill>
+              </a:rPr>
+              <a:t>Kubernetes</a:t>
+            </a:r>
+            <a:r>
+              <a:rPr lang="ru-RU" i="1" dirty="0">
+                <a:solidFill>
+                  <a:schemeClr val="accent1">
+                    <a:lumMod val="75000"/>
+                  </a:schemeClr>
+                </a:solidFill>
+              </a:rPr>
+              <a:t>.</a:t>
+            </a:r>
           </a:p>
           <a:p>
             <a:pPr marL="0" indent="0">
@@ -8383,23 +9740,15 @@
             </a:r>
             <a:r>
               <a:rPr lang="ru-RU" dirty="0"/>
-              <a:t> реализует сетевую модель Service (</a:t>
+              <a:t> – отвечает за сетевое взаимодействие внутри кластера. Обеспечивает работу Service и маршрутизацию трафика к нужным </a:t>
             </a:r>
             <a:r>
               <a:rPr lang="ru-RU" dirty="0" err="1"/>
-              <a:t>iptables</a:t>
-            </a:r>
-            <a:r>
-              <a:rPr lang="ru-RU" dirty="0"/>
-              <a:t>/</a:t>
-            </a:r>
-            <a:r>
-              <a:rPr lang="ru-RU" dirty="0" err="1"/>
-              <a:t>ipvs</a:t>
-            </a:r>
-            <a:r>
-              <a:rPr lang="ru-RU" dirty="0"/>
-              <a:t>), обеспечивая маршрутизацию трафика к подам.</a:t>
+              <a:t>Pod'ам</a:t>
+            </a:r>
+            <a:r>
+              <a:rPr lang="ru-RU" dirty="0"/>
+              <a:t>.</a:t>
             </a:r>
           </a:p>
           <a:p>
@@ -8420,7 +9769,15 @@
             </a:r>
             <a:r>
               <a:rPr lang="ru-RU" dirty="0"/>
-              <a:t>  — это программный компонент, необходимый для запуска контейнеров. Этот компонент собственно отвечает за любые манипуляции с контейнерами.</a:t>
+              <a:t> – компонент, который непосредственно запускает и останавливает контейнеры. Например, </a:t>
+            </a:r>
+            <a:r>
+              <a:rPr lang="ru-RU" dirty="0" err="1"/>
+              <a:t>containerd</a:t>
+            </a:r>
+            <a:r>
+              <a:rPr lang="ru-RU" dirty="0"/>
+              <a:t> или CRI-O.</a:t>
             </a:r>
           </a:p>
           <a:p>
@@ -8486,14 +9843,32 @@
           <a:lstStyle/>
           <a:p>
             <a:r>
-              <a:rPr lang="ru-RU" dirty="0"/>
+              <a:rPr lang="ru-RU" b="1" dirty="0">
+                <a:solidFill>
+                  <a:schemeClr val="accent1">
+                    <a:lumMod val="75000"/>
+                  </a:schemeClr>
+                </a:solidFill>
+              </a:rPr>
               <a:t>Основные компоненты. </a:t>
             </a:r>
             <a:r>
-              <a:rPr lang="en-US" dirty="0"/>
+              <a:rPr lang="en-US" b="1" dirty="0">
+                <a:solidFill>
+                  <a:schemeClr val="accent1">
+                    <a:lumMod val="75000"/>
+                  </a:schemeClr>
+                </a:solidFill>
+              </a:rPr>
               <a:t>Context</a:t>
             </a:r>
-            <a:endParaRPr lang="ru-RU" dirty="0"/>
+            <a:endParaRPr lang="ru-RU" b="1" dirty="0">
+              <a:solidFill>
+                <a:schemeClr val="accent1">
+                  <a:lumMod val="75000"/>
+                </a:schemeClr>
+              </a:solidFill>
+            </a:endParaRPr>
           </a:p>
         </p:txBody>
       </p:sp>
@@ -8532,14 +9907,21 @@
               <a:buNone/>
             </a:pPr>
             <a:r>
-              <a:rPr lang="en-US" sz="2000" dirty="0"/>
-              <a:t>Context </a:t>
+              <a:rPr lang="ru-RU" sz="2000" dirty="0" err="1"/>
+              <a:t>Context</a:t>
             </a:r>
             <a:r>
               <a:rPr lang="ru-RU" sz="2000" dirty="0"/>
-              <a:t>определяет:</a:t>
-            </a:r>
-            <a:endParaRPr lang="en-US" sz="2000" dirty="0"/>
+              <a:t> определяет, с каким кластером и от имени какого пользователя будет работать </a:t>
+            </a:r>
+            <a:r>
+              <a:rPr lang="ru-RU" sz="2000" dirty="0" err="1"/>
+              <a:t>kubectl</a:t>
+            </a:r>
+            <a:r>
+              <a:rPr lang="ru-RU" sz="2000" dirty="0"/>
+              <a:t>.</a:t>
+            </a:r>
           </a:p>
           <a:p>
             <a:pPr latinLnBrk="1">
@@ -8548,24 +9930,12 @@
               </a:spcBef>
             </a:pPr>
             <a:r>
+              <a:rPr lang="ru-RU" sz="2000" dirty="0" err="1"/>
+              <a:t>Kubernetes</a:t>
+            </a:r>
+            <a:r>
               <a:rPr lang="ru-RU" sz="2000" dirty="0"/>
-              <a:t>к какому </a:t>
-            </a:r>
-            <a:r>
-              <a:rPr lang="en-US" sz="2000" dirty="0"/>
-              <a:t>Kubernetes-</a:t>
-            </a:r>
-            <a:r>
-              <a:rPr lang="ru-RU" sz="2000" dirty="0"/>
-              <a:t>кластеру подключается </a:t>
-            </a:r>
-            <a:r>
-              <a:rPr lang="en-US" sz="2000" dirty="0" err="1"/>
-              <a:t>kubectl</a:t>
-            </a:r>
-            <a:r>
-              <a:rPr lang="en-US" sz="2000" dirty="0"/>
-              <a:t>;</a:t>
+              <a:t>-кластер; </a:t>
             </a:r>
           </a:p>
           <a:p>
@@ -8576,9 +9946,8 @@
             </a:pPr>
             <a:r>
               <a:rPr lang="ru-RU" sz="2000" dirty="0"/>
-              <a:t>под каким пользователем выполняются команды;</a:t>
-            </a:r>
-            <a:endParaRPr lang="en-US" sz="2000" dirty="0"/>
+              <a:t>пользователь; </a:t>
+            </a:r>
           </a:p>
           <a:p>
             <a:pPr latinLnBrk="1">
@@ -8587,18 +9956,13 @@
               </a:spcBef>
             </a:pPr>
             <a:r>
+              <a:rPr lang="ru-RU" sz="2000" dirty="0" err="1"/>
+              <a:t>namespace</a:t>
+            </a:r>
+            <a:r>
               <a:rPr lang="ru-RU" sz="2000" dirty="0"/>
-              <a:t>какой </a:t>
-            </a:r>
-            <a:r>
-              <a:rPr lang="en-US" sz="2000" dirty="0"/>
-              <a:t>namespace </a:t>
-            </a:r>
-            <a:r>
-              <a:rPr lang="ru-RU" sz="2000" dirty="0"/>
-              <a:t>используется по умолчанию.</a:t>
-            </a:r>
-            <a:endParaRPr lang="en-US" sz="2000" dirty="0"/>
+              <a:t> по умолчанию.</a:t>
+            </a:r>
           </a:p>
           <a:p>
             <a:pPr marL="0" indent="0" latinLnBrk="1">
@@ -8642,6 +10006,7 @@
               <a:rPr lang="en-US" sz="2000" dirty="0"/>
               <a:t> config get-contexts</a:t>
             </a:r>
+            <a:endParaRPr lang="ru-RU" sz="2000" dirty="0"/>
           </a:p>
           <a:p>
             <a:pPr marL="0" indent="0" latinLnBrk="1">
@@ -8650,21 +10015,7 @@
               </a:spcBef>
               <a:buNone/>
             </a:pPr>
-            <a:r>
-              <a:rPr lang="ru-RU" sz="2000" dirty="0"/>
-              <a:t>Перед выполнением любых команд убедитесь, что выбран </a:t>
-            </a:r>
-            <a:br>
-              <a:rPr lang="en-US" sz="2000" dirty="0"/>
-            </a:br>
-            <a:r>
-              <a:rPr lang="ru-RU" sz="2000" dirty="0"/>
-              <a:t>нужный кластер (например, не </a:t>
-            </a:r>
-            <a:r>
-              <a:rPr lang="en-US" sz="2000" dirty="0"/>
-              <a:t>production).</a:t>
-            </a:r>
+            <a:endParaRPr lang="ru-RU" sz="2000" dirty="0"/>
           </a:p>
           <a:p>
             <a:pPr marL="0" indent="0" latinLnBrk="1">
@@ -8674,6 +10025,42 @@
               <a:buNone/>
             </a:pPr>
             <a:r>
+              <a:rPr lang="ru-RU" sz="2000" dirty="0"/>
+              <a:t>Перед выполнением любых команд всегда проверяйте </a:t>
+            </a:r>
+            <a:br>
+              <a:rPr lang="ru-RU" sz="2000" dirty="0"/>
+            </a:br>
+            <a:r>
+              <a:rPr lang="ru-RU" sz="2000" dirty="0"/>
+              <a:t>текущий </a:t>
+            </a:r>
+            <a:r>
+              <a:rPr lang="ru-RU" sz="2000" dirty="0" err="1"/>
+              <a:t>Context</a:t>
+            </a:r>
+            <a:r>
+              <a:rPr lang="ru-RU" sz="2000" dirty="0"/>
+              <a:t>. </a:t>
+            </a:r>
+          </a:p>
+          <a:p>
+            <a:pPr marL="0" indent="0" latinLnBrk="1">
+              <a:spcBef>
+                <a:spcPts val="600"/>
+              </a:spcBef>
+              <a:buNone/>
+            </a:pPr>
+            <a:endParaRPr lang="ru-RU" sz="2000" b="1" dirty="0"/>
+          </a:p>
+          <a:p>
+            <a:pPr marL="0" indent="0" latinLnBrk="1">
+              <a:spcBef>
+                <a:spcPts val="600"/>
+              </a:spcBef>
+              <a:buNone/>
+            </a:pPr>
+            <a:r>
               <a:rPr lang="ru-RU" sz="2000" b="1" dirty="0"/>
               <a:t>В </a:t>
             </a:r>
@@ -8703,7 +10090,7 @@
         </p:nvSpPr>
         <p:spPr>
           <a:xfrm>
-            <a:off x="580215" y="3979489"/>
+            <a:off x="587406" y="4580521"/>
             <a:ext cx="351378" cy="707886"/>
           </a:xfrm>
           <a:prstGeom prst="rect">
@@ -8750,7 +10137,7 @@
         </p:blipFill>
         <p:spPr>
           <a:xfrm>
-            <a:off x="7415784" y="1959227"/>
+            <a:off x="7461504" y="2698555"/>
             <a:ext cx="4413504" cy="2093414"/>
           </a:xfrm>
           <a:prstGeom prst="rect">
@@ -8816,14 +10203,32 @@
           <a:lstStyle/>
           <a:p>
             <a:r>
-              <a:rPr lang="ru-RU" dirty="0"/>
+              <a:rPr lang="ru-RU" b="1" dirty="0">
+                <a:solidFill>
+                  <a:schemeClr val="accent1">
+                    <a:lumMod val="75000"/>
+                  </a:schemeClr>
+                </a:solidFill>
+              </a:rPr>
               <a:t>Основные компоненты. </a:t>
             </a:r>
             <a:r>
-              <a:rPr lang="en-US" dirty="0"/>
+              <a:rPr lang="en-US" b="1" dirty="0">
+                <a:solidFill>
+                  <a:schemeClr val="accent1">
+                    <a:lumMod val="75000"/>
+                  </a:schemeClr>
+                </a:solidFill>
+              </a:rPr>
               <a:t>Namespace</a:t>
             </a:r>
-            <a:endParaRPr lang="ru-RU" dirty="0"/>
+            <a:endParaRPr lang="ru-RU" b="1" dirty="0">
+              <a:solidFill>
+                <a:schemeClr val="accent1">
+                  <a:lumMod val="75000"/>
+                </a:schemeClr>
+              </a:solidFill>
+            </a:endParaRPr>
           </a:p>
         </p:txBody>
       </p:sp>
@@ -8845,7 +10250,7 @@
         </p:nvSpPr>
         <p:spPr>
           <a:xfrm>
-            <a:off x="838200" y="1485105"/>
+            <a:off x="838200" y="1411953"/>
             <a:ext cx="10515600" cy="4351338"/>
           </a:xfrm>
         </p:spPr>
@@ -8862,23 +10267,23 @@
               <a:buNone/>
             </a:pPr>
             <a:r>
-              <a:rPr lang="ru-RU" sz="2000" dirty="0"/>
+              <a:rPr lang="ru-RU" sz="1800" dirty="0"/>
               <a:t>В K8s ресурсы группируются в </a:t>
             </a:r>
             <a:r>
-              <a:rPr lang="ru-RU" sz="2000" dirty="0" err="1"/>
+              <a:rPr lang="ru-RU" sz="1800" dirty="0" err="1"/>
               <a:t>namespace</a:t>
             </a:r>
             <a:r>
-              <a:rPr lang="ru-RU" sz="2000" dirty="0"/>
+              <a:rPr lang="ru-RU" sz="1800" dirty="0"/>
               <a:t> (это логическое разделение ресурсов внутри одного </a:t>
             </a:r>
             <a:r>
-              <a:rPr lang="ru-RU" sz="2000" dirty="0" err="1"/>
+              <a:rPr lang="ru-RU" sz="1800" dirty="0" err="1"/>
               <a:t>Kubernetes</a:t>
             </a:r>
             <a:r>
-              <a:rPr lang="ru-RU" sz="2000" dirty="0"/>
+              <a:rPr lang="ru-RU" sz="1800" dirty="0"/>
               <a:t>-кластера)</a:t>
             </a:r>
           </a:p>
@@ -8890,31 +10295,100 @@
               <a:buNone/>
             </a:pPr>
             <a:r>
-              <a:rPr lang="ru-RU" sz="2000" dirty="0"/>
+              <a:rPr lang="ru-RU" sz="1800" dirty="0"/>
               <a:t>По умолчанию используется </a:t>
             </a:r>
             <a:r>
-              <a:rPr lang="ru-RU" sz="2000" dirty="0" err="1"/>
+              <a:rPr lang="ru-RU" sz="1800" dirty="0" err="1"/>
               <a:t>namespace</a:t>
             </a:r>
             <a:r>
-              <a:rPr lang="ru-RU" sz="2000" dirty="0"/>
+              <a:rPr lang="ru-RU" sz="1800" dirty="0"/>
               <a:t> </a:t>
             </a:r>
             <a:r>
-              <a:rPr lang="ru-RU" sz="2000" dirty="0" err="1"/>
+              <a:rPr lang="ru-RU" sz="1800" dirty="0" err="1"/>
               <a:t>default</a:t>
             </a:r>
             <a:r>
-              <a:rPr lang="ru-RU" sz="2000" dirty="0"/>
+              <a:rPr lang="ru-RU" sz="1800" dirty="0"/>
               <a:t>.</a:t>
             </a:r>
+          </a:p>
+          <a:p>
+            <a:pPr marL="0" indent="0" latinLnBrk="1">
+              <a:spcBef>
+                <a:spcPts val="1200"/>
+              </a:spcBef>
+              <a:buNone/>
+            </a:pPr>
+            <a:r>
+              <a:rPr lang="ru-RU" sz="1800" dirty="0" err="1"/>
+              <a:t>kubectl</a:t>
+            </a:r>
+            <a:r>
+              <a:rPr lang="ru-RU" sz="1800" dirty="0"/>
+              <a:t> </a:t>
+            </a:r>
+            <a:r>
+              <a:rPr lang="ru-RU" sz="1800" dirty="0" err="1"/>
+              <a:t>get</a:t>
+            </a:r>
+            <a:r>
+              <a:rPr lang="ru-RU" sz="1800" dirty="0"/>
+              <a:t> </a:t>
+            </a:r>
+            <a:r>
+              <a:rPr lang="ru-RU" sz="1800" dirty="0" err="1"/>
+              <a:t>pods</a:t>
+            </a:r>
+            <a:r>
+              <a:rPr lang="ru-RU" sz="1800" dirty="0"/>
+              <a:t> - показывает только </a:t>
+            </a:r>
+            <a:r>
+              <a:rPr lang="ru-RU" sz="1800" dirty="0" err="1"/>
+              <a:t>Pod'ы</a:t>
+            </a:r>
+            <a:r>
+              <a:rPr lang="ru-RU" sz="1800" dirty="0"/>
+              <a:t> </a:t>
+            </a:r>
+            <a:r>
+              <a:rPr lang="ru-RU" sz="1800" b="1" dirty="0"/>
+              <a:t>текущего </a:t>
+            </a:r>
+            <a:r>
+              <a:rPr lang="ru-RU" sz="1800" b="1" dirty="0" err="1"/>
+              <a:t>namespace</a:t>
+            </a:r>
+            <a:r>
+              <a:rPr lang="ru-RU" sz="1800" dirty="0"/>
+              <a:t>. </a:t>
+            </a:r>
             <a:br>
-              <a:rPr lang="ru-RU" sz="2000" dirty="0"/>
+              <a:rPr lang="ru-RU" sz="1800" dirty="0"/>
             </a:br>
             <a:r>
-              <a:rPr lang="ru-RU" sz="2000" dirty="0"/>
-              <a:t>В реальных проектах:   </a:t>
+              <a:rPr lang="ru-RU" sz="1800" dirty="0"/>
+              <a:t>Если ничего нет, проверьте, не выбран ли другой </a:t>
+            </a:r>
+            <a:r>
+              <a:rPr lang="ru-RU" sz="1800" dirty="0" err="1"/>
+              <a:t>namespace</a:t>
+            </a:r>
+            <a:endParaRPr lang="ru-RU" sz="1800" dirty="0"/>
+          </a:p>
+          <a:p>
+            <a:pPr marL="0" indent="0" latinLnBrk="1">
+              <a:spcBef>
+                <a:spcPts val="1200"/>
+              </a:spcBef>
+              <a:buNone/>
+            </a:pPr>
+            <a:r>
+              <a:rPr lang="ru-RU" sz="1800" dirty="0"/>
+              <a:t>Полезные команды:</a:t>
             </a:r>
           </a:p>
           <a:p>
@@ -8924,9 +10398,42 @@
               </a:spcBef>
             </a:pPr>
             <a:r>
-              <a:rPr lang="ru-RU" sz="2000" dirty="0"/>
-              <a:t>Для разных окружений</a:t>
-            </a:r>
+              <a:rPr lang="ru-RU" sz="1800" dirty="0" err="1"/>
+              <a:t>kubectl</a:t>
+            </a:r>
+            <a:r>
+              <a:rPr lang="ru-RU" sz="1800" dirty="0"/>
+              <a:t> </a:t>
+            </a:r>
+            <a:r>
+              <a:rPr lang="ru-RU" sz="1800" dirty="0" err="1"/>
+              <a:t>get</a:t>
+            </a:r>
+            <a:r>
+              <a:rPr lang="ru-RU" sz="1800" dirty="0"/>
+              <a:t> </a:t>
+            </a:r>
+            <a:r>
+              <a:rPr lang="ru-RU" sz="1800" dirty="0" err="1"/>
+              <a:t>ns</a:t>
+            </a:r>
+            <a:r>
+              <a:rPr lang="ru-RU" sz="1800" dirty="0"/>
+              <a:t> </a:t>
+            </a:r>
+            <a:r>
+              <a:rPr lang="en-US" sz="1800" dirty="0"/>
+              <a:t>-</a:t>
+            </a:r>
+            <a:r>
+              <a:rPr lang="ru-RU" sz="1800" dirty="0"/>
+              <a:t> список всех </a:t>
+            </a:r>
+            <a:r>
+              <a:rPr lang="ru-RU" sz="1800" dirty="0" err="1"/>
+              <a:t>namespace</a:t>
+            </a:r>
+            <a:endParaRPr lang="en-US" sz="1800" dirty="0"/>
           </a:p>
           <a:p>
             <a:pPr latinLnBrk="1">
@@ -8935,9 +10442,42 @@
               </a:spcBef>
             </a:pPr>
             <a:r>
-              <a:rPr lang="ru-RU" sz="2000" dirty="0"/>
-              <a:t>Для разных команд</a:t>
-            </a:r>
+              <a:rPr lang="ru-RU" sz="1800" dirty="0" err="1"/>
+              <a:t>kubectl</a:t>
+            </a:r>
+            <a:r>
+              <a:rPr lang="ru-RU" sz="1800" dirty="0"/>
+              <a:t> </a:t>
+            </a:r>
+            <a:r>
+              <a:rPr lang="ru-RU" sz="1800" dirty="0" err="1"/>
+              <a:t>get</a:t>
+            </a:r>
+            <a:r>
+              <a:rPr lang="ru-RU" sz="1800" dirty="0"/>
+              <a:t> </a:t>
+            </a:r>
+            <a:r>
+              <a:rPr lang="ru-RU" sz="1800" dirty="0" err="1"/>
+              <a:t>pods</a:t>
+            </a:r>
+            <a:r>
+              <a:rPr lang="ru-RU" sz="1800" dirty="0"/>
+              <a:t> -n </a:t>
+            </a:r>
+            <a:r>
+              <a:rPr lang="en-US" sz="1800" dirty="0"/>
+              <a:t>&lt;name&gt; - </a:t>
+            </a:r>
+            <a:r>
+              <a:rPr lang="ru-RU" sz="1800" dirty="0"/>
+              <a:t>поды в конкретном </a:t>
+            </a:r>
+            <a:r>
+              <a:rPr lang="ru-RU" sz="1800" dirty="0" err="1"/>
+              <a:t>namespace</a:t>
+            </a:r>
+            <a:endParaRPr lang="ru-RU" sz="1800" dirty="0"/>
           </a:p>
           <a:p>
             <a:pPr latinLnBrk="1">
@@ -8946,18 +10486,79 @@
               </a:spcBef>
             </a:pPr>
             <a:r>
-              <a:rPr lang="ru-RU" sz="2000" dirty="0"/>
-              <a:t>Для системных компонентов (</a:t>
-            </a:r>
-            <a:r>
-              <a:rPr lang="ru-RU" sz="2000" dirty="0" err="1"/>
-              <a:t>kube-system</a:t>
-            </a:r>
-            <a:r>
-              <a:rPr lang="ru-RU" sz="2000" dirty="0"/>
-              <a:t>)</a:t>
-            </a:r>
-            <a:endParaRPr lang="en-US" sz="2000" dirty="0"/>
+              <a:rPr lang="ru-RU" sz="1800" dirty="0" err="1"/>
+              <a:t>kubectl</a:t>
+            </a:r>
+            <a:r>
+              <a:rPr lang="ru-RU" sz="1800" dirty="0"/>
+              <a:t> </a:t>
+            </a:r>
+            <a:r>
+              <a:rPr lang="ru-RU" sz="1800" dirty="0" err="1"/>
+              <a:t>get</a:t>
+            </a:r>
+            <a:r>
+              <a:rPr lang="ru-RU" sz="1800" dirty="0"/>
+              <a:t> </a:t>
+            </a:r>
+            <a:r>
+              <a:rPr lang="ru-RU" sz="1800" dirty="0" err="1"/>
+              <a:t>pods</a:t>
+            </a:r>
+            <a:r>
+              <a:rPr lang="ru-RU" sz="1800" dirty="0"/>
+              <a:t> -A - посмотреть все поды везде</a:t>
+            </a:r>
+          </a:p>
+          <a:p>
+            <a:pPr marL="0" indent="0" latinLnBrk="1">
+              <a:spcBef>
+                <a:spcPts val="1200"/>
+              </a:spcBef>
+              <a:spcAft>
+                <a:spcPts val="600"/>
+              </a:spcAft>
+              <a:buNone/>
+            </a:pPr>
+            <a:r>
+              <a:rPr lang="ru-RU" sz="1800" dirty="0" err="1"/>
+              <a:t>Context</a:t>
+            </a:r>
+            <a:r>
+              <a:rPr lang="ru-RU" sz="1800" dirty="0"/>
+              <a:t> отвечает на вопрос "</a:t>
+            </a:r>
+            <a:r>
+              <a:rPr lang="ru-RU" sz="1800" b="1" dirty="0"/>
+              <a:t>куда я подключен</a:t>
+            </a:r>
+            <a:r>
+              <a:rPr lang="ru-RU" sz="1800" dirty="0"/>
+              <a:t>?", </a:t>
+            </a:r>
+            <a:br>
+              <a:rPr lang="en-US" sz="1800" dirty="0"/>
+            </a:br>
+            <a:r>
+              <a:rPr lang="ru-RU" sz="1800" dirty="0"/>
+              <a:t>а </a:t>
+            </a:r>
+            <a:r>
+              <a:rPr lang="ru-RU" sz="1800" dirty="0" err="1"/>
+              <a:t>Namespace</a:t>
+            </a:r>
+            <a:r>
+              <a:rPr lang="ru-RU" sz="1800" dirty="0"/>
+              <a:t> – "</a:t>
+            </a:r>
+            <a:r>
+              <a:rPr lang="ru-RU" sz="1800" b="1" dirty="0"/>
+              <a:t>в какой части этого кластера</a:t>
+            </a:r>
+            <a:r>
+              <a:rPr lang="ru-RU" sz="1800" dirty="0"/>
+              <a:t> я работаю?".</a:t>
+            </a:r>
           </a:p>
           <a:p>
             <a:pPr marL="0" indent="0" latinLnBrk="1">
@@ -8967,72 +10568,8 @@
               <a:buNone/>
             </a:pPr>
             <a:r>
-              <a:rPr lang="ru-RU" sz="2000" dirty="0" err="1"/>
-              <a:t>kubectl</a:t>
-            </a:r>
-            <a:r>
-              <a:rPr lang="ru-RU" sz="2000" dirty="0"/>
-              <a:t> </a:t>
-            </a:r>
-            <a:r>
-              <a:rPr lang="ru-RU" sz="2000" dirty="0" err="1"/>
-              <a:t>get</a:t>
-            </a:r>
-            <a:r>
-              <a:rPr lang="ru-RU" sz="2000" dirty="0"/>
-              <a:t> </a:t>
-            </a:r>
-            <a:r>
-              <a:rPr lang="ru-RU" sz="2000" dirty="0" err="1"/>
-              <a:t>pods</a:t>
-            </a:r>
-            <a:r>
-              <a:rPr lang="ru-RU" sz="2000" dirty="0"/>
-              <a:t> - показывает только </a:t>
-            </a:r>
-            <a:r>
-              <a:rPr lang="ru-RU" sz="2000" dirty="0" err="1"/>
-              <a:t>Pod'ы</a:t>
-            </a:r>
-            <a:r>
-              <a:rPr lang="ru-RU" sz="2000" dirty="0"/>
-              <a:t> </a:t>
-            </a:r>
-            <a:r>
-              <a:rPr lang="ru-RU" sz="2000" b="1" dirty="0"/>
-              <a:t>текущего </a:t>
-            </a:r>
-            <a:r>
-              <a:rPr lang="ru-RU" sz="2000" b="1" dirty="0" err="1"/>
-              <a:t>namespace</a:t>
-            </a:r>
-            <a:r>
-              <a:rPr lang="ru-RU" sz="2000" dirty="0"/>
-              <a:t>. </a:t>
-            </a:r>
-            <a:br>
-              <a:rPr lang="ru-RU" sz="2000" dirty="0"/>
-            </a:br>
-            <a:r>
-              <a:rPr lang="ru-RU" sz="2000" dirty="0"/>
-              <a:t>Если ничего нет, проверьте, не выбран ли другой </a:t>
-            </a:r>
-            <a:r>
-              <a:rPr lang="ru-RU" sz="2000" dirty="0" err="1"/>
-              <a:t>namespace</a:t>
-            </a:r>
-            <a:endParaRPr lang="ru-RU" sz="2000" dirty="0"/>
-          </a:p>
-          <a:p>
-            <a:pPr marL="0" indent="0" latinLnBrk="1">
-              <a:spcBef>
-                <a:spcPts val="600"/>
-              </a:spcBef>
-              <a:buNone/>
-            </a:pPr>
-            <a:r>
-              <a:rPr lang="ru-RU" sz="2000" dirty="0"/>
-              <a:t>Полезные команды:</a:t>
+              <a:rPr lang="ru-RU" sz="1800" dirty="0"/>
+              <a:t>В реальных проектах:   </a:t>
             </a:r>
           </a:p>
           <a:p>
@@ -9042,42 +10579,33 @@
               </a:spcBef>
             </a:pPr>
             <a:r>
-              <a:rPr lang="ru-RU" sz="2000" dirty="0" err="1"/>
-              <a:t>kubectl</a:t>
-            </a:r>
-            <a:r>
-              <a:rPr lang="ru-RU" sz="2000" dirty="0"/>
-              <a:t> </a:t>
-            </a:r>
-            <a:r>
-              <a:rPr lang="ru-RU" sz="2000" dirty="0" err="1"/>
-              <a:t>get</a:t>
-            </a:r>
-            <a:r>
-              <a:rPr lang="ru-RU" sz="2000" dirty="0"/>
-              <a:t> </a:t>
-            </a:r>
-            <a:r>
-              <a:rPr lang="ru-RU" sz="2000" dirty="0" err="1"/>
-              <a:t>ns</a:t>
-            </a:r>
-            <a:r>
-              <a:rPr lang="ru-RU" sz="2000" dirty="0"/>
-              <a:t> </a:t>
-            </a:r>
-            <a:r>
-              <a:rPr lang="en-US" sz="2000" dirty="0"/>
-              <a:t>-</a:t>
-            </a:r>
-            <a:r>
-              <a:rPr lang="ru-RU" sz="2000" dirty="0"/>
-              <a:t> список всех </a:t>
-            </a:r>
-            <a:r>
-              <a:rPr lang="ru-RU" sz="2000" dirty="0" err="1"/>
-              <a:t>namespace</a:t>
-            </a:r>
-            <a:endParaRPr lang="en-US" sz="2000" dirty="0"/>
+              <a:rPr lang="ru-RU" sz="1800" dirty="0"/>
+              <a:t>для разных окружений (</a:t>
+            </a:r>
+            <a:r>
+              <a:rPr lang="ru-RU" sz="1800" dirty="0" err="1"/>
+              <a:t>dev</a:t>
+            </a:r>
+            <a:r>
+              <a:rPr lang="ru-RU" sz="1800" dirty="0"/>
+              <a:t>, </a:t>
+            </a:r>
+            <a:r>
+              <a:rPr lang="ru-RU" sz="1800" dirty="0" err="1"/>
+              <a:t>stage</a:t>
+            </a:r>
+            <a:r>
+              <a:rPr lang="ru-RU" sz="1800" dirty="0"/>
+              <a:t>, </a:t>
+            </a:r>
+            <a:r>
+              <a:rPr lang="ru-RU" sz="1800" dirty="0" err="1"/>
+              <a:t>prod</a:t>
+            </a:r>
+            <a:r>
+              <a:rPr lang="ru-RU" sz="1800" dirty="0"/>
+              <a:t>);</a:t>
+            </a:r>
           </a:p>
           <a:p>
             <a:pPr latinLnBrk="1">
@@ -9086,42 +10614,9 @@
               </a:spcBef>
             </a:pPr>
             <a:r>
-              <a:rPr lang="ru-RU" sz="2000" dirty="0" err="1"/>
-              <a:t>kubectl</a:t>
-            </a:r>
-            <a:r>
-              <a:rPr lang="ru-RU" sz="2000" dirty="0"/>
-              <a:t> </a:t>
-            </a:r>
-            <a:r>
-              <a:rPr lang="ru-RU" sz="2000" dirty="0" err="1"/>
-              <a:t>get</a:t>
-            </a:r>
-            <a:r>
-              <a:rPr lang="ru-RU" sz="2000" dirty="0"/>
-              <a:t> </a:t>
-            </a:r>
-            <a:r>
-              <a:rPr lang="ru-RU" sz="2000" dirty="0" err="1"/>
-              <a:t>pods</a:t>
-            </a:r>
-            <a:r>
-              <a:rPr lang="ru-RU" sz="2000" dirty="0"/>
-              <a:t> -n </a:t>
-            </a:r>
-            <a:r>
-              <a:rPr lang="en-US" sz="2000" dirty="0"/>
-              <a:t>&lt;name&gt; - </a:t>
-            </a:r>
-            <a:r>
-              <a:rPr lang="ru-RU" sz="2000" dirty="0"/>
-              <a:t>поды в конкретном </a:t>
-            </a:r>
-            <a:r>
-              <a:rPr lang="ru-RU" sz="2000" dirty="0" err="1"/>
-              <a:t>namespace</a:t>
-            </a:r>
-            <a:endParaRPr lang="ru-RU" sz="2000" dirty="0"/>
+              <a:rPr lang="ru-RU" sz="1800" dirty="0"/>
+              <a:t>для разделения приложений или команд;</a:t>
+            </a:r>
           </a:p>
           <a:p>
             <a:pPr latinLnBrk="1">
@@ -9130,28 +10625,24 @@
               </a:spcBef>
             </a:pPr>
             <a:r>
-              <a:rPr lang="ru-RU" sz="2000" dirty="0" err="1"/>
-              <a:t>kubectl</a:t>
-            </a:r>
-            <a:r>
-              <a:rPr lang="ru-RU" sz="2000" dirty="0"/>
-              <a:t> </a:t>
-            </a:r>
-            <a:r>
-              <a:rPr lang="ru-RU" sz="2000" dirty="0" err="1"/>
-              <a:t>get</a:t>
-            </a:r>
-            <a:r>
-              <a:rPr lang="ru-RU" sz="2000" dirty="0"/>
-              <a:t> </a:t>
-            </a:r>
-            <a:r>
-              <a:rPr lang="ru-RU" sz="2000" dirty="0" err="1"/>
-              <a:t>pods</a:t>
-            </a:r>
-            <a:r>
-              <a:rPr lang="ru-RU" sz="2000" dirty="0"/>
-              <a:t> -A - посмотреть все поды везде</a:t>
+              <a:rPr lang="ru-RU" sz="1800" dirty="0"/>
+              <a:t>для системных компонентов </a:t>
+            </a:r>
+            <a:r>
+              <a:rPr lang="ru-RU" sz="1800" dirty="0" err="1"/>
+              <a:t>Kubernetes</a:t>
+            </a:r>
+            <a:r>
+              <a:rPr lang="ru-RU" sz="1800" dirty="0"/>
+              <a:t> (</a:t>
+            </a:r>
+            <a:r>
+              <a:rPr lang="ru-RU" sz="1800" dirty="0" err="1"/>
+              <a:t>kube-system</a:t>
+            </a:r>
+            <a:r>
+              <a:rPr lang="ru-RU" sz="1800" dirty="0"/>
+              <a:t>).</a:t>
             </a:r>
           </a:p>
           <a:p>
@@ -9161,83 +10652,7 @@
               </a:spcBef>
               <a:buNone/>
             </a:pPr>
-            <a:r>
-              <a:rPr lang="ru-RU" sz="2000" b="1" dirty="0"/>
-              <a:t>В </a:t>
-            </a:r>
-            <a:r>
-              <a:rPr lang="ru-RU" sz="2000" b="1" dirty="0" err="1"/>
-              <a:t>Lens</a:t>
-            </a:r>
-            <a:r>
-              <a:rPr lang="ru-RU" sz="2000" dirty="0"/>
-              <a:t>: переключатель </a:t>
-            </a:r>
-            <a:r>
-              <a:rPr lang="ru-RU" sz="2000" dirty="0" err="1"/>
-              <a:t>namespace</a:t>
-            </a:r>
-            <a:r>
-              <a:rPr lang="ru-RU" sz="2000" dirty="0"/>
-              <a:t> в левом верхнем углу</a:t>
-            </a:r>
-            <a:endParaRPr lang="en-US" sz="2000" dirty="0"/>
-          </a:p>
-          <a:p>
-            <a:pPr marL="0" indent="0" latinLnBrk="1">
-              <a:spcBef>
-                <a:spcPts val="600"/>
-              </a:spcBef>
-              <a:buNone/>
-            </a:pPr>
-            <a:r>
-              <a:rPr lang="ru-RU" sz="2000" dirty="0" err="1"/>
-              <a:t>Context</a:t>
-            </a:r>
-            <a:r>
-              <a:rPr lang="ru-RU" sz="2000" dirty="0"/>
-              <a:t> отвечает на вопрос "</a:t>
-            </a:r>
-            <a:r>
-              <a:rPr lang="ru-RU" sz="2000" b="1" dirty="0"/>
-              <a:t>куда я подключен</a:t>
-            </a:r>
-            <a:r>
-              <a:rPr lang="ru-RU" sz="2000" dirty="0"/>
-              <a:t>?", </a:t>
-            </a:r>
-            <a:br>
-              <a:rPr lang="en-US" sz="2000" dirty="0"/>
-            </a:br>
-            <a:r>
-              <a:rPr lang="ru-RU" sz="2000" dirty="0"/>
-              <a:t>а </a:t>
-            </a:r>
-            <a:r>
-              <a:rPr lang="ru-RU" sz="2000" dirty="0" err="1"/>
-              <a:t>Namespace</a:t>
-            </a:r>
-            <a:r>
-              <a:rPr lang="ru-RU" sz="2000" dirty="0"/>
-              <a:t> — "</a:t>
-            </a:r>
-            <a:r>
-              <a:rPr lang="ru-RU" sz="2000" b="1" dirty="0"/>
-              <a:t>в какой части этого кластера</a:t>
-            </a:r>
-            <a:r>
-              <a:rPr lang="ru-RU" sz="2000" dirty="0"/>
-              <a:t> я работаю?".</a:t>
-            </a:r>
-          </a:p>
-          <a:p>
-            <a:pPr marL="0" indent="0" latinLnBrk="1">
-              <a:spcBef>
-                <a:spcPts val="600"/>
-              </a:spcBef>
-              <a:buNone/>
-            </a:pPr>
-            <a:endParaRPr lang="ru-RU" sz="2000" dirty="0"/>
+            <a:endParaRPr lang="ru-RU" sz="1800" dirty="0"/>
           </a:p>
         </p:txBody>
       </p:sp>
@@ -9255,7 +10670,7 @@
         </p:nvSpPr>
         <p:spPr>
           <a:xfrm>
-            <a:off x="559973" y="3854990"/>
+            <a:off x="596550" y="2243454"/>
             <a:ext cx="351378" cy="707886"/>
           </a:xfrm>
           <a:prstGeom prst="rect">
@@ -9302,7 +10717,7 @@
         </p:blipFill>
         <p:spPr>
           <a:xfrm>
-            <a:off x="8961321" y="2550957"/>
+            <a:off x="8781691" y="2737516"/>
             <a:ext cx="2572109" cy="2219635"/>
           </a:xfrm>
           <a:prstGeom prst="rect">
@@ -9310,6 +10725,64 @@
           </a:prstGeom>
         </p:spPr>
       </p:pic>
+      <p:sp>
+        <p:nvSpPr>
+          <p:cNvPr id="6" name="TextBox 5">
+            <a:extLst>
+              <a:ext uri="{FF2B5EF4-FFF2-40B4-BE49-F238E27FC236}">
+                <a16:creationId xmlns:a16="http://schemas.microsoft.com/office/drawing/2014/main" id="{CC6628EE-3DB8-E9E0-4C5D-8C88EF7FBD7F}"/>
+              </a:ext>
+            </a:extLst>
+          </p:cNvPr>
+          <p:cNvSpPr txBox="1"/>
+          <p:nvPr/>
+        </p:nvSpPr>
+        <p:spPr>
+          <a:xfrm>
+            <a:off x="8413824" y="5037055"/>
+            <a:ext cx="3628824" cy="646331"/>
+          </a:xfrm>
+          <a:prstGeom prst="rect">
+            <a:avLst/>
+          </a:prstGeom>
+          <a:noFill/>
+        </p:spPr>
+        <p:txBody>
+          <a:bodyPr wrap="square">
+            <a:spAutoFit/>
+          </a:bodyPr>
+          <a:lstStyle/>
+          <a:p>
+            <a:pPr marL="0" indent="0" latinLnBrk="1">
+              <a:spcBef>
+                <a:spcPts val="600"/>
+              </a:spcBef>
+              <a:buNone/>
+            </a:pPr>
+            <a:r>
+              <a:rPr lang="ru-RU" sz="1800" b="1" dirty="0"/>
+              <a:t>В </a:t>
+            </a:r>
+            <a:r>
+              <a:rPr lang="ru-RU" sz="1800" b="1" dirty="0" err="1"/>
+              <a:t>Lens</a:t>
+            </a:r>
+            <a:r>
+              <a:rPr lang="ru-RU" sz="1800" dirty="0"/>
+              <a:t>: переключатель </a:t>
+            </a:r>
+            <a:r>
+              <a:rPr lang="ru-RU" sz="1800" dirty="0" err="1"/>
+              <a:t>namespace</a:t>
+            </a:r>
+            <a:r>
+              <a:rPr lang="ru-RU" sz="1800" dirty="0"/>
+              <a:t> в левом верхнем углу</a:t>
+            </a:r>
+            <a:endParaRPr lang="en-US" sz="1800" dirty="0"/>
+          </a:p>
+        </p:txBody>
+      </p:sp>
     </p:spTree>
     <p:extLst>
       <p:ext uri="{BB962C8B-B14F-4D97-AF65-F5344CB8AC3E}">
@@ -9362,7 +10835,13 @@
           <a:lstStyle/>
           <a:p>
             <a:r>
-              <a:rPr lang="ru-RU" dirty="0"/>
+              <a:rPr lang="ru-RU" b="1" dirty="0">
+                <a:solidFill>
+                  <a:schemeClr val="accent1">
+                    <a:lumMod val="75000"/>
+                  </a:schemeClr>
+                </a:solidFill>
+              </a:rPr>
               <a:t>Общие концепции. Декларативный подход</a:t>
             </a:r>
           </a:p>
@@ -9403,55 +10882,144 @@
             </a:r>
             <a:r>
               <a:rPr lang="ru-RU" dirty="0"/>
-              <a:t>: в YAML-файле мы описываем </a:t>
+              <a:t> – в YAML-файле мы описываем </a:t>
             </a:r>
             <a:r>
               <a:rPr lang="ru-RU" b="1" dirty="0"/>
-              <a:t>Желаемое состояние (</a:t>
+              <a:t>желаемое состояние</a:t>
+            </a:r>
+            <a:r>
+              <a:rPr lang="ru-RU" dirty="0"/>
+              <a:t> (</a:t>
+            </a:r>
+            <a:r>
+              <a:rPr lang="ru-RU" dirty="0" err="1"/>
+              <a:t>Desired</a:t>
+            </a:r>
+            <a:r>
+              <a:rPr lang="ru-RU" dirty="0"/>
+              <a:t> State) системы.</a:t>
+            </a:r>
+            <a:br>
+              <a:rPr lang="ru-RU" dirty="0"/>
+            </a:br>
+            <a:r>
+              <a:rPr lang="ru-RU" dirty="0" err="1"/>
+              <a:t>Kubernetes</a:t>
+            </a:r>
+            <a:r>
+              <a:rPr lang="ru-RU" dirty="0"/>
+              <a:t> постоянно сравнивает </a:t>
+            </a:r>
+            <a:r>
+              <a:rPr lang="ru-RU" b="1" dirty="0"/>
+              <a:t>текущее состояние</a:t>
+            </a:r>
+            <a:r>
+              <a:rPr lang="ru-RU" dirty="0"/>
+              <a:t> (</a:t>
+            </a:r>
+            <a:r>
+              <a:rPr lang="ru-RU" dirty="0" err="1"/>
+              <a:t>Actual</a:t>
+            </a:r>
+            <a:r>
+              <a:rPr lang="ru-RU" dirty="0"/>
+              <a:t> State) с желаемым и, если они отличаются, приводит систему к описанному состоянию.</a:t>
+            </a:r>
+          </a:p>
+          <a:p>
+            <a:pPr marL="0" indent="0">
+              <a:buNone/>
+            </a:pPr>
+            <a:r>
+              <a:rPr lang="ru-RU" dirty="0"/>
+              <a:t>Этот непрерывный процесс называется </a:t>
             </a:r>
             <a:r>
               <a:rPr lang="ru-RU" b="1" dirty="0" err="1"/>
-              <a:t>Desired</a:t>
+              <a:t>Reconciliation</a:t>
             </a:r>
             <a:r>
               <a:rPr lang="ru-RU" b="1" dirty="0"/>
-              <a:t> State)</a:t>
-            </a:r>
-            <a:r>
-              <a:rPr lang="ru-RU" dirty="0"/>
-              <a:t> системы. Задача K8s — постоянно сравнивать </a:t>
+              <a:t> </a:t>
+            </a:r>
+            <a:r>
+              <a:rPr lang="ru-RU" b="1" dirty="0" err="1"/>
+              <a:t>Loop</a:t>
             </a:r>
             <a:r>
               <a:rPr lang="ru-RU" b="1" dirty="0"/>
-              <a:t>Текущее состояние (</a:t>
-            </a:r>
-            <a:r>
-              <a:rPr lang="ru-RU" b="1" dirty="0" err="1"/>
-              <a:t>Actual</a:t>
-            </a:r>
-            <a:r>
-              <a:rPr lang="ru-RU" b="1" dirty="0"/>
-              <a:t> State)</a:t>
-            </a:r>
-            <a:r>
-              <a:rPr lang="ru-RU" dirty="0"/>
-              <a:t> с желаемым и устранять разницу. Этот процесс называется </a:t>
-            </a:r>
-            <a:r>
-              <a:rPr lang="ru-RU" i="1" dirty="0" err="1"/>
-              <a:t>Reconciliation</a:t>
-            </a:r>
-            <a:r>
-              <a:rPr lang="ru-RU" i="1" dirty="0"/>
+              <a:t> (цикл согласования)</a:t>
+            </a:r>
+            <a:r>
+              <a:rPr lang="ru-RU" dirty="0"/>
+              <a:t>.</a:t>
+            </a:r>
+          </a:p>
+          <a:p>
+            <a:pPr marL="0" indent="0">
+              <a:buNone/>
+            </a:pPr>
+            <a:r>
+              <a:rPr lang="ru-RU" b="1" i="1" dirty="0">
+                <a:solidFill>
+                  <a:schemeClr val="accent1">
+                    <a:lumMod val="75000"/>
+                  </a:schemeClr>
+                </a:solidFill>
+              </a:rPr>
+              <a:t>Именно поэтому</a:t>
+            </a:r>
+            <a:r>
+              <a:rPr lang="ru-RU" i="1" dirty="0">
+                <a:solidFill>
+                  <a:schemeClr val="accent1">
+                    <a:lumMod val="75000"/>
+                  </a:schemeClr>
+                </a:solidFill>
+              </a:rPr>
               <a:t> </a:t>
             </a:r>
             <a:r>
-              <a:rPr lang="ru-RU" i="1" dirty="0" err="1"/>
-              <a:t>Loop</a:t>
-            </a:r>
-            <a:r>
-              <a:rPr lang="ru-RU" dirty="0"/>
-              <a:t> (цикл согласования).</a:t>
+              <a:rPr lang="ru-RU" i="1" dirty="0" err="1">
+                <a:solidFill>
+                  <a:schemeClr val="accent1">
+                    <a:lumMod val="75000"/>
+                  </a:schemeClr>
+                </a:solidFill>
+              </a:rPr>
+              <a:t>Kubernetes</a:t>
+            </a:r>
+            <a:r>
+              <a:rPr lang="ru-RU" i="1" dirty="0">
+                <a:solidFill>
+                  <a:schemeClr val="accent1">
+                    <a:lumMod val="75000"/>
+                  </a:schemeClr>
+                </a:solidFill>
+              </a:rPr>
+              <a:t> самостоятельно восстанавливает количество </a:t>
+            </a:r>
+            <a:r>
+              <a:rPr lang="ru-RU" i="1" dirty="0" err="1">
+                <a:solidFill>
+                  <a:schemeClr val="accent1">
+                    <a:lumMod val="75000"/>
+                  </a:schemeClr>
+                </a:solidFill>
+              </a:rPr>
+              <a:t>Pod'ов</a:t>
+            </a:r>
+            <a:r>
+              <a:rPr lang="ru-RU" i="1" dirty="0">
+                <a:solidFill>
+                  <a:schemeClr val="accent1">
+                    <a:lumMod val="75000"/>
+                  </a:schemeClr>
+                </a:solidFill>
+              </a:rPr>
+              <a:t> после сбоев.</a:t>
             </a:r>
           </a:p>
         </p:txBody>

--- a/slides/K8s.pptx
+++ b/slides/K8s.pptx
@@ -19,18 +19,20 @@
     <p:sldId id="264" r:id="rId13"/>
     <p:sldId id="260" r:id="rId14"/>
     <p:sldId id="267" r:id="rId15"/>
-    <p:sldId id="274" r:id="rId16"/>
-    <p:sldId id="268" r:id="rId17"/>
-    <p:sldId id="269" r:id="rId18"/>
-    <p:sldId id="273" r:id="rId19"/>
-    <p:sldId id="270" r:id="rId20"/>
-    <p:sldId id="271" r:id="rId21"/>
-    <p:sldId id="272" r:id="rId22"/>
-    <p:sldId id="275" r:id="rId23"/>
-    <p:sldId id="277" r:id="rId24"/>
-    <p:sldId id="280" r:id="rId25"/>
-    <p:sldId id="281" r:id="rId26"/>
-    <p:sldId id="276" r:id="rId27"/>
+    <p:sldId id="283" r:id="rId16"/>
+    <p:sldId id="282" r:id="rId17"/>
+    <p:sldId id="274" r:id="rId18"/>
+    <p:sldId id="268" r:id="rId19"/>
+    <p:sldId id="269" r:id="rId20"/>
+    <p:sldId id="273" r:id="rId21"/>
+    <p:sldId id="270" r:id="rId22"/>
+    <p:sldId id="271" r:id="rId23"/>
+    <p:sldId id="272" r:id="rId24"/>
+    <p:sldId id="275" r:id="rId25"/>
+    <p:sldId id="277" r:id="rId26"/>
+    <p:sldId id="280" r:id="rId27"/>
+    <p:sldId id="281" r:id="rId28"/>
+    <p:sldId id="276" r:id="rId29"/>
   </p:sldIdLst>
   <p:sldSz cx="12192000" cy="6858000"/>
   <p:notesSz cx="6858000" cy="9144000"/>
@@ -284,7 +286,7 @@
           <a:p>
             <a:fld id="{519BAEA6-88FC-4542-B3BF-F11A57CC5938}" type="datetimeFigureOut">
               <a:rPr lang="ru-RU" smtClean="0"/>
-              <a:t>15.07.2026</a:t>
+              <a:t>16.07.2026</a:t>
             </a:fld>
             <a:endParaRPr lang="ru-RU"/>
           </a:p>
@@ -482,7 +484,7 @@
           <a:p>
             <a:fld id="{519BAEA6-88FC-4542-B3BF-F11A57CC5938}" type="datetimeFigureOut">
               <a:rPr lang="ru-RU" smtClean="0"/>
-              <a:t>15.07.2026</a:t>
+              <a:t>16.07.2026</a:t>
             </a:fld>
             <a:endParaRPr lang="ru-RU"/>
           </a:p>
@@ -690,7 +692,7 @@
           <a:p>
             <a:fld id="{519BAEA6-88FC-4542-B3BF-F11A57CC5938}" type="datetimeFigureOut">
               <a:rPr lang="ru-RU" smtClean="0"/>
-              <a:t>15.07.2026</a:t>
+              <a:t>16.07.2026</a:t>
             </a:fld>
             <a:endParaRPr lang="ru-RU"/>
           </a:p>
@@ -888,7 +890,7 @@
           <a:p>
             <a:fld id="{519BAEA6-88FC-4542-B3BF-F11A57CC5938}" type="datetimeFigureOut">
               <a:rPr lang="ru-RU" smtClean="0"/>
-              <a:t>15.07.2026</a:t>
+              <a:t>16.07.2026</a:t>
             </a:fld>
             <a:endParaRPr lang="ru-RU"/>
           </a:p>
@@ -1163,7 +1165,7 @@
           <a:p>
             <a:fld id="{519BAEA6-88FC-4542-B3BF-F11A57CC5938}" type="datetimeFigureOut">
               <a:rPr lang="ru-RU" smtClean="0"/>
-              <a:t>15.07.2026</a:t>
+              <a:t>16.07.2026</a:t>
             </a:fld>
             <a:endParaRPr lang="ru-RU"/>
           </a:p>
@@ -1428,7 +1430,7 @@
           <a:p>
             <a:fld id="{519BAEA6-88FC-4542-B3BF-F11A57CC5938}" type="datetimeFigureOut">
               <a:rPr lang="ru-RU" smtClean="0"/>
-              <a:t>15.07.2026</a:t>
+              <a:t>16.07.2026</a:t>
             </a:fld>
             <a:endParaRPr lang="ru-RU"/>
           </a:p>
@@ -1840,7 +1842,7 @@
           <a:p>
             <a:fld id="{519BAEA6-88FC-4542-B3BF-F11A57CC5938}" type="datetimeFigureOut">
               <a:rPr lang="ru-RU" smtClean="0"/>
-              <a:t>15.07.2026</a:t>
+              <a:t>16.07.2026</a:t>
             </a:fld>
             <a:endParaRPr lang="ru-RU"/>
           </a:p>
@@ -1981,7 +1983,7 @@
           <a:p>
             <a:fld id="{519BAEA6-88FC-4542-B3BF-F11A57CC5938}" type="datetimeFigureOut">
               <a:rPr lang="ru-RU" smtClean="0"/>
-              <a:t>15.07.2026</a:t>
+              <a:t>16.07.2026</a:t>
             </a:fld>
             <a:endParaRPr lang="ru-RU"/>
           </a:p>
@@ -2094,7 +2096,7 @@
           <a:p>
             <a:fld id="{519BAEA6-88FC-4542-B3BF-F11A57CC5938}" type="datetimeFigureOut">
               <a:rPr lang="ru-RU" smtClean="0"/>
-              <a:t>15.07.2026</a:t>
+              <a:t>16.07.2026</a:t>
             </a:fld>
             <a:endParaRPr lang="ru-RU"/>
           </a:p>
@@ -2405,7 +2407,7 @@
           <a:p>
             <a:fld id="{519BAEA6-88FC-4542-B3BF-F11A57CC5938}" type="datetimeFigureOut">
               <a:rPr lang="ru-RU" smtClean="0"/>
-              <a:t>15.07.2026</a:t>
+              <a:t>16.07.2026</a:t>
             </a:fld>
             <a:endParaRPr lang="ru-RU"/>
           </a:p>
@@ -2693,7 +2695,7 @@
           <a:p>
             <a:fld id="{519BAEA6-88FC-4542-B3BF-F11A57CC5938}" type="datetimeFigureOut">
               <a:rPr lang="ru-RU" smtClean="0"/>
-              <a:t>15.07.2026</a:t>
+              <a:t>16.07.2026</a:t>
             </a:fld>
             <a:endParaRPr lang="ru-RU"/>
           </a:p>
@@ -2943,7 +2945,7 @@
           <a:p>
             <a:fld id="{519BAEA6-88FC-4542-B3BF-F11A57CC5938}" type="datetimeFigureOut">
               <a:rPr lang="ru-RU" smtClean="0"/>
-              <a:t>15.07.2026</a:t>
+              <a:t>16.07.2026</a:t>
             </a:fld>
             <a:endParaRPr lang="ru-RU"/>
           </a:p>
@@ -4524,8 +4526,25 @@
                   </a:schemeClr>
                 </a:solidFill>
               </a:rPr>
-              <a:t>Общие концепции. Kubernetes Service</a:t>
-            </a:r>
+              <a:t>Общие концепции. </a:t>
+            </a:r>
+            <a:r>
+              <a:rPr lang="ru-RU" b="1" dirty="0" err="1">
+                <a:solidFill>
+                  <a:schemeClr val="accent1">
+                    <a:lumMod val="75000"/>
+                  </a:schemeClr>
+                </a:solidFill>
+              </a:rPr>
+              <a:t>Helm</a:t>
+            </a:r>
+            <a:endParaRPr lang="ru-RU" b="1" dirty="0">
+              <a:solidFill>
+                <a:schemeClr val="accent1">
+                  <a:lumMod val="75000"/>
+                </a:schemeClr>
+              </a:solidFill>
+            </a:endParaRPr>
           </a:p>
         </p:txBody>
       </p:sp>
@@ -4545,10 +4564,15 @@
             <p:ph idx="1"/>
           </p:nvPr>
         </p:nvSpPr>
-        <p:spPr/>
+        <p:spPr>
+          <a:xfrm>
+            <a:off x="838200" y="1825624"/>
+            <a:ext cx="10701528" cy="4758056"/>
+          </a:xfrm>
+        </p:spPr>
         <p:txBody>
           <a:bodyPr>
-            <a:normAutofit fontScale="70000" lnSpcReduction="20000"/>
+            <a:normAutofit fontScale="77500" lnSpcReduction="20000"/>
           </a:bodyPr>
           <a:lstStyle/>
           <a:p>
@@ -4556,12 +4580,216 @@
               <a:buNone/>
             </a:pPr>
             <a:r>
+              <a:rPr lang="ru-RU" b="1" dirty="0" err="1"/>
+              <a:t>Helm</a:t>
+            </a:r>
+            <a:r>
+              <a:rPr lang="ru-RU" dirty="0"/>
+              <a:t> – пакетный менеджер для </a:t>
+            </a:r>
+            <a:r>
               <a:rPr lang="ru-RU" dirty="0" err="1"/>
-              <a:t>Pods</a:t>
-            </a:r>
-            <a:r>
-              <a:rPr lang="ru-RU" dirty="0"/>
-              <a:t> – это «расходный материал». Они могут завершаться, пересоздаваться или масштабироваться, поэтому при каждом создании получают новый IP-адрес. Из-за этого обращаться к </a:t>
+              <a:t>Kubernetes</a:t>
+            </a:r>
+            <a:r>
+              <a:rPr lang="ru-RU" dirty="0"/>
+              <a:t>, который позволяет устанавливать, обновлять и откатывать приложения как единое целое. </a:t>
+            </a:r>
+          </a:p>
+          <a:p>
+            <a:pPr marL="0" indent="0">
+              <a:buNone/>
+            </a:pPr>
+            <a:r>
+              <a:rPr lang="ru-RU" b="1" dirty="0" err="1"/>
+              <a:t>Chart</a:t>
+            </a:r>
+            <a:r>
+              <a:rPr lang="ru-RU" b="1" dirty="0"/>
+              <a:t> </a:t>
+            </a:r>
+            <a:r>
+              <a:rPr lang="ru-RU" dirty="0"/>
+              <a:t>– шаблон (пакет), содержащий описание ресурсов </a:t>
+            </a:r>
+            <a:r>
+              <a:rPr lang="en-US" dirty="0"/>
+              <a:t>Kubernetes (Deployment, Service, </a:t>
+            </a:r>
+            <a:r>
+              <a:rPr lang="en-US" dirty="0" err="1"/>
+              <a:t>ConfigMap</a:t>
+            </a:r>
+            <a:r>
+              <a:rPr lang="en-US" dirty="0"/>
+              <a:t>, Secret, Ingress </a:t>
+            </a:r>
+            <a:r>
+              <a:rPr lang="ru-RU" dirty="0"/>
+              <a:t>и др.) и параметры их настройки.</a:t>
+            </a:r>
+          </a:p>
+          <a:p>
+            <a:pPr marL="0" indent="0">
+              <a:buNone/>
+            </a:pPr>
+            <a:r>
+              <a:rPr lang="ru-RU" b="1" dirty="0" err="1"/>
+              <a:t>Release</a:t>
+            </a:r>
+            <a:r>
+              <a:rPr lang="ru-RU" b="1" dirty="0"/>
+              <a:t> </a:t>
+            </a:r>
+            <a:r>
+              <a:rPr lang="ru-RU" dirty="0"/>
+              <a:t>– это установленный экземпляр </a:t>
+            </a:r>
+            <a:r>
+              <a:rPr lang="ru-RU" dirty="0" err="1"/>
+              <a:t>Chart</a:t>
+            </a:r>
+            <a:r>
+              <a:rPr lang="ru-RU" dirty="0"/>
+              <a:t> в </a:t>
+            </a:r>
+            <a:r>
+              <a:rPr lang="ru-RU" dirty="0" err="1"/>
+              <a:t>Kubernetes</a:t>
+            </a:r>
+            <a:r>
+              <a:rPr lang="ru-RU" dirty="0"/>
+              <a:t>. Один и тот же </a:t>
+            </a:r>
+            <a:r>
+              <a:rPr lang="ru-RU" dirty="0" err="1"/>
+              <a:t>Chart</a:t>
+            </a:r>
+            <a:r>
+              <a:rPr lang="ru-RU" dirty="0"/>
+              <a:t> можно развернуть несколько раз с разными параметрами — получится несколько независимых </a:t>
+            </a:r>
+            <a:r>
+              <a:rPr lang="ru-RU" dirty="0" err="1"/>
+              <a:t>Release</a:t>
+            </a:r>
+            <a:r>
+              <a:rPr lang="ru-RU" dirty="0"/>
+              <a:t>.</a:t>
+            </a:r>
+          </a:p>
+          <a:p>
+            <a:pPr marL="0" indent="0">
+              <a:buNone/>
+            </a:pPr>
+            <a:r>
+              <a:rPr lang="ru-RU" b="1" dirty="0"/>
+              <a:t>Что полезно знать QA:</a:t>
+            </a:r>
+          </a:p>
+          <a:p>
+            <a:pPr>
+              <a:spcBef>
+                <a:spcPts val="600"/>
+              </a:spcBef>
+            </a:pPr>
+            <a:r>
+              <a:rPr lang="ru-RU" dirty="0"/>
+              <a:t>большинство приложений в </a:t>
+            </a:r>
+            <a:r>
+              <a:rPr lang="ru-RU" dirty="0" err="1"/>
+              <a:t>Kubernetes</a:t>
+            </a:r>
+            <a:r>
+              <a:rPr lang="ru-RU" dirty="0"/>
+              <a:t> разворачиваются через </a:t>
+            </a:r>
+            <a:r>
+              <a:rPr lang="ru-RU" dirty="0" err="1"/>
+              <a:t>Helm</a:t>
+            </a:r>
+            <a:r>
+              <a:rPr lang="ru-RU" dirty="0"/>
+              <a:t>; </a:t>
+            </a:r>
+          </a:p>
+          <a:p>
+            <a:pPr>
+              <a:spcBef>
+                <a:spcPts val="600"/>
+              </a:spcBef>
+            </a:pPr>
+            <a:r>
+              <a:rPr lang="ru-RU" dirty="0"/>
+              <a:t>история изменений </a:t>
+            </a:r>
+            <a:r>
+              <a:rPr lang="ru-RU" dirty="0" err="1"/>
+              <a:t>Release</a:t>
+            </a:r>
+            <a:r>
+              <a:rPr lang="ru-RU" dirty="0"/>
+              <a:t> хранится в кластере и может быть просмотрена командой </a:t>
+            </a:r>
+            <a:r>
+              <a:rPr lang="ru-RU" dirty="0" err="1"/>
+              <a:t>helm</a:t>
+            </a:r>
+            <a:r>
+              <a:rPr lang="ru-RU" dirty="0"/>
+              <a:t> </a:t>
+            </a:r>
+            <a:r>
+              <a:rPr lang="ru-RU" dirty="0" err="1"/>
+              <a:t>history</a:t>
+            </a:r>
+            <a:r>
+              <a:rPr lang="ru-RU" dirty="0"/>
+              <a:t>; </a:t>
+            </a:r>
+          </a:p>
+          <a:p>
+            <a:pPr>
+              <a:spcBef>
+                <a:spcPts val="600"/>
+              </a:spcBef>
+            </a:pPr>
+            <a:r>
+              <a:rPr lang="ru-RU" dirty="0"/>
+              <a:t>все ресурсы одного </a:t>
+            </a:r>
+            <a:r>
+              <a:rPr lang="ru-RU" dirty="0" err="1"/>
+              <a:t>Release</a:t>
+            </a:r>
+            <a:r>
+              <a:rPr lang="ru-RU" dirty="0"/>
+              <a:t> имеют общую метку app.kubernetes.io/</a:t>
+            </a:r>
+            <a:r>
+              <a:rPr lang="ru-RU" dirty="0" err="1"/>
+              <a:t>instance</a:t>
+            </a:r>
+            <a:r>
+              <a:rPr lang="ru-RU" dirty="0"/>
+              <a:t>=&lt;</a:t>
+            </a:r>
+            <a:r>
+              <a:rPr lang="ru-RU" dirty="0" err="1"/>
+              <a:t>release-name</a:t>
+            </a:r>
+            <a:r>
+              <a:rPr lang="ru-RU" dirty="0"/>
+              <a:t>&gt;, что упрощает поиск связанных </a:t>
+            </a:r>
+            <a:r>
+              <a:rPr lang="ru-RU" dirty="0" err="1"/>
+              <a:t>Deployment</a:t>
+            </a:r>
+            <a:r>
+              <a:rPr lang="ru-RU" dirty="0"/>
+              <a:t>, </a:t>
             </a:r>
             <a:r>
               <a:rPr lang="ru-RU" dirty="0" err="1"/>
@@ -4569,259 +4797,44 @@
             </a:r>
             <a:r>
               <a:rPr lang="ru-RU" dirty="0"/>
-              <a:t> напрямую нельзя.</a:t>
-            </a:r>
-          </a:p>
-          <a:p>
-            <a:pPr marL="0" indent="0">
-              <a:buNone/>
+              <a:t>, Service, </a:t>
+            </a:r>
+            <a:r>
+              <a:rPr lang="ru-RU" dirty="0" err="1"/>
+              <a:t>ConfigMap</a:t>
+            </a:r>
+            <a:r>
+              <a:rPr lang="ru-RU" dirty="0"/>
+              <a:t> и других объектов; </a:t>
+            </a:r>
+          </a:p>
+          <a:p>
+            <a:pPr>
+              <a:spcBef>
+                <a:spcPts val="600"/>
+              </a:spcBef>
             </a:pPr>
             <a:r>
               <a:rPr lang="ru-RU" dirty="0"/>
-              <a:t>Для решения этой проблемы используется </a:t>
-            </a:r>
-            <a:r>
-              <a:rPr lang="ru-RU" b="1" dirty="0"/>
-              <a:t>Service</a:t>
+              <a:t>при неудачном обновлении приложение можно вернуть к предыдущей версии командой </a:t>
+            </a:r>
+            <a:r>
+              <a:rPr lang="ru-RU" dirty="0" err="1"/>
+              <a:t>helm</a:t>
+            </a:r>
+            <a:r>
+              <a:rPr lang="ru-RU" dirty="0"/>
+              <a:t> </a:t>
+            </a:r>
+            <a:r>
+              <a:rPr lang="ru-RU" dirty="0" err="1"/>
+              <a:t>rollback</a:t>
             </a:r>
             <a:r>
               <a:rPr lang="ru-RU" dirty="0"/>
               <a:t>.</a:t>
             </a:r>
-          </a:p>
-          <a:p>
-            <a:pPr marL="0" indent="0">
-              <a:buNone/>
-            </a:pPr>
-            <a:r>
-              <a:rPr lang="ru-RU" b="1" dirty="0"/>
-              <a:t>Service</a:t>
-            </a:r>
-            <a:r>
-              <a:rPr lang="ru-RU" dirty="0"/>
-              <a:t> – это объект </a:t>
-            </a:r>
-            <a:r>
-              <a:rPr lang="ru-RU" dirty="0" err="1"/>
-              <a:t>Kubernetes</a:t>
-            </a:r>
-            <a:r>
-              <a:rPr lang="ru-RU" dirty="0"/>
-              <a:t>, который предоставляет группе </a:t>
-            </a:r>
-            <a:r>
-              <a:rPr lang="ru-RU" dirty="0" err="1"/>
-              <a:t>Pod'ов</a:t>
-            </a:r>
-            <a:r>
-              <a:rPr lang="ru-RU" dirty="0"/>
-              <a:t> один постоянный внутренний IP-адрес и DNS-имя. Клиенты обращаются к Service, а </a:t>
-            </a:r>
-            <a:r>
-              <a:rPr lang="ru-RU" dirty="0" err="1"/>
-              <a:t>Kubernetes</a:t>
-            </a:r>
-            <a:r>
-              <a:rPr lang="ru-RU" dirty="0"/>
-              <a:t> автоматически перенаправляет запрос на один из подходящих </a:t>
-            </a:r>
-            <a:r>
-              <a:rPr lang="ru-RU" dirty="0" err="1"/>
-              <a:t>Pod'ов</a:t>
-            </a:r>
-            <a:r>
-              <a:rPr lang="ru-RU" dirty="0"/>
-              <a:t>.</a:t>
-            </a:r>
-          </a:p>
-          <a:p>
-            <a:pPr marL="0" indent="0">
-              <a:buNone/>
-            </a:pPr>
-            <a:r>
-              <a:rPr lang="ru-RU" b="1" dirty="0"/>
-              <a:t>Как Service находит нужные </a:t>
-            </a:r>
-            <a:r>
-              <a:rPr lang="ru-RU" b="1" dirty="0" err="1"/>
-              <a:t>Pod'ы</a:t>
-            </a:r>
-            <a:r>
-              <a:rPr lang="ru-RU" b="1" dirty="0"/>
-              <a:t>?</a:t>
-            </a:r>
-            <a:endParaRPr lang="ru-RU" dirty="0"/>
-          </a:p>
-          <a:p>
-            <a:r>
-              <a:rPr lang="ru-RU" b="1" dirty="0" err="1"/>
-              <a:t>Labels</a:t>
-            </a:r>
-            <a:r>
-              <a:rPr lang="ru-RU" b="1" dirty="0"/>
-              <a:t> (метки)</a:t>
-            </a:r>
-            <a:r>
-              <a:rPr lang="ru-RU" dirty="0"/>
-              <a:t> – назначаются </a:t>
-            </a:r>
-            <a:r>
-              <a:rPr lang="ru-RU" dirty="0" err="1"/>
-              <a:t>Pod'ам</a:t>
-            </a:r>
-            <a:r>
-              <a:rPr lang="ru-RU" dirty="0"/>
-              <a:t> (например, </a:t>
-            </a:r>
-            <a:r>
-              <a:rPr lang="ru-RU" dirty="0" err="1"/>
-              <a:t>app</a:t>
-            </a:r>
-            <a:r>
-              <a:rPr lang="ru-RU" dirty="0"/>
-              <a:t>: </a:t>
-            </a:r>
-            <a:r>
-              <a:rPr lang="ru-RU" dirty="0" err="1"/>
-              <a:t>payment-gateway</a:t>
-            </a:r>
-            <a:r>
-              <a:rPr lang="ru-RU" dirty="0"/>
-              <a:t>).</a:t>
-            </a:r>
-          </a:p>
-          <a:p>
-            <a:r>
-              <a:rPr lang="ru-RU" b="1" dirty="0" err="1"/>
-              <a:t>Selector</a:t>
-            </a:r>
-            <a:r>
-              <a:rPr lang="ru-RU" b="1" dirty="0"/>
-              <a:t> (селектор)</a:t>
-            </a:r>
-            <a:r>
-              <a:rPr lang="ru-RU" dirty="0"/>
-              <a:t> – указывается в Service и определяет, какие </a:t>
-            </a:r>
-            <a:r>
-              <a:rPr lang="ru-RU" dirty="0" err="1"/>
-              <a:t>Pod'ы</a:t>
-            </a:r>
-            <a:r>
-              <a:rPr lang="ru-RU" dirty="0"/>
-              <a:t> должны обслуживать запросы.</a:t>
-            </a:r>
-          </a:p>
-          <a:p>
-            <a:r>
-              <a:rPr lang="ru-RU" b="1" dirty="0" err="1"/>
-              <a:t>Endpoints</a:t>
-            </a:r>
-            <a:r>
-              <a:rPr lang="ru-RU" b="1" dirty="0"/>
-              <a:t> (конечные точки)</a:t>
-            </a:r>
-            <a:r>
-              <a:rPr lang="ru-RU" dirty="0"/>
-              <a:t> – </a:t>
-            </a:r>
-            <a:r>
-              <a:rPr lang="ru-RU" dirty="0" err="1"/>
-              <a:t>Kubernetes</a:t>
-            </a:r>
-            <a:r>
-              <a:rPr lang="ru-RU" dirty="0"/>
-              <a:t> автоматически формирует список IP-адресов всех </a:t>
-            </a:r>
-            <a:r>
-              <a:rPr lang="ru-RU" b="1" dirty="0"/>
-              <a:t>готовых</a:t>
-            </a:r>
-            <a:r>
-              <a:rPr lang="ru-RU" dirty="0"/>
-              <a:t> </a:t>
-            </a:r>
-            <a:r>
-              <a:rPr lang="ru-RU" dirty="0" err="1"/>
-              <a:t>Pod'ов</a:t>
-            </a:r>
-            <a:r>
-              <a:rPr lang="ru-RU" dirty="0"/>
-              <a:t>, подходящих под селектор. Именно на них Service распределяет входящий трафик.</a:t>
-            </a:r>
-            <a:br>
-              <a:rPr lang="ru-RU" dirty="0"/>
-            </a:br>
-            <a:r>
-              <a:rPr lang="ru-RU" i="1" dirty="0">
-                <a:solidFill>
-                  <a:schemeClr val="accent1">
-                    <a:lumMod val="75000"/>
-                  </a:schemeClr>
-                </a:solidFill>
-              </a:rPr>
-              <a:t>Если подходящих </a:t>
-            </a:r>
-            <a:r>
-              <a:rPr lang="ru-RU" i="1" dirty="0" err="1">
-                <a:solidFill>
-                  <a:schemeClr val="accent1">
-                    <a:lumMod val="75000"/>
-                  </a:schemeClr>
-                </a:solidFill>
-              </a:rPr>
-              <a:t>Pod'ов</a:t>
-            </a:r>
-            <a:r>
-              <a:rPr lang="ru-RU" i="1" dirty="0">
-                <a:solidFill>
-                  <a:schemeClr val="accent1">
-                    <a:lumMod val="75000"/>
-                  </a:schemeClr>
-                </a:solidFill>
-              </a:rPr>
-              <a:t> нет или они не готовы (</a:t>
-            </a:r>
-            <a:r>
-              <a:rPr lang="ru-RU" b="1" i="1" dirty="0">
-                <a:solidFill>
-                  <a:schemeClr val="accent1">
-                    <a:lumMod val="75000"/>
-                  </a:schemeClr>
-                </a:solidFill>
-              </a:rPr>
-              <a:t>Ready</a:t>
-            </a:r>
-            <a:r>
-              <a:rPr lang="ru-RU" i="1" dirty="0">
-                <a:solidFill>
-                  <a:schemeClr val="accent1">
-                    <a:lumMod val="75000"/>
-                  </a:schemeClr>
-                </a:solidFill>
-              </a:rPr>
-              <a:t>), список </a:t>
-            </a:r>
-            <a:r>
-              <a:rPr lang="ru-RU" i="1" dirty="0" err="1">
-                <a:solidFill>
-                  <a:schemeClr val="accent1">
-                    <a:lumMod val="75000"/>
-                  </a:schemeClr>
-                </a:solidFill>
-              </a:rPr>
-              <a:t>Endpoints</a:t>
-            </a:r>
-            <a:r>
-              <a:rPr lang="ru-RU" i="1" dirty="0">
-                <a:solidFill>
-                  <a:schemeClr val="accent1">
-                    <a:lumMod val="75000"/>
-                  </a:schemeClr>
-                </a:solidFill>
-              </a:rPr>
-              <a:t> будет пустым, и Service не сможет направить трафик.</a:t>
-            </a:r>
+            <a:endParaRPr lang="ru-RU" b="1" dirty="0"/>
           </a:p>
         </p:txBody>
       </p:sp>
@@ -4839,6 +4852,776 @@
 </file>
 
 <file path=ppt/slides/slide15.xml><?xml version="1.0" encoding="utf-8"?>
+<p:sld xmlns:a="http://schemas.openxmlformats.org/drawingml/2006/main" xmlns:r="http://schemas.openxmlformats.org/officeDocument/2006/relationships" xmlns:p="http://schemas.openxmlformats.org/presentationml/2006/main">
+  <p:cSld>
+    <p:spTree>
+      <p:nvGrpSpPr>
+        <p:cNvPr id="1" name="">
+          <a:extLst>
+            <a:ext uri="{FF2B5EF4-FFF2-40B4-BE49-F238E27FC236}">
+              <a16:creationId xmlns:a16="http://schemas.microsoft.com/office/drawing/2014/main" id="{836D7457-618C-930C-504B-56F329E6AC42}"/>
+            </a:ext>
+          </a:extLst>
+        </p:cNvPr>
+        <p:cNvGrpSpPr/>
+        <p:nvPr/>
+      </p:nvGrpSpPr>
+      <p:grpSpPr>
+        <a:xfrm>
+          <a:off x="0" y="0"/>
+          <a:ext cx="0" cy="0"/>
+          <a:chOff x="0" y="0"/>
+          <a:chExt cx="0" cy="0"/>
+        </a:xfrm>
+      </p:grpSpPr>
+      <p:sp>
+        <p:nvSpPr>
+          <p:cNvPr id="2" name="Заголовок 1">
+            <a:extLst>
+              <a:ext uri="{FF2B5EF4-FFF2-40B4-BE49-F238E27FC236}">
+                <a16:creationId xmlns:a16="http://schemas.microsoft.com/office/drawing/2014/main" id="{09261943-1259-3DC2-244A-6F7C5814808F}"/>
+              </a:ext>
+            </a:extLst>
+          </p:cNvPr>
+          <p:cNvSpPr>
+            <a:spLocks noGrp="1"/>
+          </p:cNvSpPr>
+          <p:nvPr>
+            <p:ph type="title"/>
+          </p:nvPr>
+        </p:nvSpPr>
+        <p:spPr/>
+        <p:txBody>
+          <a:bodyPr/>
+          <a:lstStyle/>
+          <a:p>
+            <a:r>
+              <a:rPr lang="ru-RU" b="1" dirty="0">
+                <a:solidFill>
+                  <a:schemeClr val="accent1">
+                    <a:lumMod val="75000"/>
+                  </a:schemeClr>
+                </a:solidFill>
+              </a:rPr>
+              <a:t>Общие концепции. </a:t>
+            </a:r>
+            <a:r>
+              <a:rPr lang="ru-RU" b="1" dirty="0" err="1">
+                <a:solidFill>
+                  <a:schemeClr val="accent1">
+                    <a:lumMod val="75000"/>
+                  </a:schemeClr>
+                </a:solidFill>
+              </a:rPr>
+              <a:t>Helm</a:t>
+            </a:r>
+            <a:endParaRPr lang="ru-RU" b="1" dirty="0">
+              <a:solidFill>
+                <a:schemeClr val="accent1">
+                  <a:lumMod val="75000"/>
+                </a:schemeClr>
+              </a:solidFill>
+            </a:endParaRPr>
+          </a:p>
+        </p:txBody>
+      </p:sp>
+      <p:sp>
+        <p:nvSpPr>
+          <p:cNvPr id="9" name="Объект 8">
+            <a:extLst>
+              <a:ext uri="{FF2B5EF4-FFF2-40B4-BE49-F238E27FC236}">
+                <a16:creationId xmlns:a16="http://schemas.microsoft.com/office/drawing/2014/main" id="{CB8533EB-888E-E400-EF33-3625CB072E53}"/>
+              </a:ext>
+            </a:extLst>
+          </p:cNvPr>
+          <p:cNvSpPr>
+            <a:spLocks noGrp="1"/>
+          </p:cNvSpPr>
+          <p:nvPr>
+            <p:ph idx="1"/>
+          </p:nvPr>
+        </p:nvSpPr>
+        <p:spPr>
+          <a:xfrm>
+            <a:off x="838200" y="1515363"/>
+            <a:ext cx="10515600" cy="4758056"/>
+          </a:xfrm>
+        </p:spPr>
+        <p:txBody>
+          <a:bodyPr>
+            <a:noAutofit/>
+          </a:bodyPr>
+          <a:lstStyle/>
+          <a:p>
+            <a:pPr marL="0" indent="0" latinLnBrk="1">
+              <a:buNone/>
+            </a:pPr>
+            <a:r>
+              <a:rPr lang="ru-RU" sz="2000" b="1" dirty="0"/>
+              <a:t>Типичные сценарии: </a:t>
+            </a:r>
+          </a:p>
+          <a:p>
+            <a:pPr fontAlgn="ctr">
+              <a:spcBef>
+                <a:spcPts val="600"/>
+              </a:spcBef>
+            </a:pPr>
+            <a:r>
+              <a:rPr lang="ru-RU" sz="2000" dirty="0"/>
+              <a:t>После обновления приложения перестали проходить тесты → Посмотреть </a:t>
+            </a:r>
+            <a:r>
+              <a:rPr lang="ru-RU" sz="2000" dirty="0" err="1"/>
+              <a:t>helm</a:t>
+            </a:r>
+            <a:r>
+              <a:rPr lang="ru-RU" sz="2000" dirty="0"/>
+              <a:t> </a:t>
+            </a:r>
+            <a:r>
+              <a:rPr lang="ru-RU" sz="2000" dirty="0" err="1"/>
+              <a:t>history</a:t>
+            </a:r>
+            <a:r>
+              <a:rPr lang="ru-RU" sz="2000" dirty="0"/>
+              <a:t>, чтобы определить, какая версия была развернута и когда произошло обновление.</a:t>
+            </a:r>
+          </a:p>
+          <a:p>
+            <a:pPr fontAlgn="ctr">
+              <a:spcBef>
+                <a:spcPts val="600"/>
+              </a:spcBef>
+            </a:pPr>
+            <a:r>
+              <a:rPr lang="ru-RU" sz="2000" dirty="0"/>
+              <a:t>Нужно проверить конфигурацию тестового стенда → найти </a:t>
+            </a:r>
+            <a:r>
+              <a:rPr lang="ru-RU" sz="2000" dirty="0" err="1"/>
+              <a:t>ConfigMap</a:t>
+            </a:r>
+            <a:r>
+              <a:rPr lang="ru-RU" sz="2000" dirty="0"/>
+              <a:t> или Secret, относящиеся к нужному </a:t>
+            </a:r>
+            <a:r>
+              <a:rPr lang="ru-RU" sz="2000" dirty="0" err="1"/>
+              <a:t>Release</a:t>
+            </a:r>
+            <a:r>
+              <a:rPr lang="ru-RU" sz="2000" dirty="0"/>
+              <a:t>.</a:t>
+            </a:r>
+          </a:p>
+          <a:p>
+            <a:pPr fontAlgn="ctr">
+              <a:spcBef>
+                <a:spcPts val="600"/>
+              </a:spcBef>
+            </a:pPr>
+            <a:r>
+              <a:rPr lang="ru-RU" sz="2000" dirty="0"/>
+              <a:t>После релиза возникли критические ошибки → при наличии необходимых прав выполнить </a:t>
+            </a:r>
+            <a:r>
+              <a:rPr lang="ru-RU" sz="2000" dirty="0" err="1"/>
+              <a:t>helm</a:t>
+            </a:r>
+            <a:r>
+              <a:rPr lang="ru-RU" sz="2000" dirty="0"/>
+              <a:t> </a:t>
+            </a:r>
+            <a:r>
+              <a:rPr lang="ru-RU" sz="2000" dirty="0" err="1"/>
+              <a:t>rollback</a:t>
+            </a:r>
+            <a:endParaRPr lang="ru-RU" sz="2000" dirty="0"/>
+          </a:p>
+          <a:p>
+            <a:pPr fontAlgn="ctr">
+              <a:spcBef>
+                <a:spcPts val="600"/>
+              </a:spcBef>
+            </a:pPr>
+            <a:r>
+              <a:rPr lang="ru-RU" sz="2000" dirty="0"/>
+              <a:t>Нужно узнать, какая версия приложения развернута на стенде→ посмотреть параметры текущего </a:t>
+            </a:r>
+            <a:r>
+              <a:rPr lang="ru-RU" sz="2000" dirty="0" err="1"/>
+              <a:t>Release</a:t>
+            </a:r>
+            <a:r>
+              <a:rPr lang="ru-RU" sz="2000" dirty="0"/>
+              <a:t> (</a:t>
+            </a:r>
+            <a:r>
+              <a:rPr lang="ru-RU" sz="2000" dirty="0" err="1"/>
+              <a:t>helm</a:t>
+            </a:r>
+            <a:r>
+              <a:rPr lang="ru-RU" sz="2000" dirty="0"/>
+              <a:t> </a:t>
+            </a:r>
+            <a:r>
+              <a:rPr lang="ru-RU" sz="2000" dirty="0" err="1"/>
+              <a:t>status</a:t>
+            </a:r>
+            <a:r>
+              <a:rPr lang="ru-RU" sz="2000" dirty="0"/>
+              <a:t>) или историю (</a:t>
+            </a:r>
+            <a:r>
+              <a:rPr lang="ru-RU" sz="2000" dirty="0" err="1"/>
+              <a:t>helm</a:t>
+            </a:r>
+            <a:r>
+              <a:rPr lang="ru-RU" sz="2000" dirty="0"/>
+              <a:t> </a:t>
+            </a:r>
+            <a:r>
+              <a:rPr lang="ru-RU" sz="2000" dirty="0" err="1"/>
+              <a:t>history</a:t>
+            </a:r>
+            <a:r>
+              <a:rPr lang="ru-RU" sz="2000" dirty="0"/>
+              <a:t>).</a:t>
+            </a:r>
+          </a:p>
+          <a:p>
+            <a:pPr marL="0" indent="0" fontAlgn="ctr">
+              <a:spcBef>
+                <a:spcPts val="600"/>
+              </a:spcBef>
+              <a:buNone/>
+            </a:pPr>
+            <a:r>
+              <a:rPr lang="ru-RU" sz="2000" b="1" dirty="0"/>
+              <a:t>Основные команды:</a:t>
+            </a:r>
+            <a:endParaRPr lang="ru-RU" sz="2000" dirty="0"/>
+          </a:p>
+          <a:p>
+            <a:pPr latinLnBrk="1"/>
+            <a:r>
+              <a:rPr lang="ru-RU" sz="2000" dirty="0" err="1"/>
+              <a:t>helm</a:t>
+            </a:r>
+            <a:r>
+              <a:rPr lang="ru-RU" sz="2000" dirty="0"/>
+              <a:t> </a:t>
+            </a:r>
+            <a:r>
+              <a:rPr lang="ru-RU" sz="2000" dirty="0" err="1"/>
+              <a:t>list</a:t>
+            </a:r>
+            <a:r>
+              <a:rPr lang="ru-RU" sz="2000" dirty="0"/>
+              <a:t> -n &lt;</a:t>
+            </a:r>
+            <a:r>
+              <a:rPr lang="ru-RU" sz="2000" dirty="0" err="1"/>
+              <a:t>namespace</a:t>
+            </a:r>
+            <a:r>
+              <a:rPr lang="ru-RU" sz="2000" dirty="0"/>
+              <a:t>&gt; –</a:t>
+            </a:r>
+            <a:r>
+              <a:rPr lang="en-US" sz="2000" dirty="0"/>
+              <a:t> </a:t>
+            </a:r>
+            <a:r>
+              <a:rPr lang="ru-RU" sz="2000" dirty="0"/>
+              <a:t>список релизов</a:t>
+            </a:r>
+          </a:p>
+          <a:p>
+            <a:pPr latinLnBrk="1"/>
+            <a:r>
+              <a:rPr lang="ru-RU" sz="2000" dirty="0" err="1"/>
+              <a:t>helm</a:t>
+            </a:r>
+            <a:r>
+              <a:rPr lang="ru-RU" sz="2000" dirty="0"/>
+              <a:t> </a:t>
+            </a:r>
+            <a:r>
+              <a:rPr lang="ru-RU" sz="2000" dirty="0" err="1"/>
+              <a:t>status</a:t>
+            </a:r>
+            <a:r>
+              <a:rPr lang="ru-RU" sz="2000" dirty="0"/>
+              <a:t> &lt;</a:t>
+            </a:r>
+            <a:r>
+              <a:rPr lang="ru-RU" sz="2000" dirty="0" err="1"/>
+              <a:t>release</a:t>
+            </a:r>
+            <a:r>
+              <a:rPr lang="ru-RU" sz="2000" dirty="0"/>
+              <a:t>&gt; -n &lt;</a:t>
+            </a:r>
+            <a:r>
+              <a:rPr lang="ru-RU" sz="2000" dirty="0" err="1"/>
+              <a:t>ns</a:t>
+            </a:r>
+            <a:r>
+              <a:rPr lang="ru-RU" sz="2000" dirty="0"/>
+              <a:t>&gt; – текущее состояние релиза</a:t>
+            </a:r>
+          </a:p>
+          <a:p>
+            <a:pPr latinLnBrk="1"/>
+            <a:r>
+              <a:rPr lang="ru-RU" sz="2000" dirty="0" err="1"/>
+              <a:t>helm</a:t>
+            </a:r>
+            <a:r>
+              <a:rPr lang="ru-RU" sz="2000" dirty="0"/>
+              <a:t> </a:t>
+            </a:r>
+            <a:r>
+              <a:rPr lang="ru-RU" sz="2000" dirty="0" err="1"/>
+              <a:t>history</a:t>
+            </a:r>
+            <a:r>
+              <a:rPr lang="ru-RU" sz="2000" dirty="0"/>
+              <a:t> &lt;</a:t>
+            </a:r>
+            <a:r>
+              <a:rPr lang="ru-RU" sz="2000" dirty="0" err="1"/>
+              <a:t>release</a:t>
+            </a:r>
+            <a:r>
+              <a:rPr lang="ru-RU" sz="2000" dirty="0"/>
+              <a:t>&gt; -n &lt;</a:t>
+            </a:r>
+            <a:r>
+              <a:rPr lang="ru-RU" sz="2000" dirty="0" err="1"/>
+              <a:t>ns</a:t>
+            </a:r>
+            <a:r>
+              <a:rPr lang="ru-RU" sz="2000" dirty="0"/>
+              <a:t>&gt; – история обновлений</a:t>
+            </a:r>
+          </a:p>
+          <a:p>
+            <a:pPr latinLnBrk="1"/>
+            <a:r>
+              <a:rPr lang="ru-RU" sz="2000" dirty="0" err="1"/>
+              <a:t>helm</a:t>
+            </a:r>
+            <a:r>
+              <a:rPr lang="ru-RU" sz="2000" dirty="0"/>
+              <a:t> </a:t>
+            </a:r>
+            <a:r>
+              <a:rPr lang="ru-RU" sz="2000" dirty="0" err="1"/>
+              <a:t>rollback</a:t>
+            </a:r>
+            <a:r>
+              <a:rPr lang="ru-RU" sz="2000" dirty="0"/>
+              <a:t> &lt;</a:t>
+            </a:r>
+            <a:r>
+              <a:rPr lang="ru-RU" sz="2000" dirty="0" err="1"/>
+              <a:t>release</a:t>
+            </a:r>
+            <a:r>
+              <a:rPr lang="ru-RU" sz="2000" dirty="0"/>
+              <a:t>&gt; &lt;номер&gt; – откат </a:t>
+            </a:r>
+            <a:r>
+              <a:rPr lang="ru-RU" sz="2000"/>
+              <a:t>к предыдущей версии</a:t>
+            </a:r>
+            <a:endParaRPr lang="ru-RU" sz="2000" dirty="0"/>
+          </a:p>
+        </p:txBody>
+      </p:sp>
+    </p:spTree>
+    <p:extLst>
+      <p:ext uri="{BB962C8B-B14F-4D97-AF65-F5344CB8AC3E}">
+        <p14:creationId xmlns:p14="http://schemas.microsoft.com/office/powerpoint/2010/main" val="1947830635"/>
+      </p:ext>
+    </p:extLst>
+  </p:cSld>
+  <p:clrMapOvr>
+    <a:masterClrMapping/>
+  </p:clrMapOvr>
+</p:sld>
+</file>
+
+<file path=ppt/slides/slide16.xml><?xml version="1.0" encoding="utf-8"?>
+<p:sld xmlns:a="http://schemas.openxmlformats.org/drawingml/2006/main" xmlns:r="http://schemas.openxmlformats.org/officeDocument/2006/relationships" xmlns:p="http://schemas.openxmlformats.org/presentationml/2006/main">
+  <p:cSld>
+    <p:spTree>
+      <p:nvGrpSpPr>
+        <p:cNvPr id="1" name="">
+          <a:extLst>
+            <a:ext uri="{FF2B5EF4-FFF2-40B4-BE49-F238E27FC236}">
+              <a16:creationId xmlns:a16="http://schemas.microsoft.com/office/drawing/2014/main" id="{90D59302-B29F-A628-31BC-717757686808}"/>
+            </a:ext>
+          </a:extLst>
+        </p:cNvPr>
+        <p:cNvGrpSpPr/>
+        <p:nvPr/>
+      </p:nvGrpSpPr>
+      <p:grpSpPr>
+        <a:xfrm>
+          <a:off x="0" y="0"/>
+          <a:ext cx="0" cy="0"/>
+          <a:chOff x="0" y="0"/>
+          <a:chExt cx="0" cy="0"/>
+        </a:xfrm>
+      </p:grpSpPr>
+      <p:sp>
+        <p:nvSpPr>
+          <p:cNvPr id="2" name="Заголовок 1">
+            <a:extLst>
+              <a:ext uri="{FF2B5EF4-FFF2-40B4-BE49-F238E27FC236}">
+                <a16:creationId xmlns:a16="http://schemas.microsoft.com/office/drawing/2014/main" id="{51911E1F-88C9-9E4A-5DE4-4C8BEDE3D1CB}"/>
+              </a:ext>
+            </a:extLst>
+          </p:cNvPr>
+          <p:cNvSpPr>
+            <a:spLocks noGrp="1"/>
+          </p:cNvSpPr>
+          <p:nvPr>
+            <p:ph type="title"/>
+          </p:nvPr>
+        </p:nvSpPr>
+        <p:spPr/>
+        <p:txBody>
+          <a:bodyPr/>
+          <a:lstStyle/>
+          <a:p>
+            <a:r>
+              <a:rPr lang="ru-RU" b="1" dirty="0">
+                <a:solidFill>
+                  <a:schemeClr val="accent1">
+                    <a:lumMod val="75000"/>
+                  </a:schemeClr>
+                </a:solidFill>
+              </a:rPr>
+              <a:t>Общие концепции. Kubernetes Service</a:t>
+            </a:r>
+          </a:p>
+        </p:txBody>
+      </p:sp>
+      <p:sp>
+        <p:nvSpPr>
+          <p:cNvPr id="9" name="Объект 8">
+            <a:extLst>
+              <a:ext uri="{FF2B5EF4-FFF2-40B4-BE49-F238E27FC236}">
+                <a16:creationId xmlns:a16="http://schemas.microsoft.com/office/drawing/2014/main" id="{5BA6A500-877A-F667-AA04-49FAAC605635}"/>
+              </a:ext>
+            </a:extLst>
+          </p:cNvPr>
+          <p:cNvSpPr>
+            <a:spLocks noGrp="1"/>
+          </p:cNvSpPr>
+          <p:nvPr>
+            <p:ph idx="1"/>
+          </p:nvPr>
+        </p:nvSpPr>
+        <p:spPr/>
+        <p:txBody>
+          <a:bodyPr>
+            <a:normAutofit fontScale="70000" lnSpcReduction="20000"/>
+          </a:bodyPr>
+          <a:lstStyle/>
+          <a:p>
+            <a:pPr marL="0" indent="0">
+              <a:buNone/>
+            </a:pPr>
+            <a:r>
+              <a:rPr lang="ru-RU" dirty="0" err="1"/>
+              <a:t>Pods</a:t>
+            </a:r>
+            <a:r>
+              <a:rPr lang="ru-RU" dirty="0"/>
+              <a:t> – это «расходный материал». Они могут завершаться, пересоздаваться или масштабироваться, поэтому при каждом создании получают новый IP-адрес. Из-за этого обращаться к </a:t>
+            </a:r>
+            <a:r>
+              <a:rPr lang="ru-RU" dirty="0" err="1"/>
+              <a:t>Pod</a:t>
+            </a:r>
+            <a:r>
+              <a:rPr lang="ru-RU" dirty="0"/>
+              <a:t> напрямую нельзя.</a:t>
+            </a:r>
+          </a:p>
+          <a:p>
+            <a:pPr marL="0" indent="0">
+              <a:buNone/>
+            </a:pPr>
+            <a:r>
+              <a:rPr lang="ru-RU" dirty="0"/>
+              <a:t>Для решения этой проблемы используется </a:t>
+            </a:r>
+            <a:r>
+              <a:rPr lang="ru-RU" b="1" dirty="0"/>
+              <a:t>Service</a:t>
+            </a:r>
+            <a:r>
+              <a:rPr lang="ru-RU" dirty="0"/>
+              <a:t>.</a:t>
+            </a:r>
+          </a:p>
+          <a:p>
+            <a:pPr marL="0" indent="0">
+              <a:buNone/>
+            </a:pPr>
+            <a:r>
+              <a:rPr lang="ru-RU" b="1" dirty="0"/>
+              <a:t>Service</a:t>
+            </a:r>
+            <a:r>
+              <a:rPr lang="ru-RU" dirty="0"/>
+              <a:t> – это объект </a:t>
+            </a:r>
+            <a:r>
+              <a:rPr lang="ru-RU" dirty="0" err="1"/>
+              <a:t>Kubernetes</a:t>
+            </a:r>
+            <a:r>
+              <a:rPr lang="ru-RU" dirty="0"/>
+              <a:t>, который предоставляет группе </a:t>
+            </a:r>
+            <a:r>
+              <a:rPr lang="ru-RU" dirty="0" err="1"/>
+              <a:t>Pod'ов</a:t>
+            </a:r>
+            <a:r>
+              <a:rPr lang="ru-RU" dirty="0"/>
+              <a:t> один постоянный внутренний IP-адрес и DNS-имя. Клиенты обращаются к Service, а </a:t>
+            </a:r>
+            <a:r>
+              <a:rPr lang="ru-RU" dirty="0" err="1"/>
+              <a:t>Kubernetes</a:t>
+            </a:r>
+            <a:r>
+              <a:rPr lang="ru-RU" dirty="0"/>
+              <a:t> автоматически перенаправляет запрос на один из подходящих </a:t>
+            </a:r>
+            <a:r>
+              <a:rPr lang="ru-RU" dirty="0" err="1"/>
+              <a:t>Pod'ов</a:t>
+            </a:r>
+            <a:r>
+              <a:rPr lang="ru-RU" dirty="0"/>
+              <a:t>.</a:t>
+            </a:r>
+          </a:p>
+          <a:p>
+            <a:pPr marL="0" indent="0">
+              <a:buNone/>
+            </a:pPr>
+            <a:r>
+              <a:rPr lang="ru-RU" b="1" dirty="0"/>
+              <a:t>Как Service находит нужные </a:t>
+            </a:r>
+            <a:r>
+              <a:rPr lang="ru-RU" b="1" dirty="0" err="1"/>
+              <a:t>Pod'ы</a:t>
+            </a:r>
+            <a:r>
+              <a:rPr lang="ru-RU" b="1" dirty="0"/>
+              <a:t>?</a:t>
+            </a:r>
+            <a:endParaRPr lang="ru-RU" dirty="0"/>
+          </a:p>
+          <a:p>
+            <a:r>
+              <a:rPr lang="ru-RU" b="1" dirty="0" err="1"/>
+              <a:t>Labels</a:t>
+            </a:r>
+            <a:r>
+              <a:rPr lang="ru-RU" b="1" dirty="0"/>
+              <a:t> (метки)</a:t>
+            </a:r>
+            <a:r>
+              <a:rPr lang="ru-RU" dirty="0"/>
+              <a:t> – назначаются </a:t>
+            </a:r>
+            <a:r>
+              <a:rPr lang="ru-RU" dirty="0" err="1"/>
+              <a:t>Pod'ам</a:t>
+            </a:r>
+            <a:r>
+              <a:rPr lang="ru-RU" dirty="0"/>
+              <a:t> (например, </a:t>
+            </a:r>
+            <a:r>
+              <a:rPr lang="ru-RU" dirty="0" err="1"/>
+              <a:t>app</a:t>
+            </a:r>
+            <a:r>
+              <a:rPr lang="ru-RU" dirty="0"/>
+              <a:t>: </a:t>
+            </a:r>
+            <a:r>
+              <a:rPr lang="ru-RU" dirty="0" err="1"/>
+              <a:t>payment-gateway</a:t>
+            </a:r>
+            <a:r>
+              <a:rPr lang="ru-RU" dirty="0"/>
+              <a:t>).</a:t>
+            </a:r>
+          </a:p>
+          <a:p>
+            <a:r>
+              <a:rPr lang="ru-RU" b="1" dirty="0" err="1"/>
+              <a:t>Selector</a:t>
+            </a:r>
+            <a:r>
+              <a:rPr lang="ru-RU" b="1" dirty="0"/>
+              <a:t> (селектор)</a:t>
+            </a:r>
+            <a:r>
+              <a:rPr lang="ru-RU" dirty="0"/>
+              <a:t> – указывается в Service и определяет, какие </a:t>
+            </a:r>
+            <a:r>
+              <a:rPr lang="ru-RU" dirty="0" err="1"/>
+              <a:t>Pod'ы</a:t>
+            </a:r>
+            <a:r>
+              <a:rPr lang="ru-RU" dirty="0"/>
+              <a:t> должны обслуживать запросы.</a:t>
+            </a:r>
+          </a:p>
+          <a:p>
+            <a:r>
+              <a:rPr lang="ru-RU" b="1" dirty="0" err="1"/>
+              <a:t>Endpoints</a:t>
+            </a:r>
+            <a:r>
+              <a:rPr lang="ru-RU" b="1" dirty="0"/>
+              <a:t> (конечные точки)</a:t>
+            </a:r>
+            <a:r>
+              <a:rPr lang="ru-RU" dirty="0"/>
+              <a:t> – </a:t>
+            </a:r>
+            <a:r>
+              <a:rPr lang="ru-RU" dirty="0" err="1"/>
+              <a:t>Kubernetes</a:t>
+            </a:r>
+            <a:r>
+              <a:rPr lang="ru-RU" dirty="0"/>
+              <a:t> автоматически формирует список IP-адресов всех </a:t>
+            </a:r>
+            <a:r>
+              <a:rPr lang="ru-RU" b="1" dirty="0"/>
+              <a:t>готовых</a:t>
+            </a:r>
+            <a:r>
+              <a:rPr lang="ru-RU" dirty="0"/>
+              <a:t> </a:t>
+            </a:r>
+            <a:r>
+              <a:rPr lang="ru-RU" dirty="0" err="1"/>
+              <a:t>Pod'ов</a:t>
+            </a:r>
+            <a:r>
+              <a:rPr lang="ru-RU" dirty="0"/>
+              <a:t>, подходящих под селектор. Именно на них Service распределяет входящий трафик.</a:t>
+            </a:r>
+            <a:br>
+              <a:rPr lang="ru-RU" dirty="0"/>
+            </a:br>
+            <a:r>
+              <a:rPr lang="ru-RU" i="1" dirty="0">
+                <a:solidFill>
+                  <a:schemeClr val="accent1">
+                    <a:lumMod val="75000"/>
+                  </a:schemeClr>
+                </a:solidFill>
+              </a:rPr>
+              <a:t>Если подходящих </a:t>
+            </a:r>
+            <a:r>
+              <a:rPr lang="ru-RU" i="1" dirty="0" err="1">
+                <a:solidFill>
+                  <a:schemeClr val="accent1">
+                    <a:lumMod val="75000"/>
+                  </a:schemeClr>
+                </a:solidFill>
+              </a:rPr>
+              <a:t>Pod'ов</a:t>
+            </a:r>
+            <a:r>
+              <a:rPr lang="ru-RU" i="1" dirty="0">
+                <a:solidFill>
+                  <a:schemeClr val="accent1">
+                    <a:lumMod val="75000"/>
+                  </a:schemeClr>
+                </a:solidFill>
+              </a:rPr>
+              <a:t> нет или они не готовы (</a:t>
+            </a:r>
+            <a:r>
+              <a:rPr lang="ru-RU" b="1" i="1" dirty="0">
+                <a:solidFill>
+                  <a:schemeClr val="accent1">
+                    <a:lumMod val="75000"/>
+                  </a:schemeClr>
+                </a:solidFill>
+              </a:rPr>
+              <a:t>Ready</a:t>
+            </a:r>
+            <a:r>
+              <a:rPr lang="ru-RU" i="1" dirty="0">
+                <a:solidFill>
+                  <a:schemeClr val="accent1">
+                    <a:lumMod val="75000"/>
+                  </a:schemeClr>
+                </a:solidFill>
+              </a:rPr>
+              <a:t>), список </a:t>
+            </a:r>
+            <a:r>
+              <a:rPr lang="ru-RU" i="1" dirty="0" err="1">
+                <a:solidFill>
+                  <a:schemeClr val="accent1">
+                    <a:lumMod val="75000"/>
+                  </a:schemeClr>
+                </a:solidFill>
+              </a:rPr>
+              <a:t>Endpoints</a:t>
+            </a:r>
+            <a:r>
+              <a:rPr lang="ru-RU" i="1" dirty="0">
+                <a:solidFill>
+                  <a:schemeClr val="accent1">
+                    <a:lumMod val="75000"/>
+                  </a:schemeClr>
+                </a:solidFill>
+              </a:rPr>
+              <a:t> будет пустым, и Service не сможет направить трафик.</a:t>
+            </a:r>
+          </a:p>
+        </p:txBody>
+      </p:sp>
+    </p:spTree>
+    <p:extLst>
+      <p:ext uri="{BB962C8B-B14F-4D97-AF65-F5344CB8AC3E}">
+        <p14:creationId xmlns:p14="http://schemas.microsoft.com/office/powerpoint/2010/main" val="530447079"/>
+      </p:ext>
+    </p:extLst>
+  </p:cSld>
+  <p:clrMapOvr>
+    <a:masterClrMapping/>
+  </p:clrMapOvr>
+</p:sld>
+</file>
+
+<file path=ppt/slides/slide17.xml><?xml version="1.0" encoding="utf-8"?>
 <p:sld xmlns:a="http://schemas.openxmlformats.org/drawingml/2006/main" xmlns:r="http://schemas.openxmlformats.org/officeDocument/2006/relationships" xmlns:p="http://schemas.openxmlformats.org/presentationml/2006/main">
   <p:cSld>
     <p:spTree>
@@ -4970,7 +5753,7 @@
 </p:sld>
 </file>
 
-<file path=ppt/slides/slide16.xml><?xml version="1.0" encoding="utf-8"?>
+<file path=ppt/slides/slide18.xml><?xml version="1.0" encoding="utf-8"?>
 <p:sld xmlns:a="http://schemas.openxmlformats.org/drawingml/2006/main" xmlns:r="http://schemas.openxmlformats.org/officeDocument/2006/relationships" xmlns:p="http://schemas.openxmlformats.org/presentationml/2006/main">
   <p:cSld>
     <p:spTree>
@@ -5142,7 +5925,7 @@
 </p:sld>
 </file>
 
-<file path=ppt/slides/slide17.xml><?xml version="1.0" encoding="utf-8"?>
+<file path=ppt/slides/slide19.xml><?xml version="1.0" encoding="utf-8"?>
 <p:sld xmlns:a="http://schemas.openxmlformats.org/drawingml/2006/main" xmlns:r="http://schemas.openxmlformats.org/officeDocument/2006/relationships" xmlns:p="http://schemas.openxmlformats.org/presentationml/2006/main">
   <p:cSld>
     <p:spTree>
@@ -5395,532 +6178,6 @@
     <p:extLst>
       <p:ext uri="{BB962C8B-B14F-4D97-AF65-F5344CB8AC3E}">
         <p14:creationId xmlns:p14="http://schemas.microsoft.com/office/powerpoint/2010/main" val="3345762599"/>
-      </p:ext>
-    </p:extLst>
-  </p:cSld>
-  <p:clrMapOvr>
-    <a:masterClrMapping/>
-  </p:clrMapOvr>
-</p:sld>
-</file>
-
-<file path=ppt/slides/slide18.xml><?xml version="1.0" encoding="utf-8"?>
-<p:sld xmlns:a="http://schemas.openxmlformats.org/drawingml/2006/main" xmlns:r="http://schemas.openxmlformats.org/officeDocument/2006/relationships" xmlns:p="http://schemas.openxmlformats.org/presentationml/2006/main">
-  <p:cSld>
-    <p:spTree>
-      <p:nvGrpSpPr>
-        <p:cNvPr id="1" name="">
-          <a:extLst>
-            <a:ext uri="{FF2B5EF4-FFF2-40B4-BE49-F238E27FC236}">
-              <a16:creationId xmlns:a16="http://schemas.microsoft.com/office/drawing/2014/main" id="{242308FF-FDB2-BA24-029C-C631578FECC9}"/>
-            </a:ext>
-          </a:extLst>
-        </p:cNvPr>
-        <p:cNvGrpSpPr/>
-        <p:nvPr/>
-      </p:nvGrpSpPr>
-      <p:grpSpPr>
-        <a:xfrm>
-          <a:off x="0" y="0"/>
-          <a:ext cx="0" cy="0"/>
-          <a:chOff x="0" y="0"/>
-          <a:chExt cx="0" cy="0"/>
-        </a:xfrm>
-      </p:grpSpPr>
-      <p:sp>
-        <p:nvSpPr>
-          <p:cNvPr id="2" name="Заголовок 1">
-            <a:extLst>
-              <a:ext uri="{FF2B5EF4-FFF2-40B4-BE49-F238E27FC236}">
-                <a16:creationId xmlns:a16="http://schemas.microsoft.com/office/drawing/2014/main" id="{DEF84094-F0D9-C447-A625-8B6F8E4BC21F}"/>
-              </a:ext>
-            </a:extLst>
-          </p:cNvPr>
-          <p:cNvSpPr>
-            <a:spLocks noGrp="1"/>
-          </p:cNvSpPr>
-          <p:nvPr>
-            <p:ph type="title"/>
-          </p:nvPr>
-        </p:nvSpPr>
-        <p:spPr/>
-        <p:txBody>
-          <a:bodyPr/>
-          <a:lstStyle/>
-          <a:p>
-            <a:r>
-              <a:rPr lang="ru-RU" b="1" dirty="0">
-                <a:solidFill>
-                  <a:schemeClr val="accent1">
-                    <a:lumMod val="75000"/>
-                  </a:schemeClr>
-                </a:solidFill>
-              </a:rPr>
-              <a:t>Общие концепции. </a:t>
-            </a:r>
-            <a:r>
-              <a:rPr lang="en-US" b="1" dirty="0">
-                <a:solidFill>
-                  <a:schemeClr val="accent1">
-                    <a:lumMod val="75000"/>
-                  </a:schemeClr>
-                </a:solidFill>
-              </a:rPr>
-              <a:t>Ingress</a:t>
-            </a:r>
-            <a:endParaRPr lang="ru-RU" b="1" dirty="0">
-              <a:solidFill>
-                <a:schemeClr val="accent1">
-                  <a:lumMod val="75000"/>
-                </a:schemeClr>
-              </a:solidFill>
-            </a:endParaRPr>
-          </a:p>
-        </p:txBody>
-      </p:sp>
-      <p:pic>
-        <p:nvPicPr>
-          <p:cNvPr id="5" name="Объект 4">
-            <a:extLst>
-              <a:ext uri="{FF2B5EF4-FFF2-40B4-BE49-F238E27FC236}">
-                <a16:creationId xmlns:a16="http://schemas.microsoft.com/office/drawing/2014/main" id="{D638B2F1-9E00-2E68-0493-5440C3862FD0}"/>
-              </a:ext>
-            </a:extLst>
-          </p:cNvPr>
-          <p:cNvPicPr>
-            <a:picLocks noGrp="1" noChangeAspect="1"/>
-          </p:cNvPicPr>
-          <p:nvPr>
-            <p:ph idx="1"/>
-          </p:nvPr>
-        </p:nvPicPr>
-        <p:blipFill>
-          <a:blip r:embed="rId2"/>
-          <a:stretch>
-            <a:fillRect/>
-          </a:stretch>
-        </p:blipFill>
-        <p:spPr>
-          <a:xfrm>
-            <a:off x="838200" y="2018004"/>
-            <a:ext cx="10515600" cy="3966579"/>
-          </a:xfrm>
-          <a:prstGeom prst="rect">
-            <a:avLst/>
-          </a:prstGeom>
-        </p:spPr>
-      </p:pic>
-    </p:spTree>
-    <p:extLst>
-      <p:ext uri="{BB962C8B-B14F-4D97-AF65-F5344CB8AC3E}">
-        <p14:creationId xmlns:p14="http://schemas.microsoft.com/office/powerpoint/2010/main" val="3591312026"/>
-      </p:ext>
-    </p:extLst>
-  </p:cSld>
-  <p:clrMapOvr>
-    <a:masterClrMapping/>
-  </p:clrMapOvr>
-</p:sld>
-</file>
-
-<file path=ppt/slides/slide19.xml><?xml version="1.0" encoding="utf-8"?>
-<p:sld xmlns:a="http://schemas.openxmlformats.org/drawingml/2006/main" xmlns:r="http://schemas.openxmlformats.org/officeDocument/2006/relationships" xmlns:p="http://schemas.openxmlformats.org/presentationml/2006/main">
-  <p:cSld>
-    <p:spTree>
-      <p:nvGrpSpPr>
-        <p:cNvPr id="1" name="">
-          <a:extLst>
-            <a:ext uri="{FF2B5EF4-FFF2-40B4-BE49-F238E27FC236}">
-              <a16:creationId xmlns:a16="http://schemas.microsoft.com/office/drawing/2014/main" id="{61578D6A-D563-06A4-478F-4C666A15E159}"/>
-            </a:ext>
-          </a:extLst>
-        </p:cNvPr>
-        <p:cNvGrpSpPr/>
-        <p:nvPr/>
-      </p:nvGrpSpPr>
-      <p:grpSpPr>
-        <a:xfrm>
-          <a:off x="0" y="0"/>
-          <a:ext cx="0" cy="0"/>
-          <a:chOff x="0" y="0"/>
-          <a:chExt cx="0" cy="0"/>
-        </a:xfrm>
-      </p:grpSpPr>
-      <p:sp>
-        <p:nvSpPr>
-          <p:cNvPr id="2" name="Заголовок 1">
-            <a:extLst>
-              <a:ext uri="{FF2B5EF4-FFF2-40B4-BE49-F238E27FC236}">
-                <a16:creationId xmlns:a16="http://schemas.microsoft.com/office/drawing/2014/main" id="{71F5121B-7CAA-E5A6-B7BF-334161B3E6F9}"/>
-              </a:ext>
-            </a:extLst>
-          </p:cNvPr>
-          <p:cNvSpPr>
-            <a:spLocks noGrp="1"/>
-          </p:cNvSpPr>
-          <p:nvPr>
-            <p:ph type="title"/>
-          </p:nvPr>
-        </p:nvSpPr>
-        <p:spPr/>
-        <p:txBody>
-          <a:bodyPr>
-            <a:normAutofit/>
-          </a:bodyPr>
-          <a:lstStyle/>
-          <a:p>
-            <a:r>
-              <a:rPr lang="ru-RU" sz="4300" b="1" dirty="0">
-                <a:solidFill>
-                  <a:schemeClr val="accent1">
-                    <a:lumMod val="75000"/>
-                  </a:schemeClr>
-                </a:solidFill>
-              </a:rPr>
-              <a:t>Поиск ошибок в цепочке </a:t>
-            </a:r>
-            <a:r>
-              <a:rPr lang="en-US" sz="4300" b="1" dirty="0">
-                <a:solidFill>
-                  <a:schemeClr val="accent1">
-                    <a:lumMod val="75000"/>
-                  </a:schemeClr>
-                </a:solidFill>
-              </a:rPr>
-              <a:t>Ingress-Service-Pod</a:t>
-            </a:r>
-            <a:endParaRPr lang="ru-RU" sz="4300" b="1" dirty="0">
-              <a:solidFill>
-                <a:schemeClr val="accent1">
-                  <a:lumMod val="75000"/>
-                </a:schemeClr>
-              </a:solidFill>
-            </a:endParaRPr>
-          </a:p>
-        </p:txBody>
-      </p:sp>
-      <p:sp>
-        <p:nvSpPr>
-          <p:cNvPr id="3" name="Объект 2">
-            <a:extLst>
-              <a:ext uri="{FF2B5EF4-FFF2-40B4-BE49-F238E27FC236}">
-                <a16:creationId xmlns:a16="http://schemas.microsoft.com/office/drawing/2014/main" id="{5D1AF8C7-1835-4CB8-4FB4-03C670C5D480}"/>
-              </a:ext>
-            </a:extLst>
-          </p:cNvPr>
-          <p:cNvSpPr>
-            <a:spLocks noGrp="1"/>
-          </p:cNvSpPr>
-          <p:nvPr>
-            <p:ph sz="half" idx="1"/>
-          </p:nvPr>
-        </p:nvSpPr>
-        <p:spPr/>
-        <p:txBody>
-          <a:bodyPr>
-            <a:normAutofit/>
-          </a:bodyPr>
-          <a:lstStyle/>
-          <a:p>
-            <a:pPr marL="0" indent="0">
-              <a:buNone/>
-            </a:pPr>
-            <a:r>
-              <a:rPr lang="ru-RU" sz="2600" b="1" dirty="0"/>
-              <a:t>QA (</a:t>
-            </a:r>
-            <a:r>
-              <a:rPr lang="ru-RU" sz="2600" b="1" dirty="0" err="1"/>
-              <a:t>Postman</a:t>
-            </a:r>
-            <a:r>
-              <a:rPr lang="ru-RU" sz="2600" b="1" dirty="0"/>
-              <a:t>/Браузер)</a:t>
-            </a:r>
-            <a:r>
-              <a:rPr lang="ru-RU" sz="2600" dirty="0"/>
-              <a:t> </a:t>
-            </a:r>
-            <a:endParaRPr lang="en-US" sz="2600" dirty="0"/>
-          </a:p>
-          <a:p>
-            <a:pPr marL="0" indent="0">
-              <a:buNone/>
-            </a:pPr>
-            <a:endParaRPr lang="ru-RU" sz="2600" dirty="0"/>
-          </a:p>
-          <a:p>
-            <a:pPr marL="0" indent="0">
-              <a:buNone/>
-            </a:pPr>
-            <a:r>
-              <a:rPr lang="ru-RU" sz="2600" b="1" dirty="0" err="1"/>
-              <a:t>Ingress</a:t>
-            </a:r>
-            <a:r>
-              <a:rPr lang="ru-RU" sz="2600" dirty="0"/>
-              <a:t> (разобрал URL</a:t>
-            </a:r>
-            <a:r>
-              <a:rPr lang="en-US" sz="2600" dirty="0"/>
-              <a:t> </a:t>
-            </a:r>
-            <a:r>
-              <a:rPr lang="ru-RU" sz="2600" dirty="0"/>
-              <a:t>«/</a:t>
-            </a:r>
-            <a:r>
-              <a:rPr lang="ru-RU" sz="2600" dirty="0" err="1"/>
-              <a:t>api</a:t>
-            </a:r>
-            <a:r>
-              <a:rPr lang="ru-RU" sz="2600" dirty="0"/>
-              <a:t>/</a:t>
-            </a:r>
-            <a:r>
-              <a:rPr lang="ru-RU" sz="2600" dirty="0" err="1"/>
-              <a:t>users</a:t>
-            </a:r>
-            <a:r>
-              <a:rPr lang="ru-RU" sz="2600" dirty="0"/>
-              <a:t>») </a:t>
-            </a:r>
-            <a:endParaRPr lang="en-US" sz="2600" dirty="0"/>
-          </a:p>
-          <a:p>
-            <a:pPr marL="0" indent="0">
-              <a:buNone/>
-            </a:pPr>
-            <a:endParaRPr lang="ru-RU" sz="2600" dirty="0"/>
-          </a:p>
-          <a:p>
-            <a:pPr marL="0" indent="0">
-              <a:buNone/>
-            </a:pPr>
-            <a:r>
-              <a:rPr lang="ru-RU" sz="2600" b="1" dirty="0"/>
-              <a:t>Service</a:t>
-            </a:r>
-            <a:r>
-              <a:rPr lang="ru-RU" sz="2600" dirty="0"/>
-              <a:t> (выбрал живой под по меткам, </a:t>
-            </a:r>
-            <a:r>
-              <a:rPr lang="en-US" sz="2600" dirty="0"/>
-              <a:t>users-backend-service</a:t>
-            </a:r>
-            <a:r>
-              <a:rPr lang="ru-RU" sz="2600" dirty="0"/>
-              <a:t>)</a:t>
-            </a:r>
-            <a:r>
-              <a:rPr lang="en-US" sz="2600" dirty="0"/>
-              <a:t> </a:t>
-            </a:r>
-          </a:p>
-          <a:p>
-            <a:pPr marL="0" indent="0">
-              <a:buNone/>
-            </a:pPr>
-            <a:endParaRPr lang="ru-RU" sz="2600" dirty="0"/>
-          </a:p>
-          <a:p>
-            <a:pPr marL="0" indent="0">
-              <a:buNone/>
-            </a:pPr>
-            <a:r>
-              <a:rPr lang="ru-RU" sz="2600" b="1" dirty="0" err="1"/>
-              <a:t>Pod</a:t>
-            </a:r>
-            <a:r>
-              <a:rPr lang="ru-RU" sz="2600" dirty="0"/>
-              <a:t> (обработал код и вернул</a:t>
-            </a:r>
-            <a:r>
-              <a:rPr lang="en-US" sz="2600" dirty="0"/>
-              <a:t> </a:t>
-            </a:r>
-            <a:r>
-              <a:rPr lang="ru-RU" sz="2600" dirty="0"/>
-              <a:t>ответ).</a:t>
-            </a:r>
-          </a:p>
-        </p:txBody>
-      </p:sp>
-      <p:pic>
-        <p:nvPicPr>
-          <p:cNvPr id="7" name="Объект 6" descr="How to debug Kubernetes? (Deployments, Services &amp; Ingress)">
-            <a:extLst>
-              <a:ext uri="{FF2B5EF4-FFF2-40B4-BE49-F238E27FC236}">
-                <a16:creationId xmlns:a16="http://schemas.microsoft.com/office/drawing/2014/main" id="{A76ECB88-FAC2-7B4E-3244-AD1D1750E58E}"/>
-              </a:ext>
-            </a:extLst>
-          </p:cNvPr>
-          <p:cNvPicPr>
-            <a:picLocks noGrp="1" noChangeAspect="1"/>
-          </p:cNvPicPr>
-          <p:nvPr>
-            <p:ph sz="half" idx="2"/>
-          </p:nvPr>
-        </p:nvPicPr>
-        <p:blipFill>
-          <a:blip r:embed="rId2"/>
-          <a:stretch>
-            <a:fillRect/>
-          </a:stretch>
-        </p:blipFill>
-        <p:spPr>
-          <a:xfrm>
-            <a:off x="6172200" y="2545056"/>
-            <a:ext cx="5181600" cy="2912476"/>
-          </a:xfrm>
-          <a:prstGeom prst="rect">
-            <a:avLst/>
-          </a:prstGeom>
-        </p:spPr>
-      </p:pic>
-      <p:sp>
-        <p:nvSpPr>
-          <p:cNvPr id="8" name="Стрелка: вниз 7">
-            <a:extLst>
-              <a:ext uri="{FF2B5EF4-FFF2-40B4-BE49-F238E27FC236}">
-                <a16:creationId xmlns:a16="http://schemas.microsoft.com/office/drawing/2014/main" id="{75C451B3-4EF9-680F-CF20-7F094C9912D3}"/>
-              </a:ext>
-            </a:extLst>
-          </p:cNvPr>
-          <p:cNvSpPr/>
-          <p:nvPr/>
-        </p:nvSpPr>
-        <p:spPr>
-          <a:xfrm>
-            <a:off x="1844040" y="4672584"/>
-            <a:ext cx="521208" cy="393192"/>
-          </a:xfrm>
-          <a:prstGeom prst="downArrow">
-            <a:avLst/>
-          </a:prstGeom>
-        </p:spPr>
-        <p:style>
-          <a:lnRef idx="2">
-            <a:schemeClr val="accent1">
-              <a:shade val="15000"/>
-            </a:schemeClr>
-          </a:lnRef>
-          <a:fillRef idx="1">
-            <a:schemeClr val="accent1"/>
-          </a:fillRef>
-          <a:effectRef idx="0">
-            <a:schemeClr val="accent1"/>
-          </a:effectRef>
-          <a:fontRef idx="minor">
-            <a:schemeClr val="lt1"/>
-          </a:fontRef>
-        </p:style>
-        <p:txBody>
-          <a:bodyPr rtlCol="0" anchor="ctr"/>
-          <a:lstStyle/>
-          <a:p>
-            <a:pPr algn="ctr"/>
-            <a:endParaRPr lang="ru-RU"/>
-          </a:p>
-        </p:txBody>
-      </p:sp>
-      <p:sp>
-        <p:nvSpPr>
-          <p:cNvPr id="10" name="Стрелка: вниз 9">
-            <a:extLst>
-              <a:ext uri="{FF2B5EF4-FFF2-40B4-BE49-F238E27FC236}">
-                <a16:creationId xmlns:a16="http://schemas.microsoft.com/office/drawing/2014/main" id="{72CF5F67-6F99-70DD-556D-6327469B6570}"/>
-              </a:ext>
-            </a:extLst>
-          </p:cNvPr>
-          <p:cNvSpPr/>
-          <p:nvPr/>
-        </p:nvSpPr>
-        <p:spPr>
-          <a:xfrm>
-            <a:off x="1844040" y="3328225"/>
-            <a:ext cx="521208" cy="393192"/>
-          </a:xfrm>
-          <a:prstGeom prst="downArrow">
-            <a:avLst/>
-          </a:prstGeom>
-        </p:spPr>
-        <p:style>
-          <a:lnRef idx="2">
-            <a:schemeClr val="accent1">
-              <a:shade val="15000"/>
-            </a:schemeClr>
-          </a:lnRef>
-          <a:fillRef idx="1">
-            <a:schemeClr val="accent1"/>
-          </a:fillRef>
-          <a:effectRef idx="0">
-            <a:schemeClr val="accent1"/>
-          </a:effectRef>
-          <a:fontRef idx="minor">
-            <a:schemeClr val="lt1"/>
-          </a:fontRef>
-        </p:style>
-        <p:txBody>
-          <a:bodyPr rtlCol="0" anchor="ctr"/>
-          <a:lstStyle/>
-          <a:p>
-            <a:pPr algn="ctr"/>
-            <a:endParaRPr lang="ru-RU"/>
-          </a:p>
-        </p:txBody>
-      </p:sp>
-      <p:sp>
-        <p:nvSpPr>
-          <p:cNvPr id="12" name="Стрелка: вниз 11">
-            <a:extLst>
-              <a:ext uri="{FF2B5EF4-FFF2-40B4-BE49-F238E27FC236}">
-                <a16:creationId xmlns:a16="http://schemas.microsoft.com/office/drawing/2014/main" id="{01D8A0F1-7187-70EC-5E60-F19B0ED9AED6}"/>
-              </a:ext>
-            </a:extLst>
-          </p:cNvPr>
-          <p:cNvSpPr/>
-          <p:nvPr/>
-        </p:nvSpPr>
-        <p:spPr>
-          <a:xfrm>
-            <a:off x="1845564" y="2348460"/>
-            <a:ext cx="521208" cy="393192"/>
-          </a:xfrm>
-          <a:prstGeom prst="downArrow">
-            <a:avLst/>
-          </a:prstGeom>
-        </p:spPr>
-        <p:style>
-          <a:lnRef idx="2">
-            <a:schemeClr val="accent1">
-              <a:shade val="15000"/>
-            </a:schemeClr>
-          </a:lnRef>
-          <a:fillRef idx="1">
-            <a:schemeClr val="accent1"/>
-          </a:fillRef>
-          <a:effectRef idx="0">
-            <a:schemeClr val="accent1"/>
-          </a:effectRef>
-          <a:fontRef idx="minor">
-            <a:schemeClr val="lt1"/>
-          </a:fontRef>
-        </p:style>
-        <p:txBody>
-          <a:bodyPr rtlCol="0" anchor="ctr"/>
-          <a:lstStyle/>
-          <a:p>
-            <a:pPr algn="ctr"/>
-            <a:endParaRPr lang="ru-RU"/>
-          </a:p>
-        </p:txBody>
-      </p:sp>
-    </p:spTree>
-    <p:extLst>
-      <p:ext uri="{BB962C8B-B14F-4D97-AF65-F5344CB8AC3E}">
-        <p14:creationId xmlns:p14="http://schemas.microsoft.com/office/powerpoint/2010/main" val="1354702285"/>
       </p:ext>
     </p:extLst>
   </p:cSld>
@@ -6219,6 +6476,532 @@
         <p:cNvPr id="1" name="">
           <a:extLst>
             <a:ext uri="{FF2B5EF4-FFF2-40B4-BE49-F238E27FC236}">
+              <a16:creationId xmlns:a16="http://schemas.microsoft.com/office/drawing/2014/main" id="{242308FF-FDB2-BA24-029C-C631578FECC9}"/>
+            </a:ext>
+          </a:extLst>
+        </p:cNvPr>
+        <p:cNvGrpSpPr/>
+        <p:nvPr/>
+      </p:nvGrpSpPr>
+      <p:grpSpPr>
+        <a:xfrm>
+          <a:off x="0" y="0"/>
+          <a:ext cx="0" cy="0"/>
+          <a:chOff x="0" y="0"/>
+          <a:chExt cx="0" cy="0"/>
+        </a:xfrm>
+      </p:grpSpPr>
+      <p:sp>
+        <p:nvSpPr>
+          <p:cNvPr id="2" name="Заголовок 1">
+            <a:extLst>
+              <a:ext uri="{FF2B5EF4-FFF2-40B4-BE49-F238E27FC236}">
+                <a16:creationId xmlns:a16="http://schemas.microsoft.com/office/drawing/2014/main" id="{DEF84094-F0D9-C447-A625-8B6F8E4BC21F}"/>
+              </a:ext>
+            </a:extLst>
+          </p:cNvPr>
+          <p:cNvSpPr>
+            <a:spLocks noGrp="1"/>
+          </p:cNvSpPr>
+          <p:nvPr>
+            <p:ph type="title"/>
+          </p:nvPr>
+        </p:nvSpPr>
+        <p:spPr/>
+        <p:txBody>
+          <a:bodyPr/>
+          <a:lstStyle/>
+          <a:p>
+            <a:r>
+              <a:rPr lang="ru-RU" b="1" dirty="0">
+                <a:solidFill>
+                  <a:schemeClr val="accent1">
+                    <a:lumMod val="75000"/>
+                  </a:schemeClr>
+                </a:solidFill>
+              </a:rPr>
+              <a:t>Общие концепции. </a:t>
+            </a:r>
+            <a:r>
+              <a:rPr lang="en-US" b="1" dirty="0">
+                <a:solidFill>
+                  <a:schemeClr val="accent1">
+                    <a:lumMod val="75000"/>
+                  </a:schemeClr>
+                </a:solidFill>
+              </a:rPr>
+              <a:t>Ingress</a:t>
+            </a:r>
+            <a:endParaRPr lang="ru-RU" b="1" dirty="0">
+              <a:solidFill>
+                <a:schemeClr val="accent1">
+                  <a:lumMod val="75000"/>
+                </a:schemeClr>
+              </a:solidFill>
+            </a:endParaRPr>
+          </a:p>
+        </p:txBody>
+      </p:sp>
+      <p:pic>
+        <p:nvPicPr>
+          <p:cNvPr id="5" name="Объект 4">
+            <a:extLst>
+              <a:ext uri="{FF2B5EF4-FFF2-40B4-BE49-F238E27FC236}">
+                <a16:creationId xmlns:a16="http://schemas.microsoft.com/office/drawing/2014/main" id="{D638B2F1-9E00-2E68-0493-5440C3862FD0}"/>
+              </a:ext>
+            </a:extLst>
+          </p:cNvPr>
+          <p:cNvPicPr>
+            <a:picLocks noGrp="1" noChangeAspect="1"/>
+          </p:cNvPicPr>
+          <p:nvPr>
+            <p:ph idx="1"/>
+          </p:nvPr>
+        </p:nvPicPr>
+        <p:blipFill>
+          <a:blip r:embed="rId2"/>
+          <a:stretch>
+            <a:fillRect/>
+          </a:stretch>
+        </p:blipFill>
+        <p:spPr>
+          <a:xfrm>
+            <a:off x="838200" y="2018004"/>
+            <a:ext cx="10515600" cy="3966579"/>
+          </a:xfrm>
+          <a:prstGeom prst="rect">
+            <a:avLst/>
+          </a:prstGeom>
+        </p:spPr>
+      </p:pic>
+    </p:spTree>
+    <p:extLst>
+      <p:ext uri="{BB962C8B-B14F-4D97-AF65-F5344CB8AC3E}">
+        <p14:creationId xmlns:p14="http://schemas.microsoft.com/office/powerpoint/2010/main" val="3591312026"/>
+      </p:ext>
+    </p:extLst>
+  </p:cSld>
+  <p:clrMapOvr>
+    <a:masterClrMapping/>
+  </p:clrMapOvr>
+</p:sld>
+</file>
+
+<file path=ppt/slides/slide21.xml><?xml version="1.0" encoding="utf-8"?>
+<p:sld xmlns:a="http://schemas.openxmlformats.org/drawingml/2006/main" xmlns:r="http://schemas.openxmlformats.org/officeDocument/2006/relationships" xmlns:p="http://schemas.openxmlformats.org/presentationml/2006/main">
+  <p:cSld>
+    <p:spTree>
+      <p:nvGrpSpPr>
+        <p:cNvPr id="1" name="">
+          <a:extLst>
+            <a:ext uri="{FF2B5EF4-FFF2-40B4-BE49-F238E27FC236}">
+              <a16:creationId xmlns:a16="http://schemas.microsoft.com/office/drawing/2014/main" id="{61578D6A-D563-06A4-478F-4C666A15E159}"/>
+            </a:ext>
+          </a:extLst>
+        </p:cNvPr>
+        <p:cNvGrpSpPr/>
+        <p:nvPr/>
+      </p:nvGrpSpPr>
+      <p:grpSpPr>
+        <a:xfrm>
+          <a:off x="0" y="0"/>
+          <a:ext cx="0" cy="0"/>
+          <a:chOff x="0" y="0"/>
+          <a:chExt cx="0" cy="0"/>
+        </a:xfrm>
+      </p:grpSpPr>
+      <p:sp>
+        <p:nvSpPr>
+          <p:cNvPr id="2" name="Заголовок 1">
+            <a:extLst>
+              <a:ext uri="{FF2B5EF4-FFF2-40B4-BE49-F238E27FC236}">
+                <a16:creationId xmlns:a16="http://schemas.microsoft.com/office/drawing/2014/main" id="{71F5121B-7CAA-E5A6-B7BF-334161B3E6F9}"/>
+              </a:ext>
+            </a:extLst>
+          </p:cNvPr>
+          <p:cNvSpPr>
+            <a:spLocks noGrp="1"/>
+          </p:cNvSpPr>
+          <p:nvPr>
+            <p:ph type="title"/>
+          </p:nvPr>
+        </p:nvSpPr>
+        <p:spPr/>
+        <p:txBody>
+          <a:bodyPr>
+            <a:normAutofit/>
+          </a:bodyPr>
+          <a:lstStyle/>
+          <a:p>
+            <a:r>
+              <a:rPr lang="ru-RU" sz="4300" b="1" dirty="0">
+                <a:solidFill>
+                  <a:schemeClr val="accent1">
+                    <a:lumMod val="75000"/>
+                  </a:schemeClr>
+                </a:solidFill>
+              </a:rPr>
+              <a:t>Поиск ошибок в цепочке </a:t>
+            </a:r>
+            <a:r>
+              <a:rPr lang="en-US" sz="4300" b="1" dirty="0">
+                <a:solidFill>
+                  <a:schemeClr val="accent1">
+                    <a:lumMod val="75000"/>
+                  </a:schemeClr>
+                </a:solidFill>
+              </a:rPr>
+              <a:t>Ingress-Service-Pod</a:t>
+            </a:r>
+            <a:endParaRPr lang="ru-RU" sz="4300" b="1" dirty="0">
+              <a:solidFill>
+                <a:schemeClr val="accent1">
+                  <a:lumMod val="75000"/>
+                </a:schemeClr>
+              </a:solidFill>
+            </a:endParaRPr>
+          </a:p>
+        </p:txBody>
+      </p:sp>
+      <p:sp>
+        <p:nvSpPr>
+          <p:cNvPr id="3" name="Объект 2">
+            <a:extLst>
+              <a:ext uri="{FF2B5EF4-FFF2-40B4-BE49-F238E27FC236}">
+                <a16:creationId xmlns:a16="http://schemas.microsoft.com/office/drawing/2014/main" id="{5D1AF8C7-1835-4CB8-4FB4-03C670C5D480}"/>
+              </a:ext>
+            </a:extLst>
+          </p:cNvPr>
+          <p:cNvSpPr>
+            <a:spLocks noGrp="1"/>
+          </p:cNvSpPr>
+          <p:nvPr>
+            <p:ph sz="half" idx="1"/>
+          </p:nvPr>
+        </p:nvSpPr>
+        <p:spPr/>
+        <p:txBody>
+          <a:bodyPr>
+            <a:normAutofit/>
+          </a:bodyPr>
+          <a:lstStyle/>
+          <a:p>
+            <a:pPr marL="0" indent="0">
+              <a:buNone/>
+            </a:pPr>
+            <a:r>
+              <a:rPr lang="ru-RU" sz="2600" b="1" dirty="0"/>
+              <a:t>QA (</a:t>
+            </a:r>
+            <a:r>
+              <a:rPr lang="ru-RU" sz="2600" b="1" dirty="0" err="1"/>
+              <a:t>Postman</a:t>
+            </a:r>
+            <a:r>
+              <a:rPr lang="ru-RU" sz="2600" b="1" dirty="0"/>
+              <a:t>/Браузер)</a:t>
+            </a:r>
+            <a:r>
+              <a:rPr lang="ru-RU" sz="2600" dirty="0"/>
+              <a:t> </a:t>
+            </a:r>
+            <a:endParaRPr lang="en-US" sz="2600" dirty="0"/>
+          </a:p>
+          <a:p>
+            <a:pPr marL="0" indent="0">
+              <a:buNone/>
+            </a:pPr>
+            <a:endParaRPr lang="ru-RU" sz="2600" dirty="0"/>
+          </a:p>
+          <a:p>
+            <a:pPr marL="0" indent="0">
+              <a:buNone/>
+            </a:pPr>
+            <a:r>
+              <a:rPr lang="ru-RU" sz="2600" b="1" dirty="0" err="1"/>
+              <a:t>Ingress</a:t>
+            </a:r>
+            <a:r>
+              <a:rPr lang="ru-RU" sz="2600" dirty="0"/>
+              <a:t> (разобрал URL</a:t>
+            </a:r>
+            <a:r>
+              <a:rPr lang="en-US" sz="2600" dirty="0"/>
+              <a:t> </a:t>
+            </a:r>
+            <a:r>
+              <a:rPr lang="ru-RU" sz="2600" dirty="0"/>
+              <a:t>«/</a:t>
+            </a:r>
+            <a:r>
+              <a:rPr lang="ru-RU" sz="2600" dirty="0" err="1"/>
+              <a:t>api</a:t>
+            </a:r>
+            <a:r>
+              <a:rPr lang="ru-RU" sz="2600" dirty="0"/>
+              <a:t>/</a:t>
+            </a:r>
+            <a:r>
+              <a:rPr lang="ru-RU" sz="2600" dirty="0" err="1"/>
+              <a:t>users</a:t>
+            </a:r>
+            <a:r>
+              <a:rPr lang="ru-RU" sz="2600" dirty="0"/>
+              <a:t>») </a:t>
+            </a:r>
+            <a:endParaRPr lang="en-US" sz="2600" dirty="0"/>
+          </a:p>
+          <a:p>
+            <a:pPr marL="0" indent="0">
+              <a:buNone/>
+            </a:pPr>
+            <a:endParaRPr lang="ru-RU" sz="2600" dirty="0"/>
+          </a:p>
+          <a:p>
+            <a:pPr marL="0" indent="0">
+              <a:buNone/>
+            </a:pPr>
+            <a:r>
+              <a:rPr lang="ru-RU" sz="2600" b="1" dirty="0"/>
+              <a:t>Service</a:t>
+            </a:r>
+            <a:r>
+              <a:rPr lang="ru-RU" sz="2600" dirty="0"/>
+              <a:t> (выбрал живой под по меткам, </a:t>
+            </a:r>
+            <a:r>
+              <a:rPr lang="en-US" sz="2600" dirty="0"/>
+              <a:t>users-backend-service</a:t>
+            </a:r>
+            <a:r>
+              <a:rPr lang="ru-RU" sz="2600" dirty="0"/>
+              <a:t>)</a:t>
+            </a:r>
+            <a:r>
+              <a:rPr lang="en-US" sz="2600" dirty="0"/>
+              <a:t> </a:t>
+            </a:r>
+          </a:p>
+          <a:p>
+            <a:pPr marL="0" indent="0">
+              <a:buNone/>
+            </a:pPr>
+            <a:endParaRPr lang="ru-RU" sz="2600" dirty="0"/>
+          </a:p>
+          <a:p>
+            <a:pPr marL="0" indent="0">
+              <a:buNone/>
+            </a:pPr>
+            <a:r>
+              <a:rPr lang="ru-RU" sz="2600" b="1" dirty="0" err="1"/>
+              <a:t>Pod</a:t>
+            </a:r>
+            <a:r>
+              <a:rPr lang="ru-RU" sz="2600" dirty="0"/>
+              <a:t> (обработал код и вернул</a:t>
+            </a:r>
+            <a:r>
+              <a:rPr lang="en-US" sz="2600" dirty="0"/>
+              <a:t> </a:t>
+            </a:r>
+            <a:r>
+              <a:rPr lang="ru-RU" sz="2600" dirty="0"/>
+              <a:t>ответ).</a:t>
+            </a:r>
+          </a:p>
+        </p:txBody>
+      </p:sp>
+      <p:pic>
+        <p:nvPicPr>
+          <p:cNvPr id="7" name="Объект 6" descr="How to debug Kubernetes? (Deployments, Services &amp; Ingress)">
+            <a:extLst>
+              <a:ext uri="{FF2B5EF4-FFF2-40B4-BE49-F238E27FC236}">
+                <a16:creationId xmlns:a16="http://schemas.microsoft.com/office/drawing/2014/main" id="{A76ECB88-FAC2-7B4E-3244-AD1D1750E58E}"/>
+              </a:ext>
+            </a:extLst>
+          </p:cNvPr>
+          <p:cNvPicPr>
+            <a:picLocks noGrp="1" noChangeAspect="1"/>
+          </p:cNvPicPr>
+          <p:nvPr>
+            <p:ph sz="half" idx="2"/>
+          </p:nvPr>
+        </p:nvPicPr>
+        <p:blipFill>
+          <a:blip r:embed="rId2"/>
+          <a:stretch>
+            <a:fillRect/>
+          </a:stretch>
+        </p:blipFill>
+        <p:spPr>
+          <a:xfrm>
+            <a:off x="6172200" y="2545056"/>
+            <a:ext cx="5181600" cy="2912476"/>
+          </a:xfrm>
+          <a:prstGeom prst="rect">
+            <a:avLst/>
+          </a:prstGeom>
+        </p:spPr>
+      </p:pic>
+      <p:sp>
+        <p:nvSpPr>
+          <p:cNvPr id="8" name="Стрелка: вниз 7">
+            <a:extLst>
+              <a:ext uri="{FF2B5EF4-FFF2-40B4-BE49-F238E27FC236}">
+                <a16:creationId xmlns:a16="http://schemas.microsoft.com/office/drawing/2014/main" id="{75C451B3-4EF9-680F-CF20-7F094C9912D3}"/>
+              </a:ext>
+            </a:extLst>
+          </p:cNvPr>
+          <p:cNvSpPr/>
+          <p:nvPr/>
+        </p:nvSpPr>
+        <p:spPr>
+          <a:xfrm>
+            <a:off x="1844040" y="4672584"/>
+            <a:ext cx="521208" cy="393192"/>
+          </a:xfrm>
+          <a:prstGeom prst="downArrow">
+            <a:avLst/>
+          </a:prstGeom>
+        </p:spPr>
+        <p:style>
+          <a:lnRef idx="2">
+            <a:schemeClr val="accent1">
+              <a:shade val="15000"/>
+            </a:schemeClr>
+          </a:lnRef>
+          <a:fillRef idx="1">
+            <a:schemeClr val="accent1"/>
+          </a:fillRef>
+          <a:effectRef idx="0">
+            <a:schemeClr val="accent1"/>
+          </a:effectRef>
+          <a:fontRef idx="minor">
+            <a:schemeClr val="lt1"/>
+          </a:fontRef>
+        </p:style>
+        <p:txBody>
+          <a:bodyPr rtlCol="0" anchor="ctr"/>
+          <a:lstStyle/>
+          <a:p>
+            <a:pPr algn="ctr"/>
+            <a:endParaRPr lang="ru-RU"/>
+          </a:p>
+        </p:txBody>
+      </p:sp>
+      <p:sp>
+        <p:nvSpPr>
+          <p:cNvPr id="10" name="Стрелка: вниз 9">
+            <a:extLst>
+              <a:ext uri="{FF2B5EF4-FFF2-40B4-BE49-F238E27FC236}">
+                <a16:creationId xmlns:a16="http://schemas.microsoft.com/office/drawing/2014/main" id="{72CF5F67-6F99-70DD-556D-6327469B6570}"/>
+              </a:ext>
+            </a:extLst>
+          </p:cNvPr>
+          <p:cNvSpPr/>
+          <p:nvPr/>
+        </p:nvSpPr>
+        <p:spPr>
+          <a:xfrm>
+            <a:off x="1844040" y="3328225"/>
+            <a:ext cx="521208" cy="393192"/>
+          </a:xfrm>
+          <a:prstGeom prst="downArrow">
+            <a:avLst/>
+          </a:prstGeom>
+        </p:spPr>
+        <p:style>
+          <a:lnRef idx="2">
+            <a:schemeClr val="accent1">
+              <a:shade val="15000"/>
+            </a:schemeClr>
+          </a:lnRef>
+          <a:fillRef idx="1">
+            <a:schemeClr val="accent1"/>
+          </a:fillRef>
+          <a:effectRef idx="0">
+            <a:schemeClr val="accent1"/>
+          </a:effectRef>
+          <a:fontRef idx="minor">
+            <a:schemeClr val="lt1"/>
+          </a:fontRef>
+        </p:style>
+        <p:txBody>
+          <a:bodyPr rtlCol="0" anchor="ctr"/>
+          <a:lstStyle/>
+          <a:p>
+            <a:pPr algn="ctr"/>
+            <a:endParaRPr lang="ru-RU"/>
+          </a:p>
+        </p:txBody>
+      </p:sp>
+      <p:sp>
+        <p:nvSpPr>
+          <p:cNvPr id="12" name="Стрелка: вниз 11">
+            <a:extLst>
+              <a:ext uri="{FF2B5EF4-FFF2-40B4-BE49-F238E27FC236}">
+                <a16:creationId xmlns:a16="http://schemas.microsoft.com/office/drawing/2014/main" id="{01D8A0F1-7187-70EC-5E60-F19B0ED9AED6}"/>
+              </a:ext>
+            </a:extLst>
+          </p:cNvPr>
+          <p:cNvSpPr/>
+          <p:nvPr/>
+        </p:nvSpPr>
+        <p:spPr>
+          <a:xfrm>
+            <a:off x="1845564" y="2348460"/>
+            <a:ext cx="521208" cy="393192"/>
+          </a:xfrm>
+          <a:prstGeom prst="downArrow">
+            <a:avLst/>
+          </a:prstGeom>
+        </p:spPr>
+        <p:style>
+          <a:lnRef idx="2">
+            <a:schemeClr val="accent1">
+              <a:shade val="15000"/>
+            </a:schemeClr>
+          </a:lnRef>
+          <a:fillRef idx="1">
+            <a:schemeClr val="accent1"/>
+          </a:fillRef>
+          <a:effectRef idx="0">
+            <a:schemeClr val="accent1"/>
+          </a:effectRef>
+          <a:fontRef idx="minor">
+            <a:schemeClr val="lt1"/>
+          </a:fontRef>
+        </p:style>
+        <p:txBody>
+          <a:bodyPr rtlCol="0" anchor="ctr"/>
+          <a:lstStyle/>
+          <a:p>
+            <a:pPr algn="ctr"/>
+            <a:endParaRPr lang="ru-RU"/>
+          </a:p>
+        </p:txBody>
+      </p:sp>
+    </p:spTree>
+    <p:extLst>
+      <p:ext uri="{BB962C8B-B14F-4D97-AF65-F5344CB8AC3E}">
+        <p14:creationId xmlns:p14="http://schemas.microsoft.com/office/powerpoint/2010/main" val="1354702285"/>
+      </p:ext>
+    </p:extLst>
+  </p:cSld>
+  <p:clrMapOvr>
+    <a:masterClrMapping/>
+  </p:clrMapOvr>
+</p:sld>
+</file>
+
+<file path=ppt/slides/slide22.xml><?xml version="1.0" encoding="utf-8"?>
+<p:sld xmlns:a="http://schemas.openxmlformats.org/drawingml/2006/main" xmlns:r="http://schemas.openxmlformats.org/officeDocument/2006/relationships" xmlns:p="http://schemas.openxmlformats.org/presentationml/2006/main">
+  <p:cSld>
+    <p:spTree>
+      <p:nvGrpSpPr>
+        <p:cNvPr id="1" name="">
+          <a:extLst>
+            <a:ext uri="{FF2B5EF4-FFF2-40B4-BE49-F238E27FC236}">
               <a16:creationId xmlns:a16="http://schemas.microsoft.com/office/drawing/2014/main" id="{26EB0A25-FFD1-3231-983A-22778D4CCD08}"/>
             </a:ext>
           </a:extLst>
@@ -6820,7 +7603,7 @@
 </p:sld>
 </file>
 
-<file path=ppt/slides/slide21.xml><?xml version="1.0" encoding="utf-8"?>
+<file path=ppt/slides/slide23.xml><?xml version="1.0" encoding="utf-8"?>
 <p:sld xmlns:a="http://schemas.openxmlformats.org/drawingml/2006/main" xmlns:r="http://schemas.openxmlformats.org/officeDocument/2006/relationships" xmlns:p="http://schemas.openxmlformats.org/presentationml/2006/main">
   <p:cSld>
     <p:spTree>
@@ -7251,7 +8034,7 @@
 </p:sld>
 </file>
 
-<file path=ppt/slides/slide22.xml><?xml version="1.0" encoding="utf-8"?>
+<file path=ppt/slides/slide24.xml><?xml version="1.0" encoding="utf-8"?>
 <p:sld xmlns:a="http://schemas.openxmlformats.org/drawingml/2006/main" xmlns:r="http://schemas.openxmlformats.org/officeDocument/2006/relationships" xmlns:p="http://schemas.openxmlformats.org/presentationml/2006/main">
   <p:cSld>
     <p:spTree>
@@ -7402,7 +8185,7 @@
 </p:sld>
 </file>
 
-<file path=ppt/slides/slide23.xml><?xml version="1.0" encoding="utf-8"?>
+<file path=ppt/slides/slide25.xml><?xml version="1.0" encoding="utf-8"?>
 <p:sld xmlns:a="http://schemas.openxmlformats.org/drawingml/2006/main" xmlns:r="http://schemas.openxmlformats.org/officeDocument/2006/relationships" xmlns:p="http://schemas.openxmlformats.org/presentationml/2006/main">
   <p:cSld>
     <p:spTree>
@@ -7855,7 +8638,7 @@
 </p:sld>
 </file>
 
-<file path=ppt/slides/slide24.xml><?xml version="1.0" encoding="utf-8"?>
+<file path=ppt/slides/slide26.xml><?xml version="1.0" encoding="utf-8"?>
 <p:sld xmlns:a="http://schemas.openxmlformats.org/drawingml/2006/main" xmlns:r="http://schemas.openxmlformats.org/officeDocument/2006/relationships" xmlns:p="http://schemas.openxmlformats.org/presentationml/2006/main">
   <p:cSld>
     <p:spTree>
@@ -8279,7 +9062,7 @@
 </p:sld>
 </file>
 
-<file path=ppt/slides/slide25.xml><?xml version="1.0" encoding="utf-8"?>
+<file path=ppt/slides/slide27.xml><?xml version="1.0" encoding="utf-8"?>
 <p:sld xmlns:a="http://schemas.openxmlformats.org/drawingml/2006/main" xmlns:r="http://schemas.openxmlformats.org/officeDocument/2006/relationships" xmlns:p="http://schemas.openxmlformats.org/presentationml/2006/main">
   <p:cSld>
     <p:spTree>
@@ -8453,7 +9236,7 @@
 </p:sld>
 </file>
 
-<file path=ppt/slides/slide26.xml><?xml version="1.0" encoding="utf-8"?>
+<file path=ppt/slides/slide28.xml><?xml version="1.0" encoding="utf-8"?>
 <p:sld xmlns:a="http://schemas.openxmlformats.org/drawingml/2006/main" xmlns:r="http://schemas.openxmlformats.org/officeDocument/2006/relationships" xmlns:p="http://schemas.openxmlformats.org/presentationml/2006/main">
   <p:cSld>
     <p:spTree>
@@ -10090,7 +10873,7 @@
         </p:nvSpPr>
         <p:spPr>
           <a:xfrm>
-            <a:off x="587406" y="4580521"/>
+            <a:off x="662511" y="4306201"/>
             <a:ext cx="351378" cy="707886"/>
           </a:xfrm>
           <a:prstGeom prst="rect">
